--- a/outputs/qce26-bof-simple-header-slide-format.pptx
+++ b/outputs/qce26-bof-simple-header-slide-format.pptx
@@ -2,13 +2,42 @@
 <file path=ppt/presentation.xml><?xml version="1.0" encoding="utf-8"?>
 <p:presentation xmlns:p="http://schemas.openxmlformats.org/presentationml/2006/main">
   <p:sldMasterIdLst>
-    <p:sldMasterId xmlns:r="http://schemas.openxmlformats.org/officeDocument/2006/relationships" id="2147483648" r:id="R44dbf1be5c324fd4"/>
+    <p:sldMasterId xmlns:r="http://schemas.openxmlformats.org/officeDocument/2006/relationships" id="2147483648" r:id="R7314cbe7bbb34f80"/>
   </p:sldMasterIdLst>
   <p:notesMasterIdLst>
-    <p:notesMasterId xmlns:r="http://schemas.openxmlformats.org/officeDocument/2006/relationships" r:id="R5d575a1fc5064f81"/>
+    <p:notesMasterId xmlns:r="http://schemas.openxmlformats.org/officeDocument/2006/relationships" r:id="R3ef11a07af4841e3"/>
   </p:notesMasterIdLst>
   <p:sldIdLst>
-    <p:sldId xmlns:r="http://schemas.openxmlformats.org/officeDocument/2006/relationships" id="256" r:id="R598c51dd462845f6"/>
+    <p:sldId xmlns:r="http://schemas.openxmlformats.org/officeDocument/2006/relationships" id="256" r:id="Rf4b4e6e0207b4ca7"/>
+    <p:sldId xmlns:r="http://schemas.openxmlformats.org/officeDocument/2006/relationships" id="257" r:id="R3f4fdb336d724f98"/>
+    <p:sldId xmlns:r="http://schemas.openxmlformats.org/officeDocument/2006/relationships" id="258" r:id="R2faff7cb00774f7a"/>
+    <p:sldId xmlns:r="http://schemas.openxmlformats.org/officeDocument/2006/relationships" id="259" r:id="R7097a01b6c2e4ecd"/>
+    <p:sldId xmlns:r="http://schemas.openxmlformats.org/officeDocument/2006/relationships" id="260" r:id="Rddd9c0da28934a25"/>
+    <p:sldId xmlns:r="http://schemas.openxmlformats.org/officeDocument/2006/relationships" id="261" r:id="Rabd89d10be8645bb"/>
+    <p:sldId xmlns:r="http://schemas.openxmlformats.org/officeDocument/2006/relationships" id="262" r:id="Rc85ead705c8f46bb"/>
+    <p:sldId xmlns:r="http://schemas.openxmlformats.org/officeDocument/2006/relationships" id="263" r:id="R948530f8e9fd4516"/>
+    <p:sldId xmlns:r="http://schemas.openxmlformats.org/officeDocument/2006/relationships" id="264" r:id="R496fa225cd164203"/>
+    <p:sldId xmlns:r="http://schemas.openxmlformats.org/officeDocument/2006/relationships" id="265" r:id="R9e3d66d2745d47c4"/>
+    <p:sldId xmlns:r="http://schemas.openxmlformats.org/officeDocument/2006/relationships" id="266" r:id="R33ecf79072c146c0"/>
+    <p:sldId xmlns:r="http://schemas.openxmlformats.org/officeDocument/2006/relationships" id="267" r:id="Rf8d144f1547f4cc9"/>
+    <p:sldId xmlns:r="http://schemas.openxmlformats.org/officeDocument/2006/relationships" id="268" r:id="R3e6e93bc52f14821"/>
+    <p:sldId xmlns:r="http://schemas.openxmlformats.org/officeDocument/2006/relationships" id="269" r:id="R4e904ae359fa4c36"/>
+    <p:sldId xmlns:r="http://schemas.openxmlformats.org/officeDocument/2006/relationships" id="270" r:id="Re666ba01c9304a9b"/>
+    <p:sldId xmlns:r="http://schemas.openxmlformats.org/officeDocument/2006/relationships" id="271" r:id="R2578027d0cec4e6c"/>
+    <p:sldId xmlns:r="http://schemas.openxmlformats.org/officeDocument/2006/relationships" id="272" r:id="R82f049b5d3964e85"/>
+    <p:sldId xmlns:r="http://schemas.openxmlformats.org/officeDocument/2006/relationships" id="273" r:id="R431b393a45ea48be"/>
+    <p:sldId xmlns:r="http://schemas.openxmlformats.org/officeDocument/2006/relationships" id="274" r:id="R1beed7be769c47be"/>
+    <p:sldId xmlns:r="http://schemas.openxmlformats.org/officeDocument/2006/relationships" id="275" r:id="R00ef07a88dba4a4e"/>
+    <p:sldId xmlns:r="http://schemas.openxmlformats.org/officeDocument/2006/relationships" id="276" r:id="R64182452312d4f57"/>
+    <p:sldId xmlns:r="http://schemas.openxmlformats.org/officeDocument/2006/relationships" id="277" r:id="R48b18fd0921b46c0"/>
+    <p:sldId xmlns:r="http://schemas.openxmlformats.org/officeDocument/2006/relationships" id="278" r:id="R6deeb3c3d69f4d19"/>
+    <p:sldId xmlns:r="http://schemas.openxmlformats.org/officeDocument/2006/relationships" id="279" r:id="R3b524fca53fa4b7e"/>
+    <p:sldId xmlns:r="http://schemas.openxmlformats.org/officeDocument/2006/relationships" id="280" r:id="R297e59f755374e7a"/>
+    <p:sldId xmlns:r="http://schemas.openxmlformats.org/officeDocument/2006/relationships" id="281" r:id="Rf4806cd2ab3b4030"/>
+    <p:sldId xmlns:r="http://schemas.openxmlformats.org/officeDocument/2006/relationships" id="282" r:id="R115e051b042a4fb7"/>
+    <p:sldId xmlns:r="http://schemas.openxmlformats.org/officeDocument/2006/relationships" id="283" r:id="R33a58340f1654ca7"/>
+    <p:sldId xmlns:r="http://schemas.openxmlformats.org/officeDocument/2006/relationships" id="284" r:id="R1ee642445e654168"/>
+    <p:sldId xmlns:r="http://schemas.openxmlformats.org/officeDocument/2006/relationships" id="285" r:id="R40dca8aa10c74d85"/>
   </p:sldIdLst>
   <p:sldSz cx="12192000" cy="6858000"/>
   <p:notesSz cx="6858000" cy="9144000"/>
@@ -563,6 +592,1920 @@
 </p:notes>
 </file>
 
+<file path=ppt/notesSlides/notesSlide10.xml><?xml version="1.0" encoding="utf-8"?>
+<p:notes xmlns:p="http://schemas.openxmlformats.org/presentationml/2006/main">
+  <p:cSld>
+    <p:spTree>
+      <p:nvGrpSpPr>
+        <p:cNvPr id="1" name=""/>
+        <p:cNvGrpSpPr/>
+        <p:nvPr/>
+      </p:nvGrpSpPr>
+      <p:grpSpPr>
+        <a:xfrm xmlns:a="http://schemas.openxmlformats.org/drawingml/2006/main"/>
+      </p:grpSpPr>
+      <p:sp>
+        <p:nvSpPr>
+          <p:cNvPr id="2" name="Slide Image Placeholder 1"/>
+          <p:cNvSpPr>
+            <a:spLocks xmlns:a="http://schemas.openxmlformats.org/drawingml/2006/main" noGrp="1"/>
+          </p:cNvSpPr>
+          <p:nvPr>
+            <p:ph type="sldImg" idx="0"/>
+          </p:nvPr>
+        </p:nvSpPr>
+        <p:spPr/>
+      </p:sp>
+      <p:sp>
+        <p:nvSpPr>
+          <p:cNvPr id="3" name="Notes Placeholder 2"/>
+          <p:cNvSpPr>
+            <a:spLocks xmlns:a="http://schemas.openxmlformats.org/drawingml/2006/main" noGrp="1"/>
+          </p:cNvSpPr>
+          <p:nvPr>
+            <p:ph type="body" idx="1"/>
+          </p:nvPr>
+        </p:nvSpPr>
+        <p:spPr/>
+        <p:txBody>
+          <a:bodyPr xmlns:a="http://schemas.openxmlformats.org/drawingml/2006/main"/>
+          <a:lstStyle xmlns:a="http://schemas.openxmlformats.org/drawingml/2006/main"/>
+          <a:p xmlns:a="http://schemas.openxmlformats.org/drawingml/2006/main"/>
+        </p:txBody>
+      </p:sp>
+      <p:sp>
+        <p:nvSpPr>
+          <p:cNvPr id="4" name="Slide Number Placeholder 3"/>
+          <p:cNvSpPr>
+            <a:spLocks xmlns:a="http://schemas.openxmlformats.org/drawingml/2006/main" noGrp="1"/>
+          </p:cNvSpPr>
+          <p:nvPr>
+            <p:ph type="sldNum" idx="5"/>
+          </p:nvPr>
+        </p:nvSpPr>
+        <p:spPr/>
+        <p:txBody>
+          <a:bodyPr xmlns:a="http://schemas.openxmlformats.org/drawingml/2006/main"/>
+          <a:lstStyle xmlns:a="http://schemas.openxmlformats.org/drawingml/2006/main"/>
+          <a:p xmlns:a="http://schemas.openxmlformats.org/drawingml/2006/main"/>
+        </p:txBody>
+      </p:sp>
+    </p:spTree>
+  </p:cSld>
+  <p:clrMapOvr>
+    <a:masterClrMapping xmlns:a="http://schemas.openxmlformats.org/drawingml/2006/main"/>
+  </p:clrMapOvr>
+</p:notes>
+</file>
+
+<file path=ppt/notesSlides/notesSlide11.xml><?xml version="1.0" encoding="utf-8"?>
+<p:notes xmlns:p="http://schemas.openxmlformats.org/presentationml/2006/main">
+  <p:cSld>
+    <p:spTree>
+      <p:nvGrpSpPr>
+        <p:cNvPr id="1" name=""/>
+        <p:cNvGrpSpPr/>
+        <p:nvPr/>
+      </p:nvGrpSpPr>
+      <p:grpSpPr>
+        <a:xfrm xmlns:a="http://schemas.openxmlformats.org/drawingml/2006/main"/>
+      </p:grpSpPr>
+      <p:sp>
+        <p:nvSpPr>
+          <p:cNvPr id="2" name="Slide Image Placeholder 1"/>
+          <p:cNvSpPr>
+            <a:spLocks xmlns:a="http://schemas.openxmlformats.org/drawingml/2006/main" noGrp="1"/>
+          </p:cNvSpPr>
+          <p:nvPr>
+            <p:ph type="sldImg" idx="0"/>
+          </p:nvPr>
+        </p:nvSpPr>
+        <p:spPr/>
+      </p:sp>
+      <p:sp>
+        <p:nvSpPr>
+          <p:cNvPr id="3" name="Notes Placeholder 2"/>
+          <p:cNvSpPr>
+            <a:spLocks xmlns:a="http://schemas.openxmlformats.org/drawingml/2006/main" noGrp="1"/>
+          </p:cNvSpPr>
+          <p:nvPr>
+            <p:ph type="body" idx="1"/>
+          </p:nvPr>
+        </p:nvSpPr>
+        <p:spPr/>
+        <p:txBody>
+          <a:bodyPr xmlns:a="http://schemas.openxmlformats.org/drawingml/2006/main"/>
+          <a:lstStyle xmlns:a="http://schemas.openxmlformats.org/drawingml/2006/main"/>
+          <a:p xmlns:a="http://schemas.openxmlformats.org/drawingml/2006/main"/>
+        </p:txBody>
+      </p:sp>
+      <p:sp>
+        <p:nvSpPr>
+          <p:cNvPr id="4" name="Slide Number Placeholder 3"/>
+          <p:cNvSpPr>
+            <a:spLocks xmlns:a="http://schemas.openxmlformats.org/drawingml/2006/main" noGrp="1"/>
+          </p:cNvSpPr>
+          <p:nvPr>
+            <p:ph type="sldNum" idx="5"/>
+          </p:nvPr>
+        </p:nvSpPr>
+        <p:spPr/>
+        <p:txBody>
+          <a:bodyPr xmlns:a="http://schemas.openxmlformats.org/drawingml/2006/main"/>
+          <a:lstStyle xmlns:a="http://schemas.openxmlformats.org/drawingml/2006/main"/>
+          <a:p xmlns:a="http://schemas.openxmlformats.org/drawingml/2006/main"/>
+        </p:txBody>
+      </p:sp>
+    </p:spTree>
+  </p:cSld>
+  <p:clrMapOvr>
+    <a:masterClrMapping xmlns:a="http://schemas.openxmlformats.org/drawingml/2006/main"/>
+  </p:clrMapOvr>
+</p:notes>
+</file>
+
+<file path=ppt/notesSlides/notesSlide12.xml><?xml version="1.0" encoding="utf-8"?>
+<p:notes xmlns:p="http://schemas.openxmlformats.org/presentationml/2006/main">
+  <p:cSld>
+    <p:spTree>
+      <p:nvGrpSpPr>
+        <p:cNvPr id="1" name=""/>
+        <p:cNvGrpSpPr/>
+        <p:nvPr/>
+      </p:nvGrpSpPr>
+      <p:grpSpPr>
+        <a:xfrm xmlns:a="http://schemas.openxmlformats.org/drawingml/2006/main"/>
+      </p:grpSpPr>
+      <p:sp>
+        <p:nvSpPr>
+          <p:cNvPr id="2" name="Slide Image Placeholder 1"/>
+          <p:cNvSpPr>
+            <a:spLocks xmlns:a="http://schemas.openxmlformats.org/drawingml/2006/main" noGrp="1"/>
+          </p:cNvSpPr>
+          <p:nvPr>
+            <p:ph type="sldImg" idx="0"/>
+          </p:nvPr>
+        </p:nvSpPr>
+        <p:spPr/>
+      </p:sp>
+      <p:sp>
+        <p:nvSpPr>
+          <p:cNvPr id="3" name="Notes Placeholder 2"/>
+          <p:cNvSpPr>
+            <a:spLocks xmlns:a="http://schemas.openxmlformats.org/drawingml/2006/main" noGrp="1"/>
+          </p:cNvSpPr>
+          <p:nvPr>
+            <p:ph type="body" idx="1"/>
+          </p:nvPr>
+        </p:nvSpPr>
+        <p:spPr/>
+        <p:txBody>
+          <a:bodyPr xmlns:a="http://schemas.openxmlformats.org/drawingml/2006/main"/>
+          <a:lstStyle xmlns:a="http://schemas.openxmlformats.org/drawingml/2006/main"/>
+          <a:p xmlns:a="http://schemas.openxmlformats.org/drawingml/2006/main"/>
+        </p:txBody>
+      </p:sp>
+      <p:sp>
+        <p:nvSpPr>
+          <p:cNvPr id="4" name="Slide Number Placeholder 3"/>
+          <p:cNvSpPr>
+            <a:spLocks xmlns:a="http://schemas.openxmlformats.org/drawingml/2006/main" noGrp="1"/>
+          </p:cNvSpPr>
+          <p:nvPr>
+            <p:ph type="sldNum" idx="5"/>
+          </p:nvPr>
+        </p:nvSpPr>
+        <p:spPr/>
+        <p:txBody>
+          <a:bodyPr xmlns:a="http://schemas.openxmlformats.org/drawingml/2006/main"/>
+          <a:lstStyle xmlns:a="http://schemas.openxmlformats.org/drawingml/2006/main"/>
+          <a:p xmlns:a="http://schemas.openxmlformats.org/drawingml/2006/main"/>
+        </p:txBody>
+      </p:sp>
+    </p:spTree>
+  </p:cSld>
+  <p:clrMapOvr>
+    <a:masterClrMapping xmlns:a="http://schemas.openxmlformats.org/drawingml/2006/main"/>
+  </p:clrMapOvr>
+</p:notes>
+</file>
+
+<file path=ppt/notesSlides/notesSlide13.xml><?xml version="1.0" encoding="utf-8"?>
+<p:notes xmlns:p="http://schemas.openxmlformats.org/presentationml/2006/main">
+  <p:cSld>
+    <p:spTree>
+      <p:nvGrpSpPr>
+        <p:cNvPr id="1" name=""/>
+        <p:cNvGrpSpPr/>
+        <p:nvPr/>
+      </p:nvGrpSpPr>
+      <p:grpSpPr>
+        <a:xfrm xmlns:a="http://schemas.openxmlformats.org/drawingml/2006/main"/>
+      </p:grpSpPr>
+      <p:sp>
+        <p:nvSpPr>
+          <p:cNvPr id="2" name="Slide Image Placeholder 1"/>
+          <p:cNvSpPr>
+            <a:spLocks xmlns:a="http://schemas.openxmlformats.org/drawingml/2006/main" noGrp="1"/>
+          </p:cNvSpPr>
+          <p:nvPr>
+            <p:ph type="sldImg" idx="0"/>
+          </p:nvPr>
+        </p:nvSpPr>
+        <p:spPr/>
+      </p:sp>
+      <p:sp>
+        <p:nvSpPr>
+          <p:cNvPr id="3" name="Notes Placeholder 2"/>
+          <p:cNvSpPr>
+            <a:spLocks xmlns:a="http://schemas.openxmlformats.org/drawingml/2006/main" noGrp="1"/>
+          </p:cNvSpPr>
+          <p:nvPr>
+            <p:ph type="body" idx="1"/>
+          </p:nvPr>
+        </p:nvSpPr>
+        <p:spPr/>
+        <p:txBody>
+          <a:bodyPr xmlns:a="http://schemas.openxmlformats.org/drawingml/2006/main"/>
+          <a:lstStyle xmlns:a="http://schemas.openxmlformats.org/drawingml/2006/main"/>
+          <a:p xmlns:a="http://schemas.openxmlformats.org/drawingml/2006/main"/>
+        </p:txBody>
+      </p:sp>
+      <p:sp>
+        <p:nvSpPr>
+          <p:cNvPr id="4" name="Slide Number Placeholder 3"/>
+          <p:cNvSpPr>
+            <a:spLocks xmlns:a="http://schemas.openxmlformats.org/drawingml/2006/main" noGrp="1"/>
+          </p:cNvSpPr>
+          <p:nvPr>
+            <p:ph type="sldNum" idx="5"/>
+          </p:nvPr>
+        </p:nvSpPr>
+        <p:spPr/>
+        <p:txBody>
+          <a:bodyPr xmlns:a="http://schemas.openxmlformats.org/drawingml/2006/main"/>
+          <a:lstStyle xmlns:a="http://schemas.openxmlformats.org/drawingml/2006/main"/>
+          <a:p xmlns:a="http://schemas.openxmlformats.org/drawingml/2006/main"/>
+        </p:txBody>
+      </p:sp>
+    </p:spTree>
+  </p:cSld>
+  <p:clrMapOvr>
+    <a:masterClrMapping xmlns:a="http://schemas.openxmlformats.org/drawingml/2006/main"/>
+  </p:clrMapOvr>
+</p:notes>
+</file>
+
+<file path=ppt/notesSlides/notesSlide14.xml><?xml version="1.0" encoding="utf-8"?>
+<p:notes xmlns:p="http://schemas.openxmlformats.org/presentationml/2006/main">
+  <p:cSld>
+    <p:spTree>
+      <p:nvGrpSpPr>
+        <p:cNvPr id="1" name=""/>
+        <p:cNvGrpSpPr/>
+        <p:nvPr/>
+      </p:nvGrpSpPr>
+      <p:grpSpPr>
+        <a:xfrm xmlns:a="http://schemas.openxmlformats.org/drawingml/2006/main"/>
+      </p:grpSpPr>
+      <p:sp>
+        <p:nvSpPr>
+          <p:cNvPr id="2" name="Slide Image Placeholder 1"/>
+          <p:cNvSpPr>
+            <a:spLocks xmlns:a="http://schemas.openxmlformats.org/drawingml/2006/main" noGrp="1"/>
+          </p:cNvSpPr>
+          <p:nvPr>
+            <p:ph type="sldImg" idx="0"/>
+          </p:nvPr>
+        </p:nvSpPr>
+        <p:spPr/>
+      </p:sp>
+      <p:sp>
+        <p:nvSpPr>
+          <p:cNvPr id="3" name="Notes Placeholder 2"/>
+          <p:cNvSpPr>
+            <a:spLocks xmlns:a="http://schemas.openxmlformats.org/drawingml/2006/main" noGrp="1"/>
+          </p:cNvSpPr>
+          <p:nvPr>
+            <p:ph type="body" idx="1"/>
+          </p:nvPr>
+        </p:nvSpPr>
+        <p:spPr/>
+        <p:txBody>
+          <a:bodyPr xmlns:a="http://schemas.openxmlformats.org/drawingml/2006/main"/>
+          <a:lstStyle xmlns:a="http://schemas.openxmlformats.org/drawingml/2006/main"/>
+          <a:p xmlns:a="http://schemas.openxmlformats.org/drawingml/2006/main"/>
+        </p:txBody>
+      </p:sp>
+      <p:sp>
+        <p:nvSpPr>
+          <p:cNvPr id="4" name="Slide Number Placeholder 3"/>
+          <p:cNvSpPr>
+            <a:spLocks xmlns:a="http://schemas.openxmlformats.org/drawingml/2006/main" noGrp="1"/>
+          </p:cNvSpPr>
+          <p:nvPr>
+            <p:ph type="sldNum" idx="5"/>
+          </p:nvPr>
+        </p:nvSpPr>
+        <p:spPr/>
+        <p:txBody>
+          <a:bodyPr xmlns:a="http://schemas.openxmlformats.org/drawingml/2006/main"/>
+          <a:lstStyle xmlns:a="http://schemas.openxmlformats.org/drawingml/2006/main"/>
+          <a:p xmlns:a="http://schemas.openxmlformats.org/drawingml/2006/main"/>
+        </p:txBody>
+      </p:sp>
+    </p:spTree>
+  </p:cSld>
+  <p:clrMapOvr>
+    <a:masterClrMapping xmlns:a="http://schemas.openxmlformats.org/drawingml/2006/main"/>
+  </p:clrMapOvr>
+</p:notes>
+</file>
+
+<file path=ppt/notesSlides/notesSlide15.xml><?xml version="1.0" encoding="utf-8"?>
+<p:notes xmlns:p="http://schemas.openxmlformats.org/presentationml/2006/main">
+  <p:cSld>
+    <p:spTree>
+      <p:nvGrpSpPr>
+        <p:cNvPr id="1" name=""/>
+        <p:cNvGrpSpPr/>
+        <p:nvPr/>
+      </p:nvGrpSpPr>
+      <p:grpSpPr>
+        <a:xfrm xmlns:a="http://schemas.openxmlformats.org/drawingml/2006/main"/>
+      </p:grpSpPr>
+      <p:sp>
+        <p:nvSpPr>
+          <p:cNvPr id="2" name="Slide Image Placeholder 1"/>
+          <p:cNvSpPr>
+            <a:spLocks xmlns:a="http://schemas.openxmlformats.org/drawingml/2006/main" noGrp="1"/>
+          </p:cNvSpPr>
+          <p:nvPr>
+            <p:ph type="sldImg" idx="0"/>
+          </p:nvPr>
+        </p:nvSpPr>
+        <p:spPr/>
+      </p:sp>
+      <p:sp>
+        <p:nvSpPr>
+          <p:cNvPr id="3" name="Notes Placeholder 2"/>
+          <p:cNvSpPr>
+            <a:spLocks xmlns:a="http://schemas.openxmlformats.org/drawingml/2006/main" noGrp="1"/>
+          </p:cNvSpPr>
+          <p:nvPr>
+            <p:ph type="body" idx="1"/>
+          </p:nvPr>
+        </p:nvSpPr>
+        <p:spPr/>
+        <p:txBody>
+          <a:bodyPr xmlns:a="http://schemas.openxmlformats.org/drawingml/2006/main"/>
+          <a:lstStyle xmlns:a="http://schemas.openxmlformats.org/drawingml/2006/main"/>
+          <a:p xmlns:a="http://schemas.openxmlformats.org/drawingml/2006/main"/>
+        </p:txBody>
+      </p:sp>
+      <p:sp>
+        <p:nvSpPr>
+          <p:cNvPr id="4" name="Slide Number Placeholder 3"/>
+          <p:cNvSpPr>
+            <a:spLocks xmlns:a="http://schemas.openxmlformats.org/drawingml/2006/main" noGrp="1"/>
+          </p:cNvSpPr>
+          <p:nvPr>
+            <p:ph type="sldNum" idx="5"/>
+          </p:nvPr>
+        </p:nvSpPr>
+        <p:spPr/>
+        <p:txBody>
+          <a:bodyPr xmlns:a="http://schemas.openxmlformats.org/drawingml/2006/main"/>
+          <a:lstStyle xmlns:a="http://schemas.openxmlformats.org/drawingml/2006/main"/>
+          <a:p xmlns:a="http://schemas.openxmlformats.org/drawingml/2006/main"/>
+        </p:txBody>
+      </p:sp>
+    </p:spTree>
+  </p:cSld>
+  <p:clrMapOvr>
+    <a:masterClrMapping xmlns:a="http://schemas.openxmlformats.org/drawingml/2006/main"/>
+  </p:clrMapOvr>
+</p:notes>
+</file>
+
+<file path=ppt/notesSlides/notesSlide16.xml><?xml version="1.0" encoding="utf-8"?>
+<p:notes xmlns:p="http://schemas.openxmlformats.org/presentationml/2006/main">
+  <p:cSld>
+    <p:spTree>
+      <p:nvGrpSpPr>
+        <p:cNvPr id="1" name=""/>
+        <p:cNvGrpSpPr/>
+        <p:nvPr/>
+      </p:nvGrpSpPr>
+      <p:grpSpPr>
+        <a:xfrm xmlns:a="http://schemas.openxmlformats.org/drawingml/2006/main"/>
+      </p:grpSpPr>
+      <p:sp>
+        <p:nvSpPr>
+          <p:cNvPr id="2" name="Slide Image Placeholder 1"/>
+          <p:cNvSpPr>
+            <a:spLocks xmlns:a="http://schemas.openxmlformats.org/drawingml/2006/main" noGrp="1"/>
+          </p:cNvSpPr>
+          <p:nvPr>
+            <p:ph type="sldImg" idx="0"/>
+          </p:nvPr>
+        </p:nvSpPr>
+        <p:spPr/>
+      </p:sp>
+      <p:sp>
+        <p:nvSpPr>
+          <p:cNvPr id="3" name="Notes Placeholder 2"/>
+          <p:cNvSpPr>
+            <a:spLocks xmlns:a="http://schemas.openxmlformats.org/drawingml/2006/main" noGrp="1"/>
+          </p:cNvSpPr>
+          <p:nvPr>
+            <p:ph type="body" idx="1"/>
+          </p:nvPr>
+        </p:nvSpPr>
+        <p:spPr/>
+        <p:txBody>
+          <a:bodyPr xmlns:a="http://schemas.openxmlformats.org/drawingml/2006/main"/>
+          <a:lstStyle xmlns:a="http://schemas.openxmlformats.org/drawingml/2006/main"/>
+          <a:p xmlns:a="http://schemas.openxmlformats.org/drawingml/2006/main"/>
+        </p:txBody>
+      </p:sp>
+      <p:sp>
+        <p:nvSpPr>
+          <p:cNvPr id="4" name="Slide Number Placeholder 3"/>
+          <p:cNvSpPr>
+            <a:spLocks xmlns:a="http://schemas.openxmlformats.org/drawingml/2006/main" noGrp="1"/>
+          </p:cNvSpPr>
+          <p:nvPr>
+            <p:ph type="sldNum" idx="5"/>
+          </p:nvPr>
+        </p:nvSpPr>
+        <p:spPr/>
+        <p:txBody>
+          <a:bodyPr xmlns:a="http://schemas.openxmlformats.org/drawingml/2006/main"/>
+          <a:lstStyle xmlns:a="http://schemas.openxmlformats.org/drawingml/2006/main"/>
+          <a:p xmlns:a="http://schemas.openxmlformats.org/drawingml/2006/main"/>
+        </p:txBody>
+      </p:sp>
+    </p:spTree>
+  </p:cSld>
+  <p:clrMapOvr>
+    <a:masterClrMapping xmlns:a="http://schemas.openxmlformats.org/drawingml/2006/main"/>
+  </p:clrMapOvr>
+</p:notes>
+</file>
+
+<file path=ppt/notesSlides/notesSlide17.xml><?xml version="1.0" encoding="utf-8"?>
+<p:notes xmlns:p="http://schemas.openxmlformats.org/presentationml/2006/main">
+  <p:cSld>
+    <p:spTree>
+      <p:nvGrpSpPr>
+        <p:cNvPr id="1" name=""/>
+        <p:cNvGrpSpPr/>
+        <p:nvPr/>
+      </p:nvGrpSpPr>
+      <p:grpSpPr>
+        <a:xfrm xmlns:a="http://schemas.openxmlformats.org/drawingml/2006/main"/>
+      </p:grpSpPr>
+      <p:sp>
+        <p:nvSpPr>
+          <p:cNvPr id="2" name="Slide Image Placeholder 1"/>
+          <p:cNvSpPr>
+            <a:spLocks xmlns:a="http://schemas.openxmlformats.org/drawingml/2006/main" noGrp="1"/>
+          </p:cNvSpPr>
+          <p:nvPr>
+            <p:ph type="sldImg" idx="0"/>
+          </p:nvPr>
+        </p:nvSpPr>
+        <p:spPr/>
+      </p:sp>
+      <p:sp>
+        <p:nvSpPr>
+          <p:cNvPr id="3" name="Notes Placeholder 2"/>
+          <p:cNvSpPr>
+            <a:spLocks xmlns:a="http://schemas.openxmlformats.org/drawingml/2006/main" noGrp="1"/>
+          </p:cNvSpPr>
+          <p:nvPr>
+            <p:ph type="body" idx="1"/>
+          </p:nvPr>
+        </p:nvSpPr>
+        <p:spPr/>
+        <p:txBody>
+          <a:bodyPr xmlns:a="http://schemas.openxmlformats.org/drawingml/2006/main"/>
+          <a:lstStyle xmlns:a="http://schemas.openxmlformats.org/drawingml/2006/main"/>
+          <a:p xmlns:a="http://schemas.openxmlformats.org/drawingml/2006/main"/>
+        </p:txBody>
+      </p:sp>
+      <p:sp>
+        <p:nvSpPr>
+          <p:cNvPr id="4" name="Slide Number Placeholder 3"/>
+          <p:cNvSpPr>
+            <a:spLocks xmlns:a="http://schemas.openxmlformats.org/drawingml/2006/main" noGrp="1"/>
+          </p:cNvSpPr>
+          <p:nvPr>
+            <p:ph type="sldNum" idx="5"/>
+          </p:nvPr>
+        </p:nvSpPr>
+        <p:spPr/>
+        <p:txBody>
+          <a:bodyPr xmlns:a="http://schemas.openxmlformats.org/drawingml/2006/main"/>
+          <a:lstStyle xmlns:a="http://schemas.openxmlformats.org/drawingml/2006/main"/>
+          <a:p xmlns:a="http://schemas.openxmlformats.org/drawingml/2006/main"/>
+        </p:txBody>
+      </p:sp>
+    </p:spTree>
+  </p:cSld>
+  <p:clrMapOvr>
+    <a:masterClrMapping xmlns:a="http://schemas.openxmlformats.org/drawingml/2006/main"/>
+  </p:clrMapOvr>
+</p:notes>
+</file>
+
+<file path=ppt/notesSlides/notesSlide18.xml><?xml version="1.0" encoding="utf-8"?>
+<p:notes xmlns:p="http://schemas.openxmlformats.org/presentationml/2006/main">
+  <p:cSld>
+    <p:spTree>
+      <p:nvGrpSpPr>
+        <p:cNvPr id="1" name=""/>
+        <p:cNvGrpSpPr/>
+        <p:nvPr/>
+      </p:nvGrpSpPr>
+      <p:grpSpPr>
+        <a:xfrm xmlns:a="http://schemas.openxmlformats.org/drawingml/2006/main"/>
+      </p:grpSpPr>
+      <p:sp>
+        <p:nvSpPr>
+          <p:cNvPr id="2" name="Slide Image Placeholder 1"/>
+          <p:cNvSpPr>
+            <a:spLocks xmlns:a="http://schemas.openxmlformats.org/drawingml/2006/main" noGrp="1"/>
+          </p:cNvSpPr>
+          <p:nvPr>
+            <p:ph type="sldImg" idx="0"/>
+          </p:nvPr>
+        </p:nvSpPr>
+        <p:spPr/>
+      </p:sp>
+      <p:sp>
+        <p:nvSpPr>
+          <p:cNvPr id="3" name="Notes Placeholder 2"/>
+          <p:cNvSpPr>
+            <a:spLocks xmlns:a="http://schemas.openxmlformats.org/drawingml/2006/main" noGrp="1"/>
+          </p:cNvSpPr>
+          <p:nvPr>
+            <p:ph type="body" idx="1"/>
+          </p:nvPr>
+        </p:nvSpPr>
+        <p:spPr/>
+        <p:txBody>
+          <a:bodyPr xmlns:a="http://schemas.openxmlformats.org/drawingml/2006/main"/>
+          <a:lstStyle xmlns:a="http://schemas.openxmlformats.org/drawingml/2006/main"/>
+          <a:p xmlns:a="http://schemas.openxmlformats.org/drawingml/2006/main"/>
+        </p:txBody>
+      </p:sp>
+      <p:sp>
+        <p:nvSpPr>
+          <p:cNvPr id="4" name="Slide Number Placeholder 3"/>
+          <p:cNvSpPr>
+            <a:spLocks xmlns:a="http://schemas.openxmlformats.org/drawingml/2006/main" noGrp="1"/>
+          </p:cNvSpPr>
+          <p:nvPr>
+            <p:ph type="sldNum" idx="5"/>
+          </p:nvPr>
+        </p:nvSpPr>
+        <p:spPr/>
+        <p:txBody>
+          <a:bodyPr xmlns:a="http://schemas.openxmlformats.org/drawingml/2006/main"/>
+          <a:lstStyle xmlns:a="http://schemas.openxmlformats.org/drawingml/2006/main"/>
+          <a:p xmlns:a="http://schemas.openxmlformats.org/drawingml/2006/main"/>
+        </p:txBody>
+      </p:sp>
+    </p:spTree>
+  </p:cSld>
+  <p:clrMapOvr>
+    <a:masterClrMapping xmlns:a="http://schemas.openxmlformats.org/drawingml/2006/main"/>
+  </p:clrMapOvr>
+</p:notes>
+</file>
+
+<file path=ppt/notesSlides/notesSlide19.xml><?xml version="1.0" encoding="utf-8"?>
+<p:notes xmlns:p="http://schemas.openxmlformats.org/presentationml/2006/main">
+  <p:cSld>
+    <p:spTree>
+      <p:nvGrpSpPr>
+        <p:cNvPr id="1" name=""/>
+        <p:cNvGrpSpPr/>
+        <p:nvPr/>
+      </p:nvGrpSpPr>
+      <p:grpSpPr>
+        <a:xfrm xmlns:a="http://schemas.openxmlformats.org/drawingml/2006/main"/>
+      </p:grpSpPr>
+      <p:sp>
+        <p:nvSpPr>
+          <p:cNvPr id="2" name="Slide Image Placeholder 1"/>
+          <p:cNvSpPr>
+            <a:spLocks xmlns:a="http://schemas.openxmlformats.org/drawingml/2006/main" noGrp="1"/>
+          </p:cNvSpPr>
+          <p:nvPr>
+            <p:ph type="sldImg" idx="0"/>
+          </p:nvPr>
+        </p:nvSpPr>
+        <p:spPr/>
+      </p:sp>
+      <p:sp>
+        <p:nvSpPr>
+          <p:cNvPr id="3" name="Notes Placeholder 2"/>
+          <p:cNvSpPr>
+            <a:spLocks xmlns:a="http://schemas.openxmlformats.org/drawingml/2006/main" noGrp="1"/>
+          </p:cNvSpPr>
+          <p:nvPr>
+            <p:ph type="body" idx="1"/>
+          </p:nvPr>
+        </p:nvSpPr>
+        <p:spPr/>
+        <p:txBody>
+          <a:bodyPr xmlns:a="http://schemas.openxmlformats.org/drawingml/2006/main"/>
+          <a:lstStyle xmlns:a="http://schemas.openxmlformats.org/drawingml/2006/main"/>
+          <a:p xmlns:a="http://schemas.openxmlformats.org/drawingml/2006/main"/>
+        </p:txBody>
+      </p:sp>
+      <p:sp>
+        <p:nvSpPr>
+          <p:cNvPr id="4" name="Slide Number Placeholder 3"/>
+          <p:cNvSpPr>
+            <a:spLocks xmlns:a="http://schemas.openxmlformats.org/drawingml/2006/main" noGrp="1"/>
+          </p:cNvSpPr>
+          <p:nvPr>
+            <p:ph type="sldNum" idx="5"/>
+          </p:nvPr>
+        </p:nvSpPr>
+        <p:spPr/>
+        <p:txBody>
+          <a:bodyPr xmlns:a="http://schemas.openxmlformats.org/drawingml/2006/main"/>
+          <a:lstStyle xmlns:a="http://schemas.openxmlformats.org/drawingml/2006/main"/>
+          <a:p xmlns:a="http://schemas.openxmlformats.org/drawingml/2006/main"/>
+        </p:txBody>
+      </p:sp>
+    </p:spTree>
+  </p:cSld>
+  <p:clrMapOvr>
+    <a:masterClrMapping xmlns:a="http://schemas.openxmlformats.org/drawingml/2006/main"/>
+  </p:clrMapOvr>
+</p:notes>
+</file>
+
+<file path=ppt/notesSlides/notesSlide2.xml><?xml version="1.0" encoding="utf-8"?>
+<p:notes xmlns:p="http://schemas.openxmlformats.org/presentationml/2006/main">
+  <p:cSld>
+    <p:spTree>
+      <p:nvGrpSpPr>
+        <p:cNvPr id="1" name=""/>
+        <p:cNvGrpSpPr/>
+        <p:nvPr/>
+      </p:nvGrpSpPr>
+      <p:grpSpPr>
+        <a:xfrm xmlns:a="http://schemas.openxmlformats.org/drawingml/2006/main"/>
+      </p:grpSpPr>
+      <p:sp>
+        <p:nvSpPr>
+          <p:cNvPr id="2" name="Slide Image Placeholder 1"/>
+          <p:cNvSpPr>
+            <a:spLocks xmlns:a="http://schemas.openxmlformats.org/drawingml/2006/main" noGrp="1"/>
+          </p:cNvSpPr>
+          <p:nvPr>
+            <p:ph type="sldImg" idx="0"/>
+          </p:nvPr>
+        </p:nvSpPr>
+        <p:spPr/>
+      </p:sp>
+      <p:sp>
+        <p:nvSpPr>
+          <p:cNvPr id="3" name="Notes Placeholder 2"/>
+          <p:cNvSpPr>
+            <a:spLocks xmlns:a="http://schemas.openxmlformats.org/drawingml/2006/main" noGrp="1"/>
+          </p:cNvSpPr>
+          <p:nvPr>
+            <p:ph type="body" idx="1"/>
+          </p:nvPr>
+        </p:nvSpPr>
+        <p:spPr/>
+        <p:txBody>
+          <a:bodyPr xmlns:a="http://schemas.openxmlformats.org/drawingml/2006/main"/>
+          <a:lstStyle xmlns:a="http://schemas.openxmlformats.org/drawingml/2006/main"/>
+          <a:p xmlns:a="http://schemas.openxmlformats.org/drawingml/2006/main"/>
+        </p:txBody>
+      </p:sp>
+      <p:sp>
+        <p:nvSpPr>
+          <p:cNvPr id="4" name="Slide Number Placeholder 3"/>
+          <p:cNvSpPr>
+            <a:spLocks xmlns:a="http://schemas.openxmlformats.org/drawingml/2006/main" noGrp="1"/>
+          </p:cNvSpPr>
+          <p:nvPr>
+            <p:ph type="sldNum" idx="5"/>
+          </p:nvPr>
+        </p:nvSpPr>
+        <p:spPr/>
+        <p:txBody>
+          <a:bodyPr xmlns:a="http://schemas.openxmlformats.org/drawingml/2006/main"/>
+          <a:lstStyle xmlns:a="http://schemas.openxmlformats.org/drawingml/2006/main"/>
+          <a:p xmlns:a="http://schemas.openxmlformats.org/drawingml/2006/main"/>
+        </p:txBody>
+      </p:sp>
+    </p:spTree>
+  </p:cSld>
+  <p:clrMapOvr>
+    <a:masterClrMapping xmlns:a="http://schemas.openxmlformats.org/drawingml/2006/main"/>
+  </p:clrMapOvr>
+</p:notes>
+</file>
+
+<file path=ppt/notesSlides/notesSlide20.xml><?xml version="1.0" encoding="utf-8"?>
+<p:notes xmlns:p="http://schemas.openxmlformats.org/presentationml/2006/main">
+  <p:cSld>
+    <p:spTree>
+      <p:nvGrpSpPr>
+        <p:cNvPr id="1" name=""/>
+        <p:cNvGrpSpPr/>
+        <p:nvPr/>
+      </p:nvGrpSpPr>
+      <p:grpSpPr>
+        <a:xfrm xmlns:a="http://schemas.openxmlformats.org/drawingml/2006/main"/>
+      </p:grpSpPr>
+      <p:sp>
+        <p:nvSpPr>
+          <p:cNvPr id="2" name="Slide Image Placeholder 1"/>
+          <p:cNvSpPr>
+            <a:spLocks xmlns:a="http://schemas.openxmlformats.org/drawingml/2006/main" noGrp="1"/>
+          </p:cNvSpPr>
+          <p:nvPr>
+            <p:ph type="sldImg" idx="0"/>
+          </p:nvPr>
+        </p:nvSpPr>
+        <p:spPr/>
+      </p:sp>
+      <p:sp>
+        <p:nvSpPr>
+          <p:cNvPr id="3" name="Notes Placeholder 2"/>
+          <p:cNvSpPr>
+            <a:spLocks xmlns:a="http://schemas.openxmlformats.org/drawingml/2006/main" noGrp="1"/>
+          </p:cNvSpPr>
+          <p:nvPr>
+            <p:ph type="body" idx="1"/>
+          </p:nvPr>
+        </p:nvSpPr>
+        <p:spPr/>
+        <p:txBody>
+          <a:bodyPr xmlns:a="http://schemas.openxmlformats.org/drawingml/2006/main"/>
+          <a:lstStyle xmlns:a="http://schemas.openxmlformats.org/drawingml/2006/main"/>
+          <a:p xmlns:a="http://schemas.openxmlformats.org/drawingml/2006/main"/>
+        </p:txBody>
+      </p:sp>
+      <p:sp>
+        <p:nvSpPr>
+          <p:cNvPr id="4" name="Slide Number Placeholder 3"/>
+          <p:cNvSpPr>
+            <a:spLocks xmlns:a="http://schemas.openxmlformats.org/drawingml/2006/main" noGrp="1"/>
+          </p:cNvSpPr>
+          <p:nvPr>
+            <p:ph type="sldNum" idx="5"/>
+          </p:nvPr>
+        </p:nvSpPr>
+        <p:spPr/>
+        <p:txBody>
+          <a:bodyPr xmlns:a="http://schemas.openxmlformats.org/drawingml/2006/main"/>
+          <a:lstStyle xmlns:a="http://schemas.openxmlformats.org/drawingml/2006/main"/>
+          <a:p xmlns:a="http://schemas.openxmlformats.org/drawingml/2006/main"/>
+        </p:txBody>
+      </p:sp>
+    </p:spTree>
+  </p:cSld>
+  <p:clrMapOvr>
+    <a:masterClrMapping xmlns:a="http://schemas.openxmlformats.org/drawingml/2006/main"/>
+  </p:clrMapOvr>
+</p:notes>
+</file>
+
+<file path=ppt/notesSlides/notesSlide21.xml><?xml version="1.0" encoding="utf-8"?>
+<p:notes xmlns:p="http://schemas.openxmlformats.org/presentationml/2006/main">
+  <p:cSld>
+    <p:spTree>
+      <p:nvGrpSpPr>
+        <p:cNvPr id="1" name=""/>
+        <p:cNvGrpSpPr/>
+        <p:nvPr/>
+      </p:nvGrpSpPr>
+      <p:grpSpPr>
+        <a:xfrm xmlns:a="http://schemas.openxmlformats.org/drawingml/2006/main"/>
+      </p:grpSpPr>
+      <p:sp>
+        <p:nvSpPr>
+          <p:cNvPr id="2" name="Slide Image Placeholder 1"/>
+          <p:cNvSpPr>
+            <a:spLocks xmlns:a="http://schemas.openxmlformats.org/drawingml/2006/main" noGrp="1"/>
+          </p:cNvSpPr>
+          <p:nvPr>
+            <p:ph type="sldImg" idx="0"/>
+          </p:nvPr>
+        </p:nvSpPr>
+        <p:spPr/>
+      </p:sp>
+      <p:sp>
+        <p:nvSpPr>
+          <p:cNvPr id="3" name="Notes Placeholder 2"/>
+          <p:cNvSpPr>
+            <a:spLocks xmlns:a="http://schemas.openxmlformats.org/drawingml/2006/main" noGrp="1"/>
+          </p:cNvSpPr>
+          <p:nvPr>
+            <p:ph type="body" idx="1"/>
+          </p:nvPr>
+        </p:nvSpPr>
+        <p:spPr/>
+        <p:txBody>
+          <a:bodyPr xmlns:a="http://schemas.openxmlformats.org/drawingml/2006/main"/>
+          <a:lstStyle xmlns:a="http://schemas.openxmlformats.org/drawingml/2006/main"/>
+          <a:p xmlns:a="http://schemas.openxmlformats.org/drawingml/2006/main"/>
+        </p:txBody>
+      </p:sp>
+      <p:sp>
+        <p:nvSpPr>
+          <p:cNvPr id="4" name="Slide Number Placeholder 3"/>
+          <p:cNvSpPr>
+            <a:spLocks xmlns:a="http://schemas.openxmlformats.org/drawingml/2006/main" noGrp="1"/>
+          </p:cNvSpPr>
+          <p:nvPr>
+            <p:ph type="sldNum" idx="5"/>
+          </p:nvPr>
+        </p:nvSpPr>
+        <p:spPr/>
+        <p:txBody>
+          <a:bodyPr xmlns:a="http://schemas.openxmlformats.org/drawingml/2006/main"/>
+          <a:lstStyle xmlns:a="http://schemas.openxmlformats.org/drawingml/2006/main"/>
+          <a:p xmlns:a="http://schemas.openxmlformats.org/drawingml/2006/main"/>
+        </p:txBody>
+      </p:sp>
+    </p:spTree>
+  </p:cSld>
+  <p:clrMapOvr>
+    <a:masterClrMapping xmlns:a="http://schemas.openxmlformats.org/drawingml/2006/main"/>
+  </p:clrMapOvr>
+</p:notes>
+</file>
+
+<file path=ppt/notesSlides/notesSlide22.xml><?xml version="1.0" encoding="utf-8"?>
+<p:notes xmlns:p="http://schemas.openxmlformats.org/presentationml/2006/main">
+  <p:cSld>
+    <p:spTree>
+      <p:nvGrpSpPr>
+        <p:cNvPr id="1" name=""/>
+        <p:cNvGrpSpPr/>
+        <p:nvPr/>
+      </p:nvGrpSpPr>
+      <p:grpSpPr>
+        <a:xfrm xmlns:a="http://schemas.openxmlformats.org/drawingml/2006/main"/>
+      </p:grpSpPr>
+      <p:sp>
+        <p:nvSpPr>
+          <p:cNvPr id="2" name="Slide Image Placeholder 1"/>
+          <p:cNvSpPr>
+            <a:spLocks xmlns:a="http://schemas.openxmlformats.org/drawingml/2006/main" noGrp="1"/>
+          </p:cNvSpPr>
+          <p:nvPr>
+            <p:ph type="sldImg" idx="0"/>
+          </p:nvPr>
+        </p:nvSpPr>
+        <p:spPr/>
+      </p:sp>
+      <p:sp>
+        <p:nvSpPr>
+          <p:cNvPr id="3" name="Notes Placeholder 2"/>
+          <p:cNvSpPr>
+            <a:spLocks xmlns:a="http://schemas.openxmlformats.org/drawingml/2006/main" noGrp="1"/>
+          </p:cNvSpPr>
+          <p:nvPr>
+            <p:ph type="body" idx="1"/>
+          </p:nvPr>
+        </p:nvSpPr>
+        <p:spPr/>
+        <p:txBody>
+          <a:bodyPr xmlns:a="http://schemas.openxmlformats.org/drawingml/2006/main"/>
+          <a:lstStyle xmlns:a="http://schemas.openxmlformats.org/drawingml/2006/main"/>
+          <a:p xmlns:a="http://schemas.openxmlformats.org/drawingml/2006/main"/>
+        </p:txBody>
+      </p:sp>
+      <p:sp>
+        <p:nvSpPr>
+          <p:cNvPr id="4" name="Slide Number Placeholder 3"/>
+          <p:cNvSpPr>
+            <a:spLocks xmlns:a="http://schemas.openxmlformats.org/drawingml/2006/main" noGrp="1"/>
+          </p:cNvSpPr>
+          <p:nvPr>
+            <p:ph type="sldNum" idx="5"/>
+          </p:nvPr>
+        </p:nvSpPr>
+        <p:spPr/>
+        <p:txBody>
+          <a:bodyPr xmlns:a="http://schemas.openxmlformats.org/drawingml/2006/main"/>
+          <a:lstStyle xmlns:a="http://schemas.openxmlformats.org/drawingml/2006/main"/>
+          <a:p xmlns:a="http://schemas.openxmlformats.org/drawingml/2006/main"/>
+        </p:txBody>
+      </p:sp>
+    </p:spTree>
+  </p:cSld>
+  <p:clrMapOvr>
+    <a:masterClrMapping xmlns:a="http://schemas.openxmlformats.org/drawingml/2006/main"/>
+  </p:clrMapOvr>
+</p:notes>
+</file>
+
+<file path=ppt/notesSlides/notesSlide23.xml><?xml version="1.0" encoding="utf-8"?>
+<p:notes xmlns:p="http://schemas.openxmlformats.org/presentationml/2006/main">
+  <p:cSld>
+    <p:spTree>
+      <p:nvGrpSpPr>
+        <p:cNvPr id="1" name=""/>
+        <p:cNvGrpSpPr/>
+        <p:nvPr/>
+      </p:nvGrpSpPr>
+      <p:grpSpPr>
+        <a:xfrm xmlns:a="http://schemas.openxmlformats.org/drawingml/2006/main"/>
+      </p:grpSpPr>
+      <p:sp>
+        <p:nvSpPr>
+          <p:cNvPr id="2" name="Slide Image Placeholder 1"/>
+          <p:cNvSpPr>
+            <a:spLocks xmlns:a="http://schemas.openxmlformats.org/drawingml/2006/main" noGrp="1"/>
+          </p:cNvSpPr>
+          <p:nvPr>
+            <p:ph type="sldImg" idx="0"/>
+          </p:nvPr>
+        </p:nvSpPr>
+        <p:spPr/>
+      </p:sp>
+      <p:sp>
+        <p:nvSpPr>
+          <p:cNvPr id="3" name="Notes Placeholder 2"/>
+          <p:cNvSpPr>
+            <a:spLocks xmlns:a="http://schemas.openxmlformats.org/drawingml/2006/main" noGrp="1"/>
+          </p:cNvSpPr>
+          <p:nvPr>
+            <p:ph type="body" idx="1"/>
+          </p:nvPr>
+        </p:nvSpPr>
+        <p:spPr/>
+        <p:txBody>
+          <a:bodyPr xmlns:a="http://schemas.openxmlformats.org/drawingml/2006/main"/>
+          <a:lstStyle xmlns:a="http://schemas.openxmlformats.org/drawingml/2006/main"/>
+          <a:p xmlns:a="http://schemas.openxmlformats.org/drawingml/2006/main"/>
+        </p:txBody>
+      </p:sp>
+      <p:sp>
+        <p:nvSpPr>
+          <p:cNvPr id="4" name="Slide Number Placeholder 3"/>
+          <p:cNvSpPr>
+            <a:spLocks xmlns:a="http://schemas.openxmlformats.org/drawingml/2006/main" noGrp="1"/>
+          </p:cNvSpPr>
+          <p:nvPr>
+            <p:ph type="sldNum" idx="5"/>
+          </p:nvPr>
+        </p:nvSpPr>
+        <p:spPr/>
+        <p:txBody>
+          <a:bodyPr xmlns:a="http://schemas.openxmlformats.org/drawingml/2006/main"/>
+          <a:lstStyle xmlns:a="http://schemas.openxmlformats.org/drawingml/2006/main"/>
+          <a:p xmlns:a="http://schemas.openxmlformats.org/drawingml/2006/main"/>
+        </p:txBody>
+      </p:sp>
+    </p:spTree>
+  </p:cSld>
+  <p:clrMapOvr>
+    <a:masterClrMapping xmlns:a="http://schemas.openxmlformats.org/drawingml/2006/main"/>
+  </p:clrMapOvr>
+</p:notes>
+</file>
+
+<file path=ppt/notesSlides/notesSlide24.xml><?xml version="1.0" encoding="utf-8"?>
+<p:notes xmlns:p="http://schemas.openxmlformats.org/presentationml/2006/main">
+  <p:cSld>
+    <p:spTree>
+      <p:nvGrpSpPr>
+        <p:cNvPr id="1" name=""/>
+        <p:cNvGrpSpPr/>
+        <p:nvPr/>
+      </p:nvGrpSpPr>
+      <p:grpSpPr>
+        <a:xfrm xmlns:a="http://schemas.openxmlformats.org/drawingml/2006/main"/>
+      </p:grpSpPr>
+      <p:sp>
+        <p:nvSpPr>
+          <p:cNvPr id="2" name="Slide Image Placeholder 1"/>
+          <p:cNvSpPr>
+            <a:spLocks xmlns:a="http://schemas.openxmlformats.org/drawingml/2006/main" noGrp="1"/>
+          </p:cNvSpPr>
+          <p:nvPr>
+            <p:ph type="sldImg" idx="0"/>
+          </p:nvPr>
+        </p:nvSpPr>
+        <p:spPr/>
+      </p:sp>
+      <p:sp>
+        <p:nvSpPr>
+          <p:cNvPr id="3" name="Notes Placeholder 2"/>
+          <p:cNvSpPr>
+            <a:spLocks xmlns:a="http://schemas.openxmlformats.org/drawingml/2006/main" noGrp="1"/>
+          </p:cNvSpPr>
+          <p:nvPr>
+            <p:ph type="body" idx="1"/>
+          </p:nvPr>
+        </p:nvSpPr>
+        <p:spPr/>
+        <p:txBody>
+          <a:bodyPr xmlns:a="http://schemas.openxmlformats.org/drawingml/2006/main"/>
+          <a:lstStyle xmlns:a="http://schemas.openxmlformats.org/drawingml/2006/main"/>
+          <a:p xmlns:a="http://schemas.openxmlformats.org/drawingml/2006/main"/>
+        </p:txBody>
+      </p:sp>
+      <p:sp>
+        <p:nvSpPr>
+          <p:cNvPr id="4" name="Slide Number Placeholder 3"/>
+          <p:cNvSpPr>
+            <a:spLocks xmlns:a="http://schemas.openxmlformats.org/drawingml/2006/main" noGrp="1"/>
+          </p:cNvSpPr>
+          <p:nvPr>
+            <p:ph type="sldNum" idx="5"/>
+          </p:nvPr>
+        </p:nvSpPr>
+        <p:spPr/>
+        <p:txBody>
+          <a:bodyPr xmlns:a="http://schemas.openxmlformats.org/drawingml/2006/main"/>
+          <a:lstStyle xmlns:a="http://schemas.openxmlformats.org/drawingml/2006/main"/>
+          <a:p xmlns:a="http://schemas.openxmlformats.org/drawingml/2006/main"/>
+        </p:txBody>
+      </p:sp>
+    </p:spTree>
+  </p:cSld>
+  <p:clrMapOvr>
+    <a:masterClrMapping xmlns:a="http://schemas.openxmlformats.org/drawingml/2006/main"/>
+  </p:clrMapOvr>
+</p:notes>
+</file>
+
+<file path=ppt/notesSlides/notesSlide25.xml><?xml version="1.0" encoding="utf-8"?>
+<p:notes xmlns:p="http://schemas.openxmlformats.org/presentationml/2006/main">
+  <p:cSld>
+    <p:spTree>
+      <p:nvGrpSpPr>
+        <p:cNvPr id="1" name=""/>
+        <p:cNvGrpSpPr/>
+        <p:nvPr/>
+      </p:nvGrpSpPr>
+      <p:grpSpPr>
+        <a:xfrm xmlns:a="http://schemas.openxmlformats.org/drawingml/2006/main"/>
+      </p:grpSpPr>
+      <p:sp>
+        <p:nvSpPr>
+          <p:cNvPr id="2" name="Slide Image Placeholder 1"/>
+          <p:cNvSpPr>
+            <a:spLocks xmlns:a="http://schemas.openxmlformats.org/drawingml/2006/main" noGrp="1"/>
+          </p:cNvSpPr>
+          <p:nvPr>
+            <p:ph type="sldImg" idx="0"/>
+          </p:nvPr>
+        </p:nvSpPr>
+        <p:spPr/>
+      </p:sp>
+      <p:sp>
+        <p:nvSpPr>
+          <p:cNvPr id="3" name="Notes Placeholder 2"/>
+          <p:cNvSpPr>
+            <a:spLocks xmlns:a="http://schemas.openxmlformats.org/drawingml/2006/main" noGrp="1"/>
+          </p:cNvSpPr>
+          <p:nvPr>
+            <p:ph type="body" idx="1"/>
+          </p:nvPr>
+        </p:nvSpPr>
+        <p:spPr/>
+        <p:txBody>
+          <a:bodyPr xmlns:a="http://schemas.openxmlformats.org/drawingml/2006/main"/>
+          <a:lstStyle xmlns:a="http://schemas.openxmlformats.org/drawingml/2006/main"/>
+          <a:p xmlns:a="http://schemas.openxmlformats.org/drawingml/2006/main"/>
+        </p:txBody>
+      </p:sp>
+      <p:sp>
+        <p:nvSpPr>
+          <p:cNvPr id="4" name="Slide Number Placeholder 3"/>
+          <p:cNvSpPr>
+            <a:spLocks xmlns:a="http://schemas.openxmlformats.org/drawingml/2006/main" noGrp="1"/>
+          </p:cNvSpPr>
+          <p:nvPr>
+            <p:ph type="sldNum" idx="5"/>
+          </p:nvPr>
+        </p:nvSpPr>
+        <p:spPr/>
+        <p:txBody>
+          <a:bodyPr xmlns:a="http://schemas.openxmlformats.org/drawingml/2006/main"/>
+          <a:lstStyle xmlns:a="http://schemas.openxmlformats.org/drawingml/2006/main"/>
+          <a:p xmlns:a="http://schemas.openxmlformats.org/drawingml/2006/main"/>
+        </p:txBody>
+      </p:sp>
+    </p:spTree>
+  </p:cSld>
+  <p:clrMapOvr>
+    <a:masterClrMapping xmlns:a="http://schemas.openxmlformats.org/drawingml/2006/main"/>
+  </p:clrMapOvr>
+</p:notes>
+</file>
+
+<file path=ppt/notesSlides/notesSlide26.xml><?xml version="1.0" encoding="utf-8"?>
+<p:notes xmlns:p="http://schemas.openxmlformats.org/presentationml/2006/main">
+  <p:cSld>
+    <p:spTree>
+      <p:nvGrpSpPr>
+        <p:cNvPr id="1" name=""/>
+        <p:cNvGrpSpPr/>
+        <p:nvPr/>
+      </p:nvGrpSpPr>
+      <p:grpSpPr>
+        <a:xfrm xmlns:a="http://schemas.openxmlformats.org/drawingml/2006/main"/>
+      </p:grpSpPr>
+      <p:sp>
+        <p:nvSpPr>
+          <p:cNvPr id="2" name="Slide Image Placeholder 1"/>
+          <p:cNvSpPr>
+            <a:spLocks xmlns:a="http://schemas.openxmlformats.org/drawingml/2006/main" noGrp="1"/>
+          </p:cNvSpPr>
+          <p:nvPr>
+            <p:ph type="sldImg" idx="0"/>
+          </p:nvPr>
+        </p:nvSpPr>
+        <p:spPr/>
+      </p:sp>
+      <p:sp>
+        <p:nvSpPr>
+          <p:cNvPr id="3" name="Notes Placeholder 2"/>
+          <p:cNvSpPr>
+            <a:spLocks xmlns:a="http://schemas.openxmlformats.org/drawingml/2006/main" noGrp="1"/>
+          </p:cNvSpPr>
+          <p:nvPr>
+            <p:ph type="body" idx="1"/>
+          </p:nvPr>
+        </p:nvSpPr>
+        <p:spPr/>
+        <p:txBody>
+          <a:bodyPr xmlns:a="http://schemas.openxmlformats.org/drawingml/2006/main"/>
+          <a:lstStyle xmlns:a="http://schemas.openxmlformats.org/drawingml/2006/main"/>
+          <a:p xmlns:a="http://schemas.openxmlformats.org/drawingml/2006/main"/>
+        </p:txBody>
+      </p:sp>
+      <p:sp>
+        <p:nvSpPr>
+          <p:cNvPr id="4" name="Slide Number Placeholder 3"/>
+          <p:cNvSpPr>
+            <a:spLocks xmlns:a="http://schemas.openxmlformats.org/drawingml/2006/main" noGrp="1"/>
+          </p:cNvSpPr>
+          <p:nvPr>
+            <p:ph type="sldNum" idx="5"/>
+          </p:nvPr>
+        </p:nvSpPr>
+        <p:spPr/>
+        <p:txBody>
+          <a:bodyPr xmlns:a="http://schemas.openxmlformats.org/drawingml/2006/main"/>
+          <a:lstStyle xmlns:a="http://schemas.openxmlformats.org/drawingml/2006/main"/>
+          <a:p xmlns:a="http://schemas.openxmlformats.org/drawingml/2006/main"/>
+        </p:txBody>
+      </p:sp>
+    </p:spTree>
+  </p:cSld>
+  <p:clrMapOvr>
+    <a:masterClrMapping xmlns:a="http://schemas.openxmlformats.org/drawingml/2006/main"/>
+  </p:clrMapOvr>
+</p:notes>
+</file>
+
+<file path=ppt/notesSlides/notesSlide27.xml><?xml version="1.0" encoding="utf-8"?>
+<p:notes xmlns:p="http://schemas.openxmlformats.org/presentationml/2006/main">
+  <p:cSld>
+    <p:spTree>
+      <p:nvGrpSpPr>
+        <p:cNvPr id="1" name=""/>
+        <p:cNvGrpSpPr/>
+        <p:nvPr/>
+      </p:nvGrpSpPr>
+      <p:grpSpPr>
+        <a:xfrm xmlns:a="http://schemas.openxmlformats.org/drawingml/2006/main"/>
+      </p:grpSpPr>
+      <p:sp>
+        <p:nvSpPr>
+          <p:cNvPr id="2" name="Slide Image Placeholder 1"/>
+          <p:cNvSpPr>
+            <a:spLocks xmlns:a="http://schemas.openxmlformats.org/drawingml/2006/main" noGrp="1"/>
+          </p:cNvSpPr>
+          <p:nvPr>
+            <p:ph type="sldImg" idx="0"/>
+          </p:nvPr>
+        </p:nvSpPr>
+        <p:spPr/>
+      </p:sp>
+      <p:sp>
+        <p:nvSpPr>
+          <p:cNvPr id="3" name="Notes Placeholder 2"/>
+          <p:cNvSpPr>
+            <a:spLocks xmlns:a="http://schemas.openxmlformats.org/drawingml/2006/main" noGrp="1"/>
+          </p:cNvSpPr>
+          <p:nvPr>
+            <p:ph type="body" idx="1"/>
+          </p:nvPr>
+        </p:nvSpPr>
+        <p:spPr/>
+        <p:txBody>
+          <a:bodyPr xmlns:a="http://schemas.openxmlformats.org/drawingml/2006/main"/>
+          <a:lstStyle xmlns:a="http://schemas.openxmlformats.org/drawingml/2006/main"/>
+          <a:p xmlns:a="http://schemas.openxmlformats.org/drawingml/2006/main"/>
+        </p:txBody>
+      </p:sp>
+      <p:sp>
+        <p:nvSpPr>
+          <p:cNvPr id="4" name="Slide Number Placeholder 3"/>
+          <p:cNvSpPr>
+            <a:spLocks xmlns:a="http://schemas.openxmlformats.org/drawingml/2006/main" noGrp="1"/>
+          </p:cNvSpPr>
+          <p:nvPr>
+            <p:ph type="sldNum" idx="5"/>
+          </p:nvPr>
+        </p:nvSpPr>
+        <p:spPr/>
+        <p:txBody>
+          <a:bodyPr xmlns:a="http://schemas.openxmlformats.org/drawingml/2006/main"/>
+          <a:lstStyle xmlns:a="http://schemas.openxmlformats.org/drawingml/2006/main"/>
+          <a:p xmlns:a="http://schemas.openxmlformats.org/drawingml/2006/main"/>
+        </p:txBody>
+      </p:sp>
+    </p:spTree>
+  </p:cSld>
+  <p:clrMapOvr>
+    <a:masterClrMapping xmlns:a="http://schemas.openxmlformats.org/drawingml/2006/main"/>
+  </p:clrMapOvr>
+</p:notes>
+</file>
+
+<file path=ppt/notesSlides/notesSlide28.xml><?xml version="1.0" encoding="utf-8"?>
+<p:notes xmlns:p="http://schemas.openxmlformats.org/presentationml/2006/main">
+  <p:cSld>
+    <p:spTree>
+      <p:nvGrpSpPr>
+        <p:cNvPr id="1" name=""/>
+        <p:cNvGrpSpPr/>
+        <p:nvPr/>
+      </p:nvGrpSpPr>
+      <p:grpSpPr>
+        <a:xfrm xmlns:a="http://schemas.openxmlformats.org/drawingml/2006/main"/>
+      </p:grpSpPr>
+      <p:sp>
+        <p:nvSpPr>
+          <p:cNvPr id="2" name="Slide Image Placeholder 1"/>
+          <p:cNvSpPr>
+            <a:spLocks xmlns:a="http://schemas.openxmlformats.org/drawingml/2006/main" noGrp="1"/>
+          </p:cNvSpPr>
+          <p:nvPr>
+            <p:ph type="sldImg" idx="0"/>
+          </p:nvPr>
+        </p:nvSpPr>
+        <p:spPr/>
+      </p:sp>
+      <p:sp>
+        <p:nvSpPr>
+          <p:cNvPr id="3" name="Notes Placeholder 2"/>
+          <p:cNvSpPr>
+            <a:spLocks xmlns:a="http://schemas.openxmlformats.org/drawingml/2006/main" noGrp="1"/>
+          </p:cNvSpPr>
+          <p:nvPr>
+            <p:ph type="body" idx="1"/>
+          </p:nvPr>
+        </p:nvSpPr>
+        <p:spPr/>
+        <p:txBody>
+          <a:bodyPr xmlns:a="http://schemas.openxmlformats.org/drawingml/2006/main"/>
+          <a:lstStyle xmlns:a="http://schemas.openxmlformats.org/drawingml/2006/main"/>
+          <a:p xmlns:a="http://schemas.openxmlformats.org/drawingml/2006/main"/>
+        </p:txBody>
+      </p:sp>
+      <p:sp>
+        <p:nvSpPr>
+          <p:cNvPr id="4" name="Slide Number Placeholder 3"/>
+          <p:cNvSpPr>
+            <a:spLocks xmlns:a="http://schemas.openxmlformats.org/drawingml/2006/main" noGrp="1"/>
+          </p:cNvSpPr>
+          <p:nvPr>
+            <p:ph type="sldNum" idx="5"/>
+          </p:nvPr>
+        </p:nvSpPr>
+        <p:spPr/>
+        <p:txBody>
+          <a:bodyPr xmlns:a="http://schemas.openxmlformats.org/drawingml/2006/main"/>
+          <a:lstStyle xmlns:a="http://schemas.openxmlformats.org/drawingml/2006/main"/>
+          <a:p xmlns:a="http://schemas.openxmlformats.org/drawingml/2006/main"/>
+        </p:txBody>
+      </p:sp>
+    </p:spTree>
+  </p:cSld>
+  <p:clrMapOvr>
+    <a:masterClrMapping xmlns:a="http://schemas.openxmlformats.org/drawingml/2006/main"/>
+  </p:clrMapOvr>
+</p:notes>
+</file>
+
+<file path=ppt/notesSlides/notesSlide29.xml><?xml version="1.0" encoding="utf-8"?>
+<p:notes xmlns:p="http://schemas.openxmlformats.org/presentationml/2006/main">
+  <p:cSld>
+    <p:spTree>
+      <p:nvGrpSpPr>
+        <p:cNvPr id="1" name=""/>
+        <p:cNvGrpSpPr/>
+        <p:nvPr/>
+      </p:nvGrpSpPr>
+      <p:grpSpPr>
+        <a:xfrm xmlns:a="http://schemas.openxmlformats.org/drawingml/2006/main"/>
+      </p:grpSpPr>
+      <p:sp>
+        <p:nvSpPr>
+          <p:cNvPr id="2" name="Slide Image Placeholder 1"/>
+          <p:cNvSpPr>
+            <a:spLocks xmlns:a="http://schemas.openxmlformats.org/drawingml/2006/main" noGrp="1"/>
+          </p:cNvSpPr>
+          <p:nvPr>
+            <p:ph type="sldImg" idx="0"/>
+          </p:nvPr>
+        </p:nvSpPr>
+        <p:spPr/>
+      </p:sp>
+      <p:sp>
+        <p:nvSpPr>
+          <p:cNvPr id="3" name="Notes Placeholder 2"/>
+          <p:cNvSpPr>
+            <a:spLocks xmlns:a="http://schemas.openxmlformats.org/drawingml/2006/main" noGrp="1"/>
+          </p:cNvSpPr>
+          <p:nvPr>
+            <p:ph type="body" idx="1"/>
+          </p:nvPr>
+        </p:nvSpPr>
+        <p:spPr/>
+        <p:txBody>
+          <a:bodyPr xmlns:a="http://schemas.openxmlformats.org/drawingml/2006/main"/>
+          <a:lstStyle xmlns:a="http://schemas.openxmlformats.org/drawingml/2006/main"/>
+          <a:p xmlns:a="http://schemas.openxmlformats.org/drawingml/2006/main"/>
+        </p:txBody>
+      </p:sp>
+      <p:sp>
+        <p:nvSpPr>
+          <p:cNvPr id="4" name="Slide Number Placeholder 3"/>
+          <p:cNvSpPr>
+            <a:spLocks xmlns:a="http://schemas.openxmlformats.org/drawingml/2006/main" noGrp="1"/>
+          </p:cNvSpPr>
+          <p:nvPr>
+            <p:ph type="sldNum" idx="5"/>
+          </p:nvPr>
+        </p:nvSpPr>
+        <p:spPr/>
+        <p:txBody>
+          <a:bodyPr xmlns:a="http://schemas.openxmlformats.org/drawingml/2006/main"/>
+          <a:lstStyle xmlns:a="http://schemas.openxmlformats.org/drawingml/2006/main"/>
+          <a:p xmlns:a="http://schemas.openxmlformats.org/drawingml/2006/main"/>
+        </p:txBody>
+      </p:sp>
+    </p:spTree>
+  </p:cSld>
+  <p:clrMapOvr>
+    <a:masterClrMapping xmlns:a="http://schemas.openxmlformats.org/drawingml/2006/main"/>
+  </p:clrMapOvr>
+</p:notes>
+</file>
+
+<file path=ppt/notesSlides/notesSlide3.xml><?xml version="1.0" encoding="utf-8"?>
+<p:notes xmlns:p="http://schemas.openxmlformats.org/presentationml/2006/main">
+  <p:cSld>
+    <p:spTree>
+      <p:nvGrpSpPr>
+        <p:cNvPr id="1" name=""/>
+        <p:cNvGrpSpPr/>
+        <p:nvPr/>
+      </p:nvGrpSpPr>
+      <p:grpSpPr>
+        <a:xfrm xmlns:a="http://schemas.openxmlformats.org/drawingml/2006/main"/>
+      </p:grpSpPr>
+      <p:sp>
+        <p:nvSpPr>
+          <p:cNvPr id="2" name="Slide Image Placeholder 1"/>
+          <p:cNvSpPr>
+            <a:spLocks xmlns:a="http://schemas.openxmlformats.org/drawingml/2006/main" noGrp="1"/>
+          </p:cNvSpPr>
+          <p:nvPr>
+            <p:ph type="sldImg" idx="0"/>
+          </p:nvPr>
+        </p:nvSpPr>
+        <p:spPr/>
+      </p:sp>
+      <p:sp>
+        <p:nvSpPr>
+          <p:cNvPr id="3" name="Notes Placeholder 2"/>
+          <p:cNvSpPr>
+            <a:spLocks xmlns:a="http://schemas.openxmlformats.org/drawingml/2006/main" noGrp="1"/>
+          </p:cNvSpPr>
+          <p:nvPr>
+            <p:ph type="body" idx="1"/>
+          </p:nvPr>
+        </p:nvSpPr>
+        <p:spPr/>
+        <p:txBody>
+          <a:bodyPr xmlns:a="http://schemas.openxmlformats.org/drawingml/2006/main"/>
+          <a:lstStyle xmlns:a="http://schemas.openxmlformats.org/drawingml/2006/main"/>
+          <a:p xmlns:a="http://schemas.openxmlformats.org/drawingml/2006/main"/>
+        </p:txBody>
+      </p:sp>
+      <p:sp>
+        <p:nvSpPr>
+          <p:cNvPr id="4" name="Slide Number Placeholder 3"/>
+          <p:cNvSpPr>
+            <a:spLocks xmlns:a="http://schemas.openxmlformats.org/drawingml/2006/main" noGrp="1"/>
+          </p:cNvSpPr>
+          <p:nvPr>
+            <p:ph type="sldNum" idx="5"/>
+          </p:nvPr>
+        </p:nvSpPr>
+        <p:spPr/>
+        <p:txBody>
+          <a:bodyPr xmlns:a="http://schemas.openxmlformats.org/drawingml/2006/main"/>
+          <a:lstStyle xmlns:a="http://schemas.openxmlformats.org/drawingml/2006/main"/>
+          <a:p xmlns:a="http://schemas.openxmlformats.org/drawingml/2006/main"/>
+        </p:txBody>
+      </p:sp>
+    </p:spTree>
+  </p:cSld>
+  <p:clrMapOvr>
+    <a:masterClrMapping xmlns:a="http://schemas.openxmlformats.org/drawingml/2006/main"/>
+  </p:clrMapOvr>
+</p:notes>
+</file>
+
+<file path=ppt/notesSlides/notesSlide30.xml><?xml version="1.0" encoding="utf-8"?>
+<p:notes xmlns:p="http://schemas.openxmlformats.org/presentationml/2006/main">
+  <p:cSld>
+    <p:spTree>
+      <p:nvGrpSpPr>
+        <p:cNvPr id="1" name=""/>
+        <p:cNvGrpSpPr/>
+        <p:nvPr/>
+      </p:nvGrpSpPr>
+      <p:grpSpPr>
+        <a:xfrm xmlns:a="http://schemas.openxmlformats.org/drawingml/2006/main"/>
+      </p:grpSpPr>
+      <p:sp>
+        <p:nvSpPr>
+          <p:cNvPr id="2" name="Slide Image Placeholder 1"/>
+          <p:cNvSpPr>
+            <a:spLocks xmlns:a="http://schemas.openxmlformats.org/drawingml/2006/main" noGrp="1"/>
+          </p:cNvSpPr>
+          <p:nvPr>
+            <p:ph type="sldImg" idx="0"/>
+          </p:nvPr>
+        </p:nvSpPr>
+        <p:spPr/>
+      </p:sp>
+      <p:sp>
+        <p:nvSpPr>
+          <p:cNvPr id="3" name="Notes Placeholder 2"/>
+          <p:cNvSpPr>
+            <a:spLocks xmlns:a="http://schemas.openxmlformats.org/drawingml/2006/main" noGrp="1"/>
+          </p:cNvSpPr>
+          <p:nvPr>
+            <p:ph type="body" idx="1"/>
+          </p:nvPr>
+        </p:nvSpPr>
+        <p:spPr/>
+        <p:txBody>
+          <a:bodyPr xmlns:a="http://schemas.openxmlformats.org/drawingml/2006/main"/>
+          <a:lstStyle xmlns:a="http://schemas.openxmlformats.org/drawingml/2006/main"/>
+          <a:p xmlns:a="http://schemas.openxmlformats.org/drawingml/2006/main"/>
+        </p:txBody>
+      </p:sp>
+      <p:sp>
+        <p:nvSpPr>
+          <p:cNvPr id="4" name="Slide Number Placeholder 3"/>
+          <p:cNvSpPr>
+            <a:spLocks xmlns:a="http://schemas.openxmlformats.org/drawingml/2006/main" noGrp="1"/>
+          </p:cNvSpPr>
+          <p:nvPr>
+            <p:ph type="sldNum" idx="5"/>
+          </p:nvPr>
+        </p:nvSpPr>
+        <p:spPr/>
+        <p:txBody>
+          <a:bodyPr xmlns:a="http://schemas.openxmlformats.org/drawingml/2006/main"/>
+          <a:lstStyle xmlns:a="http://schemas.openxmlformats.org/drawingml/2006/main"/>
+          <a:p xmlns:a="http://schemas.openxmlformats.org/drawingml/2006/main"/>
+        </p:txBody>
+      </p:sp>
+    </p:spTree>
+  </p:cSld>
+  <p:clrMapOvr>
+    <a:masterClrMapping xmlns:a="http://schemas.openxmlformats.org/drawingml/2006/main"/>
+  </p:clrMapOvr>
+</p:notes>
+</file>
+
+<file path=ppt/notesSlides/notesSlide4.xml><?xml version="1.0" encoding="utf-8"?>
+<p:notes xmlns:p="http://schemas.openxmlformats.org/presentationml/2006/main">
+  <p:cSld>
+    <p:spTree>
+      <p:nvGrpSpPr>
+        <p:cNvPr id="1" name=""/>
+        <p:cNvGrpSpPr/>
+        <p:nvPr/>
+      </p:nvGrpSpPr>
+      <p:grpSpPr>
+        <a:xfrm xmlns:a="http://schemas.openxmlformats.org/drawingml/2006/main"/>
+      </p:grpSpPr>
+      <p:sp>
+        <p:nvSpPr>
+          <p:cNvPr id="2" name="Slide Image Placeholder 1"/>
+          <p:cNvSpPr>
+            <a:spLocks xmlns:a="http://schemas.openxmlformats.org/drawingml/2006/main" noGrp="1"/>
+          </p:cNvSpPr>
+          <p:nvPr>
+            <p:ph type="sldImg" idx="0"/>
+          </p:nvPr>
+        </p:nvSpPr>
+        <p:spPr/>
+      </p:sp>
+      <p:sp>
+        <p:nvSpPr>
+          <p:cNvPr id="3" name="Notes Placeholder 2"/>
+          <p:cNvSpPr>
+            <a:spLocks xmlns:a="http://schemas.openxmlformats.org/drawingml/2006/main" noGrp="1"/>
+          </p:cNvSpPr>
+          <p:nvPr>
+            <p:ph type="body" idx="1"/>
+          </p:nvPr>
+        </p:nvSpPr>
+        <p:spPr/>
+        <p:txBody>
+          <a:bodyPr xmlns:a="http://schemas.openxmlformats.org/drawingml/2006/main"/>
+          <a:lstStyle xmlns:a="http://schemas.openxmlformats.org/drawingml/2006/main"/>
+          <a:p xmlns:a="http://schemas.openxmlformats.org/drawingml/2006/main"/>
+        </p:txBody>
+      </p:sp>
+      <p:sp>
+        <p:nvSpPr>
+          <p:cNvPr id="4" name="Slide Number Placeholder 3"/>
+          <p:cNvSpPr>
+            <a:spLocks xmlns:a="http://schemas.openxmlformats.org/drawingml/2006/main" noGrp="1"/>
+          </p:cNvSpPr>
+          <p:nvPr>
+            <p:ph type="sldNum" idx="5"/>
+          </p:nvPr>
+        </p:nvSpPr>
+        <p:spPr/>
+        <p:txBody>
+          <a:bodyPr xmlns:a="http://schemas.openxmlformats.org/drawingml/2006/main"/>
+          <a:lstStyle xmlns:a="http://schemas.openxmlformats.org/drawingml/2006/main"/>
+          <a:p xmlns:a="http://schemas.openxmlformats.org/drawingml/2006/main"/>
+        </p:txBody>
+      </p:sp>
+    </p:spTree>
+  </p:cSld>
+  <p:clrMapOvr>
+    <a:masterClrMapping xmlns:a="http://schemas.openxmlformats.org/drawingml/2006/main"/>
+  </p:clrMapOvr>
+</p:notes>
+</file>
+
+<file path=ppt/notesSlides/notesSlide5.xml><?xml version="1.0" encoding="utf-8"?>
+<p:notes xmlns:p="http://schemas.openxmlformats.org/presentationml/2006/main">
+  <p:cSld>
+    <p:spTree>
+      <p:nvGrpSpPr>
+        <p:cNvPr id="1" name=""/>
+        <p:cNvGrpSpPr/>
+        <p:nvPr/>
+      </p:nvGrpSpPr>
+      <p:grpSpPr>
+        <a:xfrm xmlns:a="http://schemas.openxmlformats.org/drawingml/2006/main"/>
+      </p:grpSpPr>
+      <p:sp>
+        <p:nvSpPr>
+          <p:cNvPr id="2" name="Slide Image Placeholder 1"/>
+          <p:cNvSpPr>
+            <a:spLocks xmlns:a="http://schemas.openxmlformats.org/drawingml/2006/main" noGrp="1"/>
+          </p:cNvSpPr>
+          <p:nvPr>
+            <p:ph type="sldImg" idx="0"/>
+          </p:nvPr>
+        </p:nvSpPr>
+        <p:spPr/>
+      </p:sp>
+      <p:sp>
+        <p:nvSpPr>
+          <p:cNvPr id="3" name="Notes Placeholder 2"/>
+          <p:cNvSpPr>
+            <a:spLocks xmlns:a="http://schemas.openxmlformats.org/drawingml/2006/main" noGrp="1"/>
+          </p:cNvSpPr>
+          <p:nvPr>
+            <p:ph type="body" idx="1"/>
+          </p:nvPr>
+        </p:nvSpPr>
+        <p:spPr/>
+        <p:txBody>
+          <a:bodyPr xmlns:a="http://schemas.openxmlformats.org/drawingml/2006/main"/>
+          <a:lstStyle xmlns:a="http://schemas.openxmlformats.org/drawingml/2006/main"/>
+          <a:p xmlns:a="http://schemas.openxmlformats.org/drawingml/2006/main"/>
+        </p:txBody>
+      </p:sp>
+      <p:sp>
+        <p:nvSpPr>
+          <p:cNvPr id="4" name="Slide Number Placeholder 3"/>
+          <p:cNvSpPr>
+            <a:spLocks xmlns:a="http://schemas.openxmlformats.org/drawingml/2006/main" noGrp="1"/>
+          </p:cNvSpPr>
+          <p:nvPr>
+            <p:ph type="sldNum" idx="5"/>
+          </p:nvPr>
+        </p:nvSpPr>
+        <p:spPr/>
+        <p:txBody>
+          <a:bodyPr xmlns:a="http://schemas.openxmlformats.org/drawingml/2006/main"/>
+          <a:lstStyle xmlns:a="http://schemas.openxmlformats.org/drawingml/2006/main"/>
+          <a:p xmlns:a="http://schemas.openxmlformats.org/drawingml/2006/main"/>
+        </p:txBody>
+      </p:sp>
+    </p:spTree>
+  </p:cSld>
+  <p:clrMapOvr>
+    <a:masterClrMapping xmlns:a="http://schemas.openxmlformats.org/drawingml/2006/main"/>
+  </p:clrMapOvr>
+</p:notes>
+</file>
+
+<file path=ppt/notesSlides/notesSlide6.xml><?xml version="1.0" encoding="utf-8"?>
+<p:notes xmlns:p="http://schemas.openxmlformats.org/presentationml/2006/main">
+  <p:cSld>
+    <p:spTree>
+      <p:nvGrpSpPr>
+        <p:cNvPr id="1" name=""/>
+        <p:cNvGrpSpPr/>
+        <p:nvPr/>
+      </p:nvGrpSpPr>
+      <p:grpSpPr>
+        <a:xfrm xmlns:a="http://schemas.openxmlformats.org/drawingml/2006/main"/>
+      </p:grpSpPr>
+      <p:sp>
+        <p:nvSpPr>
+          <p:cNvPr id="2" name="Slide Image Placeholder 1"/>
+          <p:cNvSpPr>
+            <a:spLocks xmlns:a="http://schemas.openxmlformats.org/drawingml/2006/main" noGrp="1"/>
+          </p:cNvSpPr>
+          <p:nvPr>
+            <p:ph type="sldImg" idx="0"/>
+          </p:nvPr>
+        </p:nvSpPr>
+        <p:spPr/>
+      </p:sp>
+      <p:sp>
+        <p:nvSpPr>
+          <p:cNvPr id="3" name="Notes Placeholder 2"/>
+          <p:cNvSpPr>
+            <a:spLocks xmlns:a="http://schemas.openxmlformats.org/drawingml/2006/main" noGrp="1"/>
+          </p:cNvSpPr>
+          <p:nvPr>
+            <p:ph type="body" idx="1"/>
+          </p:nvPr>
+        </p:nvSpPr>
+        <p:spPr/>
+        <p:txBody>
+          <a:bodyPr xmlns:a="http://schemas.openxmlformats.org/drawingml/2006/main"/>
+          <a:lstStyle xmlns:a="http://schemas.openxmlformats.org/drawingml/2006/main"/>
+          <a:p xmlns:a="http://schemas.openxmlformats.org/drawingml/2006/main"/>
+        </p:txBody>
+      </p:sp>
+      <p:sp>
+        <p:nvSpPr>
+          <p:cNvPr id="4" name="Slide Number Placeholder 3"/>
+          <p:cNvSpPr>
+            <a:spLocks xmlns:a="http://schemas.openxmlformats.org/drawingml/2006/main" noGrp="1"/>
+          </p:cNvSpPr>
+          <p:nvPr>
+            <p:ph type="sldNum" idx="5"/>
+          </p:nvPr>
+        </p:nvSpPr>
+        <p:spPr/>
+        <p:txBody>
+          <a:bodyPr xmlns:a="http://schemas.openxmlformats.org/drawingml/2006/main"/>
+          <a:lstStyle xmlns:a="http://schemas.openxmlformats.org/drawingml/2006/main"/>
+          <a:p xmlns:a="http://schemas.openxmlformats.org/drawingml/2006/main"/>
+        </p:txBody>
+      </p:sp>
+    </p:spTree>
+  </p:cSld>
+  <p:clrMapOvr>
+    <a:masterClrMapping xmlns:a="http://schemas.openxmlformats.org/drawingml/2006/main"/>
+  </p:clrMapOvr>
+</p:notes>
+</file>
+
+<file path=ppt/notesSlides/notesSlide7.xml><?xml version="1.0" encoding="utf-8"?>
+<p:notes xmlns:p="http://schemas.openxmlformats.org/presentationml/2006/main">
+  <p:cSld>
+    <p:spTree>
+      <p:nvGrpSpPr>
+        <p:cNvPr id="1" name=""/>
+        <p:cNvGrpSpPr/>
+        <p:nvPr/>
+      </p:nvGrpSpPr>
+      <p:grpSpPr>
+        <a:xfrm xmlns:a="http://schemas.openxmlformats.org/drawingml/2006/main"/>
+      </p:grpSpPr>
+      <p:sp>
+        <p:nvSpPr>
+          <p:cNvPr id="2" name="Slide Image Placeholder 1"/>
+          <p:cNvSpPr>
+            <a:spLocks xmlns:a="http://schemas.openxmlformats.org/drawingml/2006/main" noGrp="1"/>
+          </p:cNvSpPr>
+          <p:nvPr>
+            <p:ph type="sldImg" idx="0"/>
+          </p:nvPr>
+        </p:nvSpPr>
+        <p:spPr/>
+      </p:sp>
+      <p:sp>
+        <p:nvSpPr>
+          <p:cNvPr id="3" name="Notes Placeholder 2"/>
+          <p:cNvSpPr>
+            <a:spLocks xmlns:a="http://schemas.openxmlformats.org/drawingml/2006/main" noGrp="1"/>
+          </p:cNvSpPr>
+          <p:nvPr>
+            <p:ph type="body" idx="1"/>
+          </p:nvPr>
+        </p:nvSpPr>
+        <p:spPr/>
+        <p:txBody>
+          <a:bodyPr xmlns:a="http://schemas.openxmlformats.org/drawingml/2006/main"/>
+          <a:lstStyle xmlns:a="http://schemas.openxmlformats.org/drawingml/2006/main"/>
+          <a:p xmlns:a="http://schemas.openxmlformats.org/drawingml/2006/main"/>
+        </p:txBody>
+      </p:sp>
+      <p:sp>
+        <p:nvSpPr>
+          <p:cNvPr id="4" name="Slide Number Placeholder 3"/>
+          <p:cNvSpPr>
+            <a:spLocks xmlns:a="http://schemas.openxmlformats.org/drawingml/2006/main" noGrp="1"/>
+          </p:cNvSpPr>
+          <p:nvPr>
+            <p:ph type="sldNum" idx="5"/>
+          </p:nvPr>
+        </p:nvSpPr>
+        <p:spPr/>
+        <p:txBody>
+          <a:bodyPr xmlns:a="http://schemas.openxmlformats.org/drawingml/2006/main"/>
+          <a:lstStyle xmlns:a="http://schemas.openxmlformats.org/drawingml/2006/main"/>
+          <a:p xmlns:a="http://schemas.openxmlformats.org/drawingml/2006/main"/>
+        </p:txBody>
+      </p:sp>
+    </p:spTree>
+  </p:cSld>
+  <p:clrMapOvr>
+    <a:masterClrMapping xmlns:a="http://schemas.openxmlformats.org/drawingml/2006/main"/>
+  </p:clrMapOvr>
+</p:notes>
+</file>
+
+<file path=ppt/notesSlides/notesSlide8.xml><?xml version="1.0" encoding="utf-8"?>
+<p:notes xmlns:p="http://schemas.openxmlformats.org/presentationml/2006/main">
+  <p:cSld>
+    <p:spTree>
+      <p:nvGrpSpPr>
+        <p:cNvPr id="1" name=""/>
+        <p:cNvGrpSpPr/>
+        <p:nvPr/>
+      </p:nvGrpSpPr>
+      <p:grpSpPr>
+        <a:xfrm xmlns:a="http://schemas.openxmlformats.org/drawingml/2006/main"/>
+      </p:grpSpPr>
+      <p:sp>
+        <p:nvSpPr>
+          <p:cNvPr id="2" name="Slide Image Placeholder 1"/>
+          <p:cNvSpPr>
+            <a:spLocks xmlns:a="http://schemas.openxmlformats.org/drawingml/2006/main" noGrp="1"/>
+          </p:cNvSpPr>
+          <p:nvPr>
+            <p:ph type="sldImg" idx="0"/>
+          </p:nvPr>
+        </p:nvSpPr>
+        <p:spPr/>
+      </p:sp>
+      <p:sp>
+        <p:nvSpPr>
+          <p:cNvPr id="3" name="Notes Placeholder 2"/>
+          <p:cNvSpPr>
+            <a:spLocks xmlns:a="http://schemas.openxmlformats.org/drawingml/2006/main" noGrp="1"/>
+          </p:cNvSpPr>
+          <p:nvPr>
+            <p:ph type="body" idx="1"/>
+          </p:nvPr>
+        </p:nvSpPr>
+        <p:spPr/>
+        <p:txBody>
+          <a:bodyPr xmlns:a="http://schemas.openxmlformats.org/drawingml/2006/main"/>
+          <a:lstStyle xmlns:a="http://schemas.openxmlformats.org/drawingml/2006/main"/>
+          <a:p xmlns:a="http://schemas.openxmlformats.org/drawingml/2006/main"/>
+        </p:txBody>
+      </p:sp>
+      <p:sp>
+        <p:nvSpPr>
+          <p:cNvPr id="4" name="Slide Number Placeholder 3"/>
+          <p:cNvSpPr>
+            <a:spLocks xmlns:a="http://schemas.openxmlformats.org/drawingml/2006/main" noGrp="1"/>
+          </p:cNvSpPr>
+          <p:nvPr>
+            <p:ph type="sldNum" idx="5"/>
+          </p:nvPr>
+        </p:nvSpPr>
+        <p:spPr/>
+        <p:txBody>
+          <a:bodyPr xmlns:a="http://schemas.openxmlformats.org/drawingml/2006/main"/>
+          <a:lstStyle xmlns:a="http://schemas.openxmlformats.org/drawingml/2006/main"/>
+          <a:p xmlns:a="http://schemas.openxmlformats.org/drawingml/2006/main"/>
+        </p:txBody>
+      </p:sp>
+    </p:spTree>
+  </p:cSld>
+  <p:clrMapOvr>
+    <a:masterClrMapping xmlns:a="http://schemas.openxmlformats.org/drawingml/2006/main"/>
+  </p:clrMapOvr>
+</p:notes>
+</file>
+
+<file path=ppt/notesSlides/notesSlide9.xml><?xml version="1.0" encoding="utf-8"?>
+<p:notes xmlns:p="http://schemas.openxmlformats.org/presentationml/2006/main">
+  <p:cSld>
+    <p:spTree>
+      <p:nvGrpSpPr>
+        <p:cNvPr id="1" name=""/>
+        <p:cNvGrpSpPr/>
+        <p:nvPr/>
+      </p:nvGrpSpPr>
+      <p:grpSpPr>
+        <a:xfrm xmlns:a="http://schemas.openxmlformats.org/drawingml/2006/main"/>
+      </p:grpSpPr>
+      <p:sp>
+        <p:nvSpPr>
+          <p:cNvPr id="2" name="Slide Image Placeholder 1"/>
+          <p:cNvSpPr>
+            <a:spLocks xmlns:a="http://schemas.openxmlformats.org/drawingml/2006/main" noGrp="1"/>
+          </p:cNvSpPr>
+          <p:nvPr>
+            <p:ph type="sldImg" idx="0"/>
+          </p:nvPr>
+        </p:nvSpPr>
+        <p:spPr/>
+      </p:sp>
+      <p:sp>
+        <p:nvSpPr>
+          <p:cNvPr id="3" name="Notes Placeholder 2"/>
+          <p:cNvSpPr>
+            <a:spLocks xmlns:a="http://schemas.openxmlformats.org/drawingml/2006/main" noGrp="1"/>
+          </p:cNvSpPr>
+          <p:nvPr>
+            <p:ph type="body" idx="1"/>
+          </p:nvPr>
+        </p:nvSpPr>
+        <p:spPr/>
+        <p:txBody>
+          <a:bodyPr xmlns:a="http://schemas.openxmlformats.org/drawingml/2006/main"/>
+          <a:lstStyle xmlns:a="http://schemas.openxmlformats.org/drawingml/2006/main"/>
+          <a:p xmlns:a="http://schemas.openxmlformats.org/drawingml/2006/main"/>
+        </p:txBody>
+      </p:sp>
+      <p:sp>
+        <p:nvSpPr>
+          <p:cNvPr id="4" name="Slide Number Placeholder 3"/>
+          <p:cNvSpPr>
+            <a:spLocks xmlns:a="http://schemas.openxmlformats.org/drawingml/2006/main" noGrp="1"/>
+          </p:cNvSpPr>
+          <p:nvPr>
+            <p:ph type="sldNum" idx="5"/>
+          </p:nvPr>
+        </p:nvSpPr>
+        <p:spPr/>
+        <p:txBody>
+          <a:bodyPr xmlns:a="http://schemas.openxmlformats.org/drawingml/2006/main"/>
+          <a:lstStyle xmlns:a="http://schemas.openxmlformats.org/drawingml/2006/main"/>
+          <a:p xmlns:a="http://schemas.openxmlformats.org/drawingml/2006/main"/>
+        </p:txBody>
+      </p:sp>
+    </p:spTree>
+  </p:cSld>
+  <p:clrMapOvr>
+    <a:masterClrMapping xmlns:a="http://schemas.openxmlformats.org/drawingml/2006/main"/>
+  </p:clrMapOvr>
+</p:notes>
+</file>
+
 <file path=ppt/slideLayouts/slideLayout1.xml><?xml version="1.0" encoding="utf-8"?>
 <p:sldLayout xmlns:p="http://schemas.openxmlformats.org/presentationml/2006/main" type="title">
   <p:cSld name="Title Slide">
@@ -601,7 +2544,7 @@
   </p:cSld>
   <p:clrMap bg1="lt1" tx1="dk1" bg2="lt2" tx2="dk2" accent1="accent1" accent2="accent2" accent3="accent3" accent4="accent4" accent5="accent5" accent6="accent6" hlink="hlink" folHlink="folHlink"/>
   <p:sldLayoutIdLst>
-    <p:sldLayoutId xmlns:r="http://schemas.openxmlformats.org/officeDocument/2006/relationships" id="2147483649" r:id="Ra963cdc044dd4ca4"/>
+    <p:sldLayoutId xmlns:r="http://schemas.openxmlformats.org/officeDocument/2006/relationships" id="2147483649" r:id="R06ea973d41604902"/>
   </p:sldLayoutIdLst>
   <p:txStyles>
     <p:titleStyle>
@@ -1180,6 +3123,7 @@
           <a:lstStyle xmlns:a="http://schemas.openxmlformats.org/drawingml/2006/main"/>
           <a:p xmlns:a="http://schemas.openxmlformats.org/drawingml/2006/main">
             <a:pPr>
+              <a:buNone/>
               <a:defRPr sz="2700" b="1">
                 <a:solidFill>
                   <a:srgbClr val="1F2937"/>
@@ -1192,7 +3136,7 @@
                   <a:srgbClr val="1F2937"/>
                 </a:solidFill>
               </a:rPr>
-              <a:t>スライドタイトル</a:t>
+              <a:t>Developing Quantum Use Cases from Future Everyday Life Scenarios</a:t>
             </a:r>
           </a:p>
         </p:txBody>
@@ -1230,12 +3174,41 @@
           </a:ln>
         </p:spPr>
       </p:sp>
-      <p:sp>
-        <p:nvSpPr>
-          <p:cNvPr id="3" name="body-placeholder">
+    </p:spTree>
+    <p:extLst>
+      <p:ext uri="{BB962C8B-B14F-4D97-AF65-F5344CB8AC3E}">
+        <p14:creationId xmlns:p14="http://schemas.microsoft.com/office/powerpoint/2010/main" val="641295815"/>
+      </p:ext>
+    </p:extLst>
+  </p:cSld>
+</p:sld>
+</file>
+
+<file path=ppt/slides/slide10.xml><?xml version="1.0" encoding="utf-8"?>
+<p:sld xmlns:p="http://schemas.openxmlformats.org/presentationml/2006/main">
+  <p:cSld>
+    <p:bg>
+      <p:bgPr>
+        <a:solidFill xmlns:a="http://schemas.openxmlformats.org/drawingml/2006/main">
+          <a:srgbClr val="FFFFFF"/>
+        </a:solidFill>
+      </p:bgPr>
+    </p:bg>
+    <p:spTree>
+      <p:nvGrpSpPr>
+        <p:cNvPr id="1" name=""/>
+        <p:cNvGrpSpPr/>
+        <p:nvPr/>
+      </p:nvGrpSpPr>
+      <p:grpSpPr>
+        <a:xfrm xmlns:a="http://schemas.openxmlformats.org/drawingml/2006/main"/>
+      </p:grpSpPr>
+      <p:sp>
+        <p:nvSpPr>
+          <p:cNvPr id="1" name="slide-title">
             <a:extLst xmlns:a="http://schemas.openxmlformats.org/drawingml/2006/main">
               <a:ext uri="{FF2B5EF4-FFF2-40B4-BE49-F238E27FC236}">
-                <a16:creationId xmlns:a16="http://schemas.microsoft.com/office/drawing/2014/main" id="{03C62F7D-1F9D-4FFB-9F66-1DA1E3A7C568}"/>
+                <a16:creationId xmlns:a16="http://schemas.microsoft.com/office/drawing/2014/main" id="{4ECE2A21-4400-41C9-93B6-B254057071F5}"/>
               </a:ext>
             </a:extLst>
           </p:cNvPr>
@@ -1246,8 +3219,8 @@
         </p:nvSpPr>
         <p:spPr>
           <a:xfrm xmlns:a="http://schemas.openxmlformats.org/drawingml/2006/main">
-            <a:off x="685800" y="1485900"/>
-            <a:ext cx="10820400" cy="4476750"/>
+            <a:off x="685800" y="323850"/>
+            <a:ext cx="10820400" cy="514350"/>
           </a:xfrm>
           <a:prstGeom xmlns:a="http://schemas.openxmlformats.org/drawingml/2006/main" prst="rect">
             <a:avLst/>
@@ -1263,22 +3236,3220 @@
           <a:lstStyle xmlns:a="http://schemas.openxmlformats.org/drawingml/2006/main"/>
           <a:p xmlns:a="http://schemas.openxmlformats.org/drawingml/2006/main">
             <a:pPr>
-              <a:defRPr sz="1650">
+              <a:buNone/>
+              <a:defRPr sz="2700" b="1">
                 <a:solidFill>
-                  <a:srgbClr val="9CA3AF"/>
+                  <a:srgbClr val="1F2937"/>
                 </a:solidFill>
               </a:defRPr>
             </a:pPr>
             <a:r>
-              <a:rPr sz="1650">
+              <a:rPr sz="2700" b="1">
                 <a:solidFill>
-                  <a:srgbClr val="9CA3AF"/>
+                  <a:srgbClr val="1F2937"/>
                 </a:solidFill>
               </a:rPr>
-              <a:t>ここに本文を入力します</a:t>
+              <a:t>Choose One Story</a:t>
             </a:r>
           </a:p>
         </p:txBody>
+      </p:sp>
+      <p:sp>
+        <p:nvSpPr>
+          <p:cNvPr id="2" name="header-rule">
+            <a:extLst xmlns:a="http://schemas.openxmlformats.org/drawingml/2006/main">
+              <a:ext uri="{FF2B5EF4-FFF2-40B4-BE49-F238E27FC236}">
+                <a16:creationId xmlns:a16="http://schemas.microsoft.com/office/drawing/2014/main" id="{DBCD3DD8-5A42-4065-8954-85905B380262}"/>
+              </a:ext>
+            </a:extLst>
+          </p:cNvPr>
+          <p:cNvSpPr>
+            <a:spLocks xmlns:a="http://schemas.openxmlformats.org/drawingml/2006/main" noGrp="1"/>
+          </p:cNvSpPr>
+          <p:nvPr/>
+        </p:nvSpPr>
+        <p:spPr>
+          <a:xfrm xmlns:a="http://schemas.openxmlformats.org/drawingml/2006/main">
+            <a:off x="685800" y="1000125"/>
+            <a:ext cx="10820400" cy="38100"/>
+          </a:xfrm>
+          <a:prstGeom xmlns:a="http://schemas.openxmlformats.org/drawingml/2006/main" prst="rect">
+            <a:avLst/>
+          </a:prstGeom>
+          <a:solidFill xmlns:a="http://schemas.openxmlformats.org/drawingml/2006/main">
+            <a:srgbClr val="73CBE8"/>
+          </a:solidFill>
+          <a:ln xmlns:a="http://schemas.openxmlformats.org/drawingml/2006/main" w="0">
+            <a:solidFill>
+              <a:srgbClr val="73CBE8"/>
+            </a:solidFill>
+            <a:prstDash val="solid"/>
+          </a:ln>
+        </p:spPr>
+      </p:sp>
+    </p:spTree>
+    <p:extLst>
+      <p:ext uri="{BB962C8B-B14F-4D97-AF65-F5344CB8AC3E}">
+        <p14:creationId xmlns:p14="http://schemas.microsoft.com/office/powerpoint/2010/main" val="641295815"/>
+      </p:ext>
+    </p:extLst>
+  </p:cSld>
+</p:sld>
+</file>
+
+<file path=ppt/slides/slide11.xml><?xml version="1.0" encoding="utf-8"?>
+<p:sld xmlns:p="http://schemas.openxmlformats.org/presentationml/2006/main">
+  <p:cSld>
+    <p:bg>
+      <p:bgPr>
+        <a:solidFill xmlns:a="http://schemas.openxmlformats.org/drawingml/2006/main">
+          <a:srgbClr val="FFFFFF"/>
+        </a:solidFill>
+      </p:bgPr>
+    </p:bg>
+    <p:spTree>
+      <p:nvGrpSpPr>
+        <p:cNvPr id="1" name=""/>
+        <p:cNvGrpSpPr/>
+        <p:nvPr/>
+      </p:nvGrpSpPr>
+      <p:grpSpPr>
+        <a:xfrm xmlns:a="http://schemas.openxmlformats.org/drawingml/2006/main"/>
+      </p:grpSpPr>
+      <p:sp>
+        <p:nvSpPr>
+          <p:cNvPr id="1" name="slide-title">
+            <a:extLst xmlns:a="http://schemas.openxmlformats.org/drawingml/2006/main">
+              <a:ext uri="{FF2B5EF4-FFF2-40B4-BE49-F238E27FC236}">
+                <a16:creationId xmlns:a16="http://schemas.microsoft.com/office/drawing/2014/main" id="{4ECE2A21-4400-41C9-93B6-B254057071F5}"/>
+              </a:ext>
+            </a:extLst>
+          </p:cNvPr>
+          <p:cNvSpPr>
+            <a:spLocks xmlns:a="http://schemas.openxmlformats.org/drawingml/2006/main" noGrp="1"/>
+          </p:cNvSpPr>
+          <p:nvPr/>
+        </p:nvSpPr>
+        <p:spPr>
+          <a:xfrm xmlns:a="http://schemas.openxmlformats.org/drawingml/2006/main">
+            <a:off x="685800" y="323850"/>
+            <a:ext cx="10820400" cy="514350"/>
+          </a:xfrm>
+          <a:prstGeom xmlns:a="http://schemas.openxmlformats.org/drawingml/2006/main" prst="rect">
+            <a:avLst/>
+          </a:prstGeom>
+          <a:noFill xmlns:a="http://schemas.openxmlformats.org/drawingml/2006/main"/>
+          <a:ln xmlns:a="http://schemas.openxmlformats.org/drawingml/2006/main" w="0">
+            <a:noFill/>
+            <a:prstDash val="solid"/>
+          </a:ln>
+        </p:spPr>
+        <p:txBody>
+          <a:bodyPr xmlns:a="http://schemas.openxmlformats.org/drawingml/2006/main"/>
+          <a:lstStyle xmlns:a="http://schemas.openxmlformats.org/drawingml/2006/main"/>
+          <a:p xmlns:a="http://schemas.openxmlformats.org/drawingml/2006/main">
+            <a:pPr>
+              <a:buNone/>
+              <a:defRPr sz="2700" b="1">
+                <a:solidFill>
+                  <a:srgbClr val="1F2937"/>
+                </a:solidFill>
+              </a:defRPr>
+            </a:pPr>
+            <a:r>
+              <a:rPr sz="2700" b="1">
+                <a:solidFill>
+                  <a:srgbClr val="1F2937"/>
+                </a:solidFill>
+              </a:rPr>
+              <a:t>Future Story 1</a:t>
+            </a:r>
+          </a:p>
+        </p:txBody>
+      </p:sp>
+      <p:sp>
+        <p:nvSpPr>
+          <p:cNvPr id="2" name="header-rule">
+            <a:extLst xmlns:a="http://schemas.openxmlformats.org/drawingml/2006/main">
+              <a:ext uri="{FF2B5EF4-FFF2-40B4-BE49-F238E27FC236}">
+                <a16:creationId xmlns:a16="http://schemas.microsoft.com/office/drawing/2014/main" id="{DBCD3DD8-5A42-4065-8954-85905B380262}"/>
+              </a:ext>
+            </a:extLst>
+          </p:cNvPr>
+          <p:cNvSpPr>
+            <a:spLocks xmlns:a="http://schemas.openxmlformats.org/drawingml/2006/main" noGrp="1"/>
+          </p:cNvSpPr>
+          <p:nvPr/>
+        </p:nvSpPr>
+        <p:spPr>
+          <a:xfrm xmlns:a="http://schemas.openxmlformats.org/drawingml/2006/main">
+            <a:off x="685800" y="1000125"/>
+            <a:ext cx="10820400" cy="38100"/>
+          </a:xfrm>
+          <a:prstGeom xmlns:a="http://schemas.openxmlformats.org/drawingml/2006/main" prst="rect">
+            <a:avLst/>
+          </a:prstGeom>
+          <a:solidFill xmlns:a="http://schemas.openxmlformats.org/drawingml/2006/main">
+            <a:srgbClr val="73CBE8"/>
+          </a:solidFill>
+          <a:ln xmlns:a="http://schemas.openxmlformats.org/drawingml/2006/main" w="0">
+            <a:solidFill>
+              <a:srgbClr val="73CBE8"/>
+            </a:solidFill>
+            <a:prstDash val="solid"/>
+          </a:ln>
+        </p:spPr>
+      </p:sp>
+    </p:spTree>
+    <p:extLst>
+      <p:ext uri="{BB962C8B-B14F-4D97-AF65-F5344CB8AC3E}">
+        <p14:creationId xmlns:p14="http://schemas.microsoft.com/office/powerpoint/2010/main" val="641295815"/>
+      </p:ext>
+    </p:extLst>
+  </p:cSld>
+</p:sld>
+</file>
+
+<file path=ppt/slides/slide12.xml><?xml version="1.0" encoding="utf-8"?>
+<p:sld xmlns:p="http://schemas.openxmlformats.org/presentationml/2006/main">
+  <p:cSld>
+    <p:bg>
+      <p:bgPr>
+        <a:solidFill xmlns:a="http://schemas.openxmlformats.org/drawingml/2006/main">
+          <a:srgbClr val="FFFFFF"/>
+        </a:solidFill>
+      </p:bgPr>
+    </p:bg>
+    <p:spTree>
+      <p:nvGrpSpPr>
+        <p:cNvPr id="1" name=""/>
+        <p:cNvGrpSpPr/>
+        <p:nvPr/>
+      </p:nvGrpSpPr>
+      <p:grpSpPr>
+        <a:xfrm xmlns:a="http://schemas.openxmlformats.org/drawingml/2006/main"/>
+      </p:grpSpPr>
+      <p:sp>
+        <p:nvSpPr>
+          <p:cNvPr id="1" name="slide-title">
+            <a:extLst xmlns:a="http://schemas.openxmlformats.org/drawingml/2006/main">
+              <a:ext uri="{FF2B5EF4-FFF2-40B4-BE49-F238E27FC236}">
+                <a16:creationId xmlns:a16="http://schemas.microsoft.com/office/drawing/2014/main" id="{4ECE2A21-4400-41C9-93B6-B254057071F5}"/>
+              </a:ext>
+            </a:extLst>
+          </p:cNvPr>
+          <p:cNvSpPr>
+            <a:spLocks xmlns:a="http://schemas.openxmlformats.org/drawingml/2006/main" noGrp="1"/>
+          </p:cNvSpPr>
+          <p:nvPr/>
+        </p:nvSpPr>
+        <p:spPr>
+          <a:xfrm xmlns:a="http://schemas.openxmlformats.org/drawingml/2006/main">
+            <a:off x="685800" y="323850"/>
+            <a:ext cx="10820400" cy="514350"/>
+          </a:xfrm>
+          <a:prstGeom xmlns:a="http://schemas.openxmlformats.org/drawingml/2006/main" prst="rect">
+            <a:avLst/>
+          </a:prstGeom>
+          <a:noFill xmlns:a="http://schemas.openxmlformats.org/drawingml/2006/main"/>
+          <a:ln xmlns:a="http://schemas.openxmlformats.org/drawingml/2006/main" w="0">
+            <a:noFill/>
+            <a:prstDash val="solid"/>
+          </a:ln>
+        </p:spPr>
+        <p:txBody>
+          <a:bodyPr xmlns:a="http://schemas.openxmlformats.org/drawingml/2006/main"/>
+          <a:lstStyle xmlns:a="http://schemas.openxmlformats.org/drawingml/2006/main"/>
+          <a:p xmlns:a="http://schemas.openxmlformats.org/drawingml/2006/main">
+            <a:pPr>
+              <a:buNone/>
+              <a:defRPr sz="2700" b="1">
+                <a:solidFill>
+                  <a:srgbClr val="1F2937"/>
+                </a:solidFill>
+              </a:defRPr>
+            </a:pPr>
+            <a:r>
+              <a:rPr sz="2700" b="1">
+                <a:solidFill>
+                  <a:srgbClr val="1F2937"/>
+                </a:solidFill>
+              </a:rPr>
+              <a:t>Future Story 2</a:t>
+            </a:r>
+          </a:p>
+        </p:txBody>
+      </p:sp>
+      <p:sp>
+        <p:nvSpPr>
+          <p:cNvPr id="2" name="header-rule">
+            <a:extLst xmlns:a="http://schemas.openxmlformats.org/drawingml/2006/main">
+              <a:ext uri="{FF2B5EF4-FFF2-40B4-BE49-F238E27FC236}">
+                <a16:creationId xmlns:a16="http://schemas.microsoft.com/office/drawing/2014/main" id="{DBCD3DD8-5A42-4065-8954-85905B380262}"/>
+              </a:ext>
+            </a:extLst>
+          </p:cNvPr>
+          <p:cNvSpPr>
+            <a:spLocks xmlns:a="http://schemas.openxmlformats.org/drawingml/2006/main" noGrp="1"/>
+          </p:cNvSpPr>
+          <p:nvPr/>
+        </p:nvSpPr>
+        <p:spPr>
+          <a:xfrm xmlns:a="http://schemas.openxmlformats.org/drawingml/2006/main">
+            <a:off x="685800" y="1000125"/>
+            <a:ext cx="10820400" cy="38100"/>
+          </a:xfrm>
+          <a:prstGeom xmlns:a="http://schemas.openxmlformats.org/drawingml/2006/main" prst="rect">
+            <a:avLst/>
+          </a:prstGeom>
+          <a:solidFill xmlns:a="http://schemas.openxmlformats.org/drawingml/2006/main">
+            <a:srgbClr val="73CBE8"/>
+          </a:solidFill>
+          <a:ln xmlns:a="http://schemas.openxmlformats.org/drawingml/2006/main" w="0">
+            <a:solidFill>
+              <a:srgbClr val="73CBE8"/>
+            </a:solidFill>
+            <a:prstDash val="solid"/>
+          </a:ln>
+        </p:spPr>
+      </p:sp>
+    </p:spTree>
+    <p:extLst>
+      <p:ext uri="{BB962C8B-B14F-4D97-AF65-F5344CB8AC3E}">
+        <p14:creationId xmlns:p14="http://schemas.microsoft.com/office/powerpoint/2010/main" val="641295815"/>
+      </p:ext>
+    </p:extLst>
+  </p:cSld>
+</p:sld>
+</file>
+
+<file path=ppt/slides/slide13.xml><?xml version="1.0" encoding="utf-8"?>
+<p:sld xmlns:p="http://schemas.openxmlformats.org/presentationml/2006/main">
+  <p:cSld>
+    <p:bg>
+      <p:bgPr>
+        <a:solidFill xmlns:a="http://schemas.openxmlformats.org/drawingml/2006/main">
+          <a:srgbClr val="FFFFFF"/>
+        </a:solidFill>
+      </p:bgPr>
+    </p:bg>
+    <p:spTree>
+      <p:nvGrpSpPr>
+        <p:cNvPr id="1" name=""/>
+        <p:cNvGrpSpPr/>
+        <p:nvPr/>
+      </p:nvGrpSpPr>
+      <p:grpSpPr>
+        <a:xfrm xmlns:a="http://schemas.openxmlformats.org/drawingml/2006/main"/>
+      </p:grpSpPr>
+      <p:sp>
+        <p:nvSpPr>
+          <p:cNvPr id="1" name="slide-title">
+            <a:extLst xmlns:a="http://schemas.openxmlformats.org/drawingml/2006/main">
+              <a:ext uri="{FF2B5EF4-FFF2-40B4-BE49-F238E27FC236}">
+                <a16:creationId xmlns:a16="http://schemas.microsoft.com/office/drawing/2014/main" id="{4ECE2A21-4400-41C9-93B6-B254057071F5}"/>
+              </a:ext>
+            </a:extLst>
+          </p:cNvPr>
+          <p:cNvSpPr>
+            <a:spLocks xmlns:a="http://schemas.openxmlformats.org/drawingml/2006/main" noGrp="1"/>
+          </p:cNvSpPr>
+          <p:nvPr/>
+        </p:nvSpPr>
+        <p:spPr>
+          <a:xfrm xmlns:a="http://schemas.openxmlformats.org/drawingml/2006/main">
+            <a:off x="685800" y="323850"/>
+            <a:ext cx="10820400" cy="514350"/>
+          </a:xfrm>
+          <a:prstGeom xmlns:a="http://schemas.openxmlformats.org/drawingml/2006/main" prst="rect">
+            <a:avLst/>
+          </a:prstGeom>
+          <a:noFill xmlns:a="http://schemas.openxmlformats.org/drawingml/2006/main"/>
+          <a:ln xmlns:a="http://schemas.openxmlformats.org/drawingml/2006/main" w="0">
+            <a:noFill/>
+            <a:prstDash val="solid"/>
+          </a:ln>
+        </p:spPr>
+        <p:txBody>
+          <a:bodyPr xmlns:a="http://schemas.openxmlformats.org/drawingml/2006/main"/>
+          <a:lstStyle xmlns:a="http://schemas.openxmlformats.org/drawingml/2006/main"/>
+          <a:p xmlns:a="http://schemas.openxmlformats.org/drawingml/2006/main">
+            <a:pPr>
+              <a:buNone/>
+              <a:defRPr sz="2700" b="1">
+                <a:solidFill>
+                  <a:srgbClr val="1F2937"/>
+                </a:solidFill>
+              </a:defRPr>
+            </a:pPr>
+            <a:r>
+              <a:rPr sz="2700" b="1">
+                <a:solidFill>
+                  <a:srgbClr val="1F2937"/>
+                </a:solidFill>
+              </a:rPr>
+              <a:t>Three Questions for Individual Exploration</a:t>
+            </a:r>
+          </a:p>
+        </p:txBody>
+      </p:sp>
+      <p:sp>
+        <p:nvSpPr>
+          <p:cNvPr id="2" name="header-rule">
+            <a:extLst xmlns:a="http://schemas.openxmlformats.org/drawingml/2006/main">
+              <a:ext uri="{FF2B5EF4-FFF2-40B4-BE49-F238E27FC236}">
+                <a16:creationId xmlns:a16="http://schemas.microsoft.com/office/drawing/2014/main" id="{DBCD3DD8-5A42-4065-8954-85905B380262}"/>
+              </a:ext>
+            </a:extLst>
+          </p:cNvPr>
+          <p:cNvSpPr>
+            <a:spLocks xmlns:a="http://schemas.openxmlformats.org/drawingml/2006/main" noGrp="1"/>
+          </p:cNvSpPr>
+          <p:nvPr/>
+        </p:nvSpPr>
+        <p:spPr>
+          <a:xfrm xmlns:a="http://schemas.openxmlformats.org/drawingml/2006/main">
+            <a:off x="685800" y="1000125"/>
+            <a:ext cx="10820400" cy="38100"/>
+          </a:xfrm>
+          <a:prstGeom xmlns:a="http://schemas.openxmlformats.org/drawingml/2006/main" prst="rect">
+            <a:avLst/>
+          </a:prstGeom>
+          <a:solidFill xmlns:a="http://schemas.openxmlformats.org/drawingml/2006/main">
+            <a:srgbClr val="73CBE8"/>
+          </a:solidFill>
+          <a:ln xmlns:a="http://schemas.openxmlformats.org/drawingml/2006/main" w="0">
+            <a:solidFill>
+              <a:srgbClr val="73CBE8"/>
+            </a:solidFill>
+            <a:prstDash val="solid"/>
+          </a:ln>
+        </p:spPr>
+      </p:sp>
+    </p:spTree>
+    <p:extLst>
+      <p:ext uri="{BB962C8B-B14F-4D97-AF65-F5344CB8AC3E}">
+        <p14:creationId xmlns:p14="http://schemas.microsoft.com/office/powerpoint/2010/main" val="641295815"/>
+      </p:ext>
+    </p:extLst>
+  </p:cSld>
+</p:sld>
+</file>
+
+<file path=ppt/slides/slide14.xml><?xml version="1.0" encoding="utf-8"?>
+<p:sld xmlns:p="http://schemas.openxmlformats.org/presentationml/2006/main">
+  <p:cSld>
+    <p:bg>
+      <p:bgPr>
+        <a:solidFill xmlns:a="http://schemas.openxmlformats.org/drawingml/2006/main">
+          <a:srgbClr val="FFFFFF"/>
+        </a:solidFill>
+      </p:bgPr>
+    </p:bg>
+    <p:spTree>
+      <p:nvGrpSpPr>
+        <p:cNvPr id="1" name=""/>
+        <p:cNvGrpSpPr/>
+        <p:nvPr/>
+      </p:nvGrpSpPr>
+      <p:grpSpPr>
+        <a:xfrm xmlns:a="http://schemas.openxmlformats.org/drawingml/2006/main"/>
+      </p:grpSpPr>
+      <p:sp>
+        <p:nvSpPr>
+          <p:cNvPr id="1" name="slide-title">
+            <a:extLst xmlns:a="http://schemas.openxmlformats.org/drawingml/2006/main">
+              <a:ext uri="{FF2B5EF4-FFF2-40B4-BE49-F238E27FC236}">
+                <a16:creationId xmlns:a16="http://schemas.microsoft.com/office/drawing/2014/main" id="{4ECE2A21-4400-41C9-93B6-B254057071F5}"/>
+              </a:ext>
+            </a:extLst>
+          </p:cNvPr>
+          <p:cNvSpPr>
+            <a:spLocks xmlns:a="http://schemas.openxmlformats.org/drawingml/2006/main" noGrp="1"/>
+          </p:cNvSpPr>
+          <p:nvPr/>
+        </p:nvSpPr>
+        <p:spPr>
+          <a:xfrm xmlns:a="http://schemas.openxmlformats.org/drawingml/2006/main">
+            <a:off x="685800" y="323850"/>
+            <a:ext cx="10820400" cy="514350"/>
+          </a:xfrm>
+          <a:prstGeom xmlns:a="http://schemas.openxmlformats.org/drawingml/2006/main" prst="rect">
+            <a:avLst/>
+          </a:prstGeom>
+          <a:noFill xmlns:a="http://schemas.openxmlformats.org/drawingml/2006/main"/>
+          <a:ln xmlns:a="http://schemas.openxmlformats.org/drawingml/2006/main" w="0">
+            <a:noFill/>
+            <a:prstDash val="solid"/>
+          </a:ln>
+        </p:spPr>
+        <p:txBody>
+          <a:bodyPr xmlns:a="http://schemas.openxmlformats.org/drawingml/2006/main"/>
+          <a:lstStyle xmlns:a="http://schemas.openxmlformats.org/drawingml/2006/main"/>
+          <a:p xmlns:a="http://schemas.openxmlformats.org/drawingml/2006/main">
+            <a:pPr>
+              <a:buNone/>
+              <a:defRPr sz="2700" b="1">
+                <a:solidFill>
+                  <a:srgbClr val="1F2937"/>
+                </a:solidFill>
+              </a:defRPr>
+            </a:pPr>
+            <a:r>
+              <a:rPr sz="2700" b="1">
+                <a:solidFill>
+                  <a:srgbClr val="1F2937"/>
+                </a:solidFill>
+              </a:rPr>
+              <a:t>Individual Exploration</a:t>
+            </a:r>
+          </a:p>
+        </p:txBody>
+      </p:sp>
+      <p:sp>
+        <p:nvSpPr>
+          <p:cNvPr id="2" name="header-rule">
+            <a:extLst xmlns:a="http://schemas.openxmlformats.org/drawingml/2006/main">
+              <a:ext uri="{FF2B5EF4-FFF2-40B4-BE49-F238E27FC236}">
+                <a16:creationId xmlns:a16="http://schemas.microsoft.com/office/drawing/2014/main" id="{DBCD3DD8-5A42-4065-8954-85905B380262}"/>
+              </a:ext>
+            </a:extLst>
+          </p:cNvPr>
+          <p:cNvSpPr>
+            <a:spLocks xmlns:a="http://schemas.openxmlformats.org/drawingml/2006/main" noGrp="1"/>
+          </p:cNvSpPr>
+          <p:nvPr/>
+        </p:nvSpPr>
+        <p:spPr>
+          <a:xfrm xmlns:a="http://schemas.openxmlformats.org/drawingml/2006/main">
+            <a:off x="685800" y="1000125"/>
+            <a:ext cx="10820400" cy="38100"/>
+          </a:xfrm>
+          <a:prstGeom xmlns:a="http://schemas.openxmlformats.org/drawingml/2006/main" prst="rect">
+            <a:avLst/>
+          </a:prstGeom>
+          <a:solidFill xmlns:a="http://schemas.openxmlformats.org/drawingml/2006/main">
+            <a:srgbClr val="73CBE8"/>
+          </a:solidFill>
+          <a:ln xmlns:a="http://schemas.openxmlformats.org/drawingml/2006/main" w="0">
+            <a:solidFill>
+              <a:srgbClr val="73CBE8"/>
+            </a:solidFill>
+            <a:prstDash val="solid"/>
+          </a:ln>
+        </p:spPr>
+      </p:sp>
+    </p:spTree>
+    <p:extLst>
+      <p:ext uri="{BB962C8B-B14F-4D97-AF65-F5344CB8AC3E}">
+        <p14:creationId xmlns:p14="http://schemas.microsoft.com/office/powerpoint/2010/main" val="641295815"/>
+      </p:ext>
+    </p:extLst>
+  </p:cSld>
+</p:sld>
+</file>
+
+<file path=ppt/slides/slide15.xml><?xml version="1.0" encoding="utf-8"?>
+<p:sld xmlns:p="http://schemas.openxmlformats.org/presentationml/2006/main">
+  <p:cSld>
+    <p:bg>
+      <p:bgPr>
+        <a:solidFill xmlns:a="http://schemas.openxmlformats.org/drawingml/2006/main">
+          <a:srgbClr val="FFFFFF"/>
+        </a:solidFill>
+      </p:bgPr>
+    </p:bg>
+    <p:spTree>
+      <p:nvGrpSpPr>
+        <p:cNvPr id="1" name=""/>
+        <p:cNvGrpSpPr/>
+        <p:nvPr/>
+      </p:nvGrpSpPr>
+      <p:grpSpPr>
+        <a:xfrm xmlns:a="http://schemas.openxmlformats.org/drawingml/2006/main"/>
+      </p:grpSpPr>
+      <p:sp>
+        <p:nvSpPr>
+          <p:cNvPr id="1" name="slide-title">
+            <a:extLst xmlns:a="http://schemas.openxmlformats.org/drawingml/2006/main">
+              <a:ext uri="{FF2B5EF4-FFF2-40B4-BE49-F238E27FC236}">
+                <a16:creationId xmlns:a16="http://schemas.microsoft.com/office/drawing/2014/main" id="{4ECE2A21-4400-41C9-93B6-B254057071F5}"/>
+              </a:ext>
+            </a:extLst>
+          </p:cNvPr>
+          <p:cNvSpPr>
+            <a:spLocks xmlns:a="http://schemas.openxmlformats.org/drawingml/2006/main" noGrp="1"/>
+          </p:cNvSpPr>
+          <p:nvPr/>
+        </p:nvSpPr>
+        <p:spPr>
+          <a:xfrm xmlns:a="http://schemas.openxmlformats.org/drawingml/2006/main">
+            <a:off x="685800" y="323850"/>
+            <a:ext cx="10820400" cy="514350"/>
+          </a:xfrm>
+          <a:prstGeom xmlns:a="http://schemas.openxmlformats.org/drawingml/2006/main" prst="rect">
+            <a:avLst/>
+          </a:prstGeom>
+          <a:noFill xmlns:a="http://schemas.openxmlformats.org/drawingml/2006/main"/>
+          <a:ln xmlns:a="http://schemas.openxmlformats.org/drawingml/2006/main" w="0">
+            <a:noFill/>
+            <a:prstDash val="solid"/>
+          </a:ln>
+        </p:spPr>
+        <p:txBody>
+          <a:bodyPr xmlns:a="http://schemas.openxmlformats.org/drawingml/2006/main"/>
+          <a:lstStyle xmlns:a="http://schemas.openxmlformats.org/drawingml/2006/main"/>
+          <a:p xmlns:a="http://schemas.openxmlformats.org/drawingml/2006/main">
+            <a:pPr>
+              <a:buNone/>
+              <a:defRPr sz="2700" b="1">
+                <a:solidFill>
+                  <a:srgbClr val="1F2937"/>
+                </a:solidFill>
+              </a:defRPr>
+            </a:pPr>
+            <a:r>
+              <a:rPr sz="2700" b="1">
+                <a:solidFill>
+                  <a:srgbClr val="1F2937"/>
+                </a:solidFill>
+              </a:rPr>
+              <a:t>Form Groups of Two or Three</a:t>
+            </a:r>
+          </a:p>
+        </p:txBody>
+      </p:sp>
+      <p:sp>
+        <p:nvSpPr>
+          <p:cNvPr id="2" name="header-rule">
+            <a:extLst xmlns:a="http://schemas.openxmlformats.org/drawingml/2006/main">
+              <a:ext uri="{FF2B5EF4-FFF2-40B4-BE49-F238E27FC236}">
+                <a16:creationId xmlns:a16="http://schemas.microsoft.com/office/drawing/2014/main" id="{DBCD3DD8-5A42-4065-8954-85905B380262}"/>
+              </a:ext>
+            </a:extLst>
+          </p:cNvPr>
+          <p:cNvSpPr>
+            <a:spLocks xmlns:a="http://schemas.openxmlformats.org/drawingml/2006/main" noGrp="1"/>
+          </p:cNvSpPr>
+          <p:nvPr/>
+        </p:nvSpPr>
+        <p:spPr>
+          <a:xfrm xmlns:a="http://schemas.openxmlformats.org/drawingml/2006/main">
+            <a:off x="685800" y="1000125"/>
+            <a:ext cx="10820400" cy="38100"/>
+          </a:xfrm>
+          <a:prstGeom xmlns:a="http://schemas.openxmlformats.org/drawingml/2006/main" prst="rect">
+            <a:avLst/>
+          </a:prstGeom>
+          <a:solidFill xmlns:a="http://schemas.openxmlformats.org/drawingml/2006/main">
+            <a:srgbClr val="73CBE8"/>
+          </a:solidFill>
+          <a:ln xmlns:a="http://schemas.openxmlformats.org/drawingml/2006/main" w="0">
+            <a:solidFill>
+              <a:srgbClr val="73CBE8"/>
+            </a:solidFill>
+            <a:prstDash val="solid"/>
+          </a:ln>
+        </p:spPr>
+      </p:sp>
+    </p:spTree>
+    <p:extLst>
+      <p:ext uri="{BB962C8B-B14F-4D97-AF65-F5344CB8AC3E}">
+        <p14:creationId xmlns:p14="http://schemas.microsoft.com/office/powerpoint/2010/main" val="641295815"/>
+      </p:ext>
+    </p:extLst>
+  </p:cSld>
+</p:sld>
+</file>
+
+<file path=ppt/slides/slide16.xml><?xml version="1.0" encoding="utf-8"?>
+<p:sld xmlns:p="http://schemas.openxmlformats.org/presentationml/2006/main">
+  <p:cSld>
+    <p:bg>
+      <p:bgPr>
+        <a:solidFill xmlns:a="http://schemas.openxmlformats.org/drawingml/2006/main">
+          <a:srgbClr val="FFFFFF"/>
+        </a:solidFill>
+      </p:bgPr>
+    </p:bg>
+    <p:spTree>
+      <p:nvGrpSpPr>
+        <p:cNvPr id="1" name=""/>
+        <p:cNvGrpSpPr/>
+        <p:nvPr/>
+      </p:nvGrpSpPr>
+      <p:grpSpPr>
+        <a:xfrm xmlns:a="http://schemas.openxmlformats.org/drawingml/2006/main"/>
+      </p:grpSpPr>
+      <p:sp>
+        <p:nvSpPr>
+          <p:cNvPr id="1" name="slide-title">
+            <a:extLst xmlns:a="http://schemas.openxmlformats.org/drawingml/2006/main">
+              <a:ext uri="{FF2B5EF4-FFF2-40B4-BE49-F238E27FC236}">
+                <a16:creationId xmlns:a16="http://schemas.microsoft.com/office/drawing/2014/main" id="{4ECE2A21-4400-41C9-93B6-B254057071F5}"/>
+              </a:ext>
+            </a:extLst>
+          </p:cNvPr>
+          <p:cNvSpPr>
+            <a:spLocks xmlns:a="http://schemas.openxmlformats.org/drawingml/2006/main" noGrp="1"/>
+          </p:cNvSpPr>
+          <p:nvPr/>
+        </p:nvSpPr>
+        <p:spPr>
+          <a:xfrm xmlns:a="http://schemas.openxmlformats.org/drawingml/2006/main">
+            <a:off x="685800" y="323850"/>
+            <a:ext cx="10820400" cy="514350"/>
+          </a:xfrm>
+          <a:prstGeom xmlns:a="http://schemas.openxmlformats.org/drawingml/2006/main" prst="rect">
+            <a:avLst/>
+          </a:prstGeom>
+          <a:noFill xmlns:a="http://schemas.openxmlformats.org/drawingml/2006/main"/>
+          <a:ln xmlns:a="http://schemas.openxmlformats.org/drawingml/2006/main" w="0">
+            <a:noFill/>
+            <a:prstDash val="solid"/>
+          </a:ln>
+        </p:spPr>
+        <p:txBody>
+          <a:bodyPr xmlns:a="http://schemas.openxmlformats.org/drawingml/2006/main"/>
+          <a:lstStyle xmlns:a="http://schemas.openxmlformats.org/drawingml/2006/main"/>
+          <a:p xmlns:a="http://schemas.openxmlformats.org/drawingml/2006/main">
+            <a:pPr>
+              <a:buNone/>
+              <a:defRPr sz="2700" b="1">
+                <a:solidFill>
+                  <a:srgbClr val="1F2937"/>
+                </a:solidFill>
+              </a:defRPr>
+            </a:pPr>
+            <a:r>
+              <a:rPr sz="2700" b="1">
+                <a:solidFill>
+                  <a:srgbClr val="1F2937"/>
+                </a:solidFill>
+              </a:rPr>
+              <a:t>Share One Thing Each</a:t>
+            </a:r>
+          </a:p>
+        </p:txBody>
+      </p:sp>
+      <p:sp>
+        <p:nvSpPr>
+          <p:cNvPr id="2" name="header-rule">
+            <a:extLst xmlns:a="http://schemas.openxmlformats.org/drawingml/2006/main">
+              <a:ext uri="{FF2B5EF4-FFF2-40B4-BE49-F238E27FC236}">
+                <a16:creationId xmlns:a16="http://schemas.microsoft.com/office/drawing/2014/main" id="{DBCD3DD8-5A42-4065-8954-85905B380262}"/>
+              </a:ext>
+            </a:extLst>
+          </p:cNvPr>
+          <p:cNvSpPr>
+            <a:spLocks xmlns:a="http://schemas.openxmlformats.org/drawingml/2006/main" noGrp="1"/>
+          </p:cNvSpPr>
+          <p:nvPr/>
+        </p:nvSpPr>
+        <p:spPr>
+          <a:xfrm xmlns:a="http://schemas.openxmlformats.org/drawingml/2006/main">
+            <a:off x="685800" y="1000125"/>
+            <a:ext cx="10820400" cy="38100"/>
+          </a:xfrm>
+          <a:prstGeom xmlns:a="http://schemas.openxmlformats.org/drawingml/2006/main" prst="rect">
+            <a:avLst/>
+          </a:prstGeom>
+          <a:solidFill xmlns:a="http://schemas.openxmlformats.org/drawingml/2006/main">
+            <a:srgbClr val="73CBE8"/>
+          </a:solidFill>
+          <a:ln xmlns:a="http://schemas.openxmlformats.org/drawingml/2006/main" w="0">
+            <a:solidFill>
+              <a:srgbClr val="73CBE8"/>
+            </a:solidFill>
+            <a:prstDash val="solid"/>
+          </a:ln>
+        </p:spPr>
+      </p:sp>
+    </p:spTree>
+    <p:extLst>
+      <p:ext uri="{BB962C8B-B14F-4D97-AF65-F5344CB8AC3E}">
+        <p14:creationId xmlns:p14="http://schemas.microsoft.com/office/powerpoint/2010/main" val="641295815"/>
+      </p:ext>
+    </p:extLst>
+  </p:cSld>
+</p:sld>
+</file>
+
+<file path=ppt/slides/slide17.xml><?xml version="1.0" encoding="utf-8"?>
+<p:sld xmlns:p="http://schemas.openxmlformats.org/presentationml/2006/main">
+  <p:cSld>
+    <p:bg>
+      <p:bgPr>
+        <a:solidFill xmlns:a="http://schemas.openxmlformats.org/drawingml/2006/main">
+          <a:srgbClr val="FFFFFF"/>
+        </a:solidFill>
+      </p:bgPr>
+    </p:bg>
+    <p:spTree>
+      <p:nvGrpSpPr>
+        <p:cNvPr id="1" name=""/>
+        <p:cNvGrpSpPr/>
+        <p:nvPr/>
+      </p:nvGrpSpPr>
+      <p:grpSpPr>
+        <a:xfrm xmlns:a="http://schemas.openxmlformats.org/drawingml/2006/main"/>
+      </p:grpSpPr>
+      <p:sp>
+        <p:nvSpPr>
+          <p:cNvPr id="1" name="slide-title">
+            <a:extLst xmlns:a="http://schemas.openxmlformats.org/drawingml/2006/main">
+              <a:ext uri="{FF2B5EF4-FFF2-40B4-BE49-F238E27FC236}">
+                <a16:creationId xmlns:a16="http://schemas.microsoft.com/office/drawing/2014/main" id="{4ECE2A21-4400-41C9-93B6-B254057071F5}"/>
+              </a:ext>
+            </a:extLst>
+          </p:cNvPr>
+          <p:cNvSpPr>
+            <a:spLocks xmlns:a="http://schemas.openxmlformats.org/drawingml/2006/main" noGrp="1"/>
+          </p:cNvSpPr>
+          <p:nvPr/>
+        </p:nvSpPr>
+        <p:spPr>
+          <a:xfrm xmlns:a="http://schemas.openxmlformats.org/drawingml/2006/main">
+            <a:off x="685800" y="323850"/>
+            <a:ext cx="10820400" cy="514350"/>
+          </a:xfrm>
+          <a:prstGeom xmlns:a="http://schemas.openxmlformats.org/drawingml/2006/main" prst="rect">
+            <a:avLst/>
+          </a:prstGeom>
+          <a:noFill xmlns:a="http://schemas.openxmlformats.org/drawingml/2006/main"/>
+          <a:ln xmlns:a="http://schemas.openxmlformats.org/drawingml/2006/main" w="0">
+            <a:noFill/>
+            <a:prstDash val="solid"/>
+          </a:ln>
+        </p:spPr>
+        <p:txBody>
+          <a:bodyPr xmlns:a="http://schemas.openxmlformats.org/drawingml/2006/main"/>
+          <a:lstStyle xmlns:a="http://schemas.openxmlformats.org/drawingml/2006/main"/>
+          <a:p xmlns:a="http://schemas.openxmlformats.org/drawingml/2006/main">
+            <a:pPr>
+              <a:buNone/>
+              <a:defRPr sz="2700" b="1">
+                <a:solidFill>
+                  <a:srgbClr val="1F2937"/>
+                </a:solidFill>
+              </a:defRPr>
+            </a:pPr>
+            <a:r>
+              <a:rPr sz="2700" b="1">
+                <a:solidFill>
+                  <a:srgbClr val="1F2937"/>
+                </a:solidFill>
+              </a:rPr>
+              <a:t>Three Topics for Group Discussion</a:t>
+            </a:r>
+          </a:p>
+        </p:txBody>
+      </p:sp>
+      <p:sp>
+        <p:nvSpPr>
+          <p:cNvPr id="2" name="header-rule">
+            <a:extLst xmlns:a="http://schemas.openxmlformats.org/drawingml/2006/main">
+              <a:ext uri="{FF2B5EF4-FFF2-40B4-BE49-F238E27FC236}">
+                <a16:creationId xmlns:a16="http://schemas.microsoft.com/office/drawing/2014/main" id="{DBCD3DD8-5A42-4065-8954-85905B380262}"/>
+              </a:ext>
+            </a:extLst>
+          </p:cNvPr>
+          <p:cNvSpPr>
+            <a:spLocks xmlns:a="http://schemas.openxmlformats.org/drawingml/2006/main" noGrp="1"/>
+          </p:cNvSpPr>
+          <p:nvPr/>
+        </p:nvSpPr>
+        <p:spPr>
+          <a:xfrm xmlns:a="http://schemas.openxmlformats.org/drawingml/2006/main">
+            <a:off x="685800" y="1000125"/>
+            <a:ext cx="10820400" cy="38100"/>
+          </a:xfrm>
+          <a:prstGeom xmlns:a="http://schemas.openxmlformats.org/drawingml/2006/main" prst="rect">
+            <a:avLst/>
+          </a:prstGeom>
+          <a:solidFill xmlns:a="http://schemas.openxmlformats.org/drawingml/2006/main">
+            <a:srgbClr val="73CBE8"/>
+          </a:solidFill>
+          <a:ln xmlns:a="http://schemas.openxmlformats.org/drawingml/2006/main" w="0">
+            <a:solidFill>
+              <a:srgbClr val="73CBE8"/>
+            </a:solidFill>
+            <a:prstDash val="solid"/>
+          </a:ln>
+        </p:spPr>
+      </p:sp>
+    </p:spTree>
+    <p:extLst>
+      <p:ext uri="{BB962C8B-B14F-4D97-AF65-F5344CB8AC3E}">
+        <p14:creationId xmlns:p14="http://schemas.microsoft.com/office/powerpoint/2010/main" val="641295815"/>
+      </p:ext>
+    </p:extLst>
+  </p:cSld>
+</p:sld>
+</file>
+
+<file path=ppt/slides/slide18.xml><?xml version="1.0" encoding="utf-8"?>
+<p:sld xmlns:p="http://schemas.openxmlformats.org/presentationml/2006/main">
+  <p:cSld>
+    <p:bg>
+      <p:bgPr>
+        <a:solidFill xmlns:a="http://schemas.openxmlformats.org/drawingml/2006/main">
+          <a:srgbClr val="FFFFFF"/>
+        </a:solidFill>
+      </p:bgPr>
+    </p:bg>
+    <p:spTree>
+      <p:nvGrpSpPr>
+        <p:cNvPr id="1" name=""/>
+        <p:cNvGrpSpPr/>
+        <p:nvPr/>
+      </p:nvGrpSpPr>
+      <p:grpSpPr>
+        <a:xfrm xmlns:a="http://schemas.openxmlformats.org/drawingml/2006/main"/>
+      </p:grpSpPr>
+      <p:sp>
+        <p:nvSpPr>
+          <p:cNvPr id="1" name="slide-title">
+            <a:extLst xmlns:a="http://schemas.openxmlformats.org/drawingml/2006/main">
+              <a:ext uri="{FF2B5EF4-FFF2-40B4-BE49-F238E27FC236}">
+                <a16:creationId xmlns:a16="http://schemas.microsoft.com/office/drawing/2014/main" id="{4ECE2A21-4400-41C9-93B6-B254057071F5}"/>
+              </a:ext>
+            </a:extLst>
+          </p:cNvPr>
+          <p:cNvSpPr>
+            <a:spLocks xmlns:a="http://schemas.openxmlformats.org/drawingml/2006/main" noGrp="1"/>
+          </p:cNvSpPr>
+          <p:nvPr/>
+        </p:nvSpPr>
+        <p:spPr>
+          <a:xfrm xmlns:a="http://schemas.openxmlformats.org/drawingml/2006/main">
+            <a:off x="685800" y="323850"/>
+            <a:ext cx="10820400" cy="514350"/>
+          </a:xfrm>
+          <a:prstGeom xmlns:a="http://schemas.openxmlformats.org/drawingml/2006/main" prst="rect">
+            <a:avLst/>
+          </a:prstGeom>
+          <a:noFill xmlns:a="http://schemas.openxmlformats.org/drawingml/2006/main"/>
+          <a:ln xmlns:a="http://schemas.openxmlformats.org/drawingml/2006/main" w="0">
+            <a:noFill/>
+            <a:prstDash val="solid"/>
+          </a:ln>
+        </p:spPr>
+        <p:txBody>
+          <a:bodyPr xmlns:a="http://schemas.openxmlformats.org/drawingml/2006/main"/>
+          <a:lstStyle xmlns:a="http://schemas.openxmlformats.org/drawingml/2006/main"/>
+          <a:p xmlns:a="http://schemas.openxmlformats.org/drawingml/2006/main">
+            <a:pPr>
+              <a:buNone/>
+              <a:defRPr sz="2700" b="1">
+                <a:solidFill>
+                  <a:srgbClr val="1F2937"/>
+                </a:solidFill>
+              </a:defRPr>
+            </a:pPr>
+            <a:r>
+              <a:rPr sz="2700" b="1">
+                <a:solidFill>
+                  <a:srgbClr val="1F2937"/>
+                </a:solidFill>
+              </a:rPr>
+              <a:t>What to Bring to the Plenary</a:t>
+            </a:r>
+          </a:p>
+        </p:txBody>
+      </p:sp>
+      <p:sp>
+        <p:nvSpPr>
+          <p:cNvPr id="2" name="header-rule">
+            <a:extLst xmlns:a="http://schemas.openxmlformats.org/drawingml/2006/main">
+              <a:ext uri="{FF2B5EF4-FFF2-40B4-BE49-F238E27FC236}">
+                <a16:creationId xmlns:a16="http://schemas.microsoft.com/office/drawing/2014/main" id="{DBCD3DD8-5A42-4065-8954-85905B380262}"/>
+              </a:ext>
+            </a:extLst>
+          </p:cNvPr>
+          <p:cNvSpPr>
+            <a:spLocks xmlns:a="http://schemas.openxmlformats.org/drawingml/2006/main" noGrp="1"/>
+          </p:cNvSpPr>
+          <p:nvPr/>
+        </p:nvSpPr>
+        <p:spPr>
+          <a:xfrm xmlns:a="http://schemas.openxmlformats.org/drawingml/2006/main">
+            <a:off x="685800" y="1000125"/>
+            <a:ext cx="10820400" cy="38100"/>
+          </a:xfrm>
+          <a:prstGeom xmlns:a="http://schemas.openxmlformats.org/drawingml/2006/main" prst="rect">
+            <a:avLst/>
+          </a:prstGeom>
+          <a:solidFill xmlns:a="http://schemas.openxmlformats.org/drawingml/2006/main">
+            <a:srgbClr val="73CBE8"/>
+          </a:solidFill>
+          <a:ln xmlns:a="http://schemas.openxmlformats.org/drawingml/2006/main" w="0">
+            <a:solidFill>
+              <a:srgbClr val="73CBE8"/>
+            </a:solidFill>
+            <a:prstDash val="solid"/>
+          </a:ln>
+        </p:spPr>
+      </p:sp>
+    </p:spTree>
+    <p:extLst>
+      <p:ext uri="{BB962C8B-B14F-4D97-AF65-F5344CB8AC3E}">
+        <p14:creationId xmlns:p14="http://schemas.microsoft.com/office/powerpoint/2010/main" val="641295815"/>
+      </p:ext>
+    </p:extLst>
+  </p:cSld>
+</p:sld>
+</file>
+
+<file path=ppt/slides/slide19.xml><?xml version="1.0" encoding="utf-8"?>
+<p:sld xmlns:p="http://schemas.openxmlformats.org/presentationml/2006/main">
+  <p:cSld>
+    <p:bg>
+      <p:bgPr>
+        <a:solidFill xmlns:a="http://schemas.openxmlformats.org/drawingml/2006/main">
+          <a:srgbClr val="FFFFFF"/>
+        </a:solidFill>
+      </p:bgPr>
+    </p:bg>
+    <p:spTree>
+      <p:nvGrpSpPr>
+        <p:cNvPr id="1" name=""/>
+        <p:cNvGrpSpPr/>
+        <p:nvPr/>
+      </p:nvGrpSpPr>
+      <p:grpSpPr>
+        <a:xfrm xmlns:a="http://schemas.openxmlformats.org/drawingml/2006/main"/>
+      </p:grpSpPr>
+      <p:sp>
+        <p:nvSpPr>
+          <p:cNvPr id="1" name="slide-title">
+            <a:extLst xmlns:a="http://schemas.openxmlformats.org/drawingml/2006/main">
+              <a:ext uri="{FF2B5EF4-FFF2-40B4-BE49-F238E27FC236}">
+                <a16:creationId xmlns:a16="http://schemas.microsoft.com/office/drawing/2014/main" id="{4ECE2A21-4400-41C9-93B6-B254057071F5}"/>
+              </a:ext>
+            </a:extLst>
+          </p:cNvPr>
+          <p:cNvSpPr>
+            <a:spLocks xmlns:a="http://schemas.openxmlformats.org/drawingml/2006/main" noGrp="1"/>
+          </p:cNvSpPr>
+          <p:nvPr/>
+        </p:nvSpPr>
+        <p:spPr>
+          <a:xfrm xmlns:a="http://schemas.openxmlformats.org/drawingml/2006/main">
+            <a:off x="685800" y="323850"/>
+            <a:ext cx="10820400" cy="514350"/>
+          </a:xfrm>
+          <a:prstGeom xmlns:a="http://schemas.openxmlformats.org/drawingml/2006/main" prst="rect">
+            <a:avLst/>
+          </a:prstGeom>
+          <a:noFill xmlns:a="http://schemas.openxmlformats.org/drawingml/2006/main"/>
+          <a:ln xmlns:a="http://schemas.openxmlformats.org/drawingml/2006/main" w="0">
+            <a:noFill/>
+            <a:prstDash val="solid"/>
+          </a:ln>
+        </p:spPr>
+        <p:txBody>
+          <a:bodyPr xmlns:a="http://schemas.openxmlformats.org/drawingml/2006/main"/>
+          <a:lstStyle xmlns:a="http://schemas.openxmlformats.org/drawingml/2006/main"/>
+          <a:p xmlns:a="http://schemas.openxmlformats.org/drawingml/2006/main">
+            <a:pPr>
+              <a:buNone/>
+              <a:defRPr sz="2700" b="1">
+                <a:solidFill>
+                  <a:srgbClr val="1F2937"/>
+                </a:solidFill>
+              </a:defRPr>
+            </a:pPr>
+            <a:r>
+              <a:rPr sz="2700" b="1">
+                <a:solidFill>
+                  <a:srgbClr val="1F2937"/>
+                </a:solidFill>
+              </a:rPr>
+              <a:t>Small-Group Discussion</a:t>
+            </a:r>
+          </a:p>
+        </p:txBody>
+      </p:sp>
+      <p:sp>
+        <p:nvSpPr>
+          <p:cNvPr id="2" name="header-rule">
+            <a:extLst xmlns:a="http://schemas.openxmlformats.org/drawingml/2006/main">
+              <a:ext uri="{FF2B5EF4-FFF2-40B4-BE49-F238E27FC236}">
+                <a16:creationId xmlns:a16="http://schemas.microsoft.com/office/drawing/2014/main" id="{DBCD3DD8-5A42-4065-8954-85905B380262}"/>
+              </a:ext>
+            </a:extLst>
+          </p:cNvPr>
+          <p:cNvSpPr>
+            <a:spLocks xmlns:a="http://schemas.openxmlformats.org/drawingml/2006/main" noGrp="1"/>
+          </p:cNvSpPr>
+          <p:nvPr/>
+        </p:nvSpPr>
+        <p:spPr>
+          <a:xfrm xmlns:a="http://schemas.openxmlformats.org/drawingml/2006/main">
+            <a:off x="685800" y="1000125"/>
+            <a:ext cx="10820400" cy="38100"/>
+          </a:xfrm>
+          <a:prstGeom xmlns:a="http://schemas.openxmlformats.org/drawingml/2006/main" prst="rect">
+            <a:avLst/>
+          </a:prstGeom>
+          <a:solidFill xmlns:a="http://schemas.openxmlformats.org/drawingml/2006/main">
+            <a:srgbClr val="73CBE8"/>
+          </a:solidFill>
+          <a:ln xmlns:a="http://schemas.openxmlformats.org/drawingml/2006/main" w="0">
+            <a:solidFill>
+              <a:srgbClr val="73CBE8"/>
+            </a:solidFill>
+            <a:prstDash val="solid"/>
+          </a:ln>
+        </p:spPr>
+      </p:sp>
+    </p:spTree>
+    <p:extLst>
+      <p:ext uri="{BB962C8B-B14F-4D97-AF65-F5344CB8AC3E}">
+        <p14:creationId xmlns:p14="http://schemas.microsoft.com/office/powerpoint/2010/main" val="641295815"/>
+      </p:ext>
+    </p:extLst>
+  </p:cSld>
+</p:sld>
+</file>
+
+<file path=ppt/slides/slide2.xml><?xml version="1.0" encoding="utf-8"?>
+<p:sld xmlns:p="http://schemas.openxmlformats.org/presentationml/2006/main">
+  <p:cSld>
+    <p:bg>
+      <p:bgPr>
+        <a:solidFill xmlns:a="http://schemas.openxmlformats.org/drawingml/2006/main">
+          <a:srgbClr val="FFFFFF"/>
+        </a:solidFill>
+      </p:bgPr>
+    </p:bg>
+    <p:spTree>
+      <p:nvGrpSpPr>
+        <p:cNvPr id="1" name=""/>
+        <p:cNvGrpSpPr/>
+        <p:nvPr/>
+      </p:nvGrpSpPr>
+      <p:grpSpPr>
+        <a:xfrm xmlns:a="http://schemas.openxmlformats.org/drawingml/2006/main"/>
+      </p:grpSpPr>
+      <p:sp>
+        <p:nvSpPr>
+          <p:cNvPr id="1" name="slide-title">
+            <a:extLst xmlns:a="http://schemas.openxmlformats.org/drawingml/2006/main">
+              <a:ext uri="{FF2B5EF4-FFF2-40B4-BE49-F238E27FC236}">
+                <a16:creationId xmlns:a16="http://schemas.microsoft.com/office/drawing/2014/main" id="{4ECE2A21-4400-41C9-93B6-B254057071F5}"/>
+              </a:ext>
+            </a:extLst>
+          </p:cNvPr>
+          <p:cNvSpPr>
+            <a:spLocks xmlns:a="http://schemas.openxmlformats.org/drawingml/2006/main" noGrp="1"/>
+          </p:cNvSpPr>
+          <p:nvPr/>
+        </p:nvSpPr>
+        <p:spPr>
+          <a:xfrm xmlns:a="http://schemas.openxmlformats.org/drawingml/2006/main">
+            <a:off x="685800" y="323850"/>
+            <a:ext cx="10820400" cy="514350"/>
+          </a:xfrm>
+          <a:prstGeom xmlns:a="http://schemas.openxmlformats.org/drawingml/2006/main" prst="rect">
+            <a:avLst/>
+          </a:prstGeom>
+          <a:noFill xmlns:a="http://schemas.openxmlformats.org/drawingml/2006/main"/>
+          <a:ln xmlns:a="http://schemas.openxmlformats.org/drawingml/2006/main" w="0">
+            <a:noFill/>
+            <a:prstDash val="solid"/>
+          </a:ln>
+        </p:spPr>
+        <p:txBody>
+          <a:bodyPr xmlns:a="http://schemas.openxmlformats.org/drawingml/2006/main"/>
+          <a:lstStyle xmlns:a="http://schemas.openxmlformats.org/drawingml/2006/main"/>
+          <a:p xmlns:a="http://schemas.openxmlformats.org/drawingml/2006/main">
+            <a:pPr>
+              <a:buNone/>
+              <a:defRPr sz="2700" b="1">
+                <a:solidFill>
+                  <a:srgbClr val="1F2937"/>
+                </a:solidFill>
+              </a:defRPr>
+            </a:pPr>
+            <a:r>
+              <a:rPr sz="2700" b="1">
+                <a:solidFill>
+                  <a:srgbClr val="1F2937"/>
+                </a:solidFill>
+              </a:rPr>
+              <a:t>What We Will Do Together</a:t>
+            </a:r>
+          </a:p>
+        </p:txBody>
+      </p:sp>
+      <p:sp>
+        <p:nvSpPr>
+          <p:cNvPr id="2" name="header-rule">
+            <a:extLst xmlns:a="http://schemas.openxmlformats.org/drawingml/2006/main">
+              <a:ext uri="{FF2B5EF4-FFF2-40B4-BE49-F238E27FC236}">
+                <a16:creationId xmlns:a16="http://schemas.microsoft.com/office/drawing/2014/main" id="{DBCD3DD8-5A42-4065-8954-85905B380262}"/>
+              </a:ext>
+            </a:extLst>
+          </p:cNvPr>
+          <p:cNvSpPr>
+            <a:spLocks xmlns:a="http://schemas.openxmlformats.org/drawingml/2006/main" noGrp="1"/>
+          </p:cNvSpPr>
+          <p:nvPr/>
+        </p:nvSpPr>
+        <p:spPr>
+          <a:xfrm xmlns:a="http://schemas.openxmlformats.org/drawingml/2006/main">
+            <a:off x="685800" y="1000125"/>
+            <a:ext cx="10820400" cy="38100"/>
+          </a:xfrm>
+          <a:prstGeom xmlns:a="http://schemas.openxmlformats.org/drawingml/2006/main" prst="rect">
+            <a:avLst/>
+          </a:prstGeom>
+          <a:solidFill xmlns:a="http://schemas.openxmlformats.org/drawingml/2006/main">
+            <a:srgbClr val="73CBE8"/>
+          </a:solidFill>
+          <a:ln xmlns:a="http://schemas.openxmlformats.org/drawingml/2006/main" w="0">
+            <a:solidFill>
+              <a:srgbClr val="73CBE8"/>
+            </a:solidFill>
+            <a:prstDash val="solid"/>
+          </a:ln>
+        </p:spPr>
+      </p:sp>
+    </p:spTree>
+    <p:extLst>
+      <p:ext uri="{BB962C8B-B14F-4D97-AF65-F5344CB8AC3E}">
+        <p14:creationId xmlns:p14="http://schemas.microsoft.com/office/powerpoint/2010/main" val="641295815"/>
+      </p:ext>
+    </p:extLst>
+  </p:cSld>
+</p:sld>
+</file>
+
+<file path=ppt/slides/slide20.xml><?xml version="1.0" encoding="utf-8"?>
+<p:sld xmlns:p="http://schemas.openxmlformats.org/presentationml/2006/main">
+  <p:cSld>
+    <p:bg>
+      <p:bgPr>
+        <a:solidFill xmlns:a="http://schemas.openxmlformats.org/drawingml/2006/main">
+          <a:srgbClr val="FFFFFF"/>
+        </a:solidFill>
+      </p:bgPr>
+    </p:bg>
+    <p:spTree>
+      <p:nvGrpSpPr>
+        <p:cNvPr id="1" name=""/>
+        <p:cNvGrpSpPr/>
+        <p:nvPr/>
+      </p:nvGrpSpPr>
+      <p:grpSpPr>
+        <a:xfrm xmlns:a="http://schemas.openxmlformats.org/drawingml/2006/main"/>
+      </p:grpSpPr>
+      <p:sp>
+        <p:nvSpPr>
+          <p:cNvPr id="1" name="slide-title">
+            <a:extLst xmlns:a="http://schemas.openxmlformats.org/drawingml/2006/main">
+              <a:ext uri="{FF2B5EF4-FFF2-40B4-BE49-F238E27FC236}">
+                <a16:creationId xmlns:a16="http://schemas.microsoft.com/office/drawing/2014/main" id="{4ECE2A21-4400-41C9-93B6-B254057071F5}"/>
+              </a:ext>
+            </a:extLst>
+          </p:cNvPr>
+          <p:cNvSpPr>
+            <a:spLocks xmlns:a="http://schemas.openxmlformats.org/drawingml/2006/main" noGrp="1"/>
+          </p:cNvSpPr>
+          <p:nvPr/>
+        </p:nvSpPr>
+        <p:spPr>
+          <a:xfrm xmlns:a="http://schemas.openxmlformats.org/drawingml/2006/main">
+            <a:off x="685800" y="323850"/>
+            <a:ext cx="10820400" cy="514350"/>
+          </a:xfrm>
+          <a:prstGeom xmlns:a="http://schemas.openxmlformats.org/drawingml/2006/main" prst="rect">
+            <a:avLst/>
+          </a:prstGeom>
+          <a:noFill xmlns:a="http://schemas.openxmlformats.org/drawingml/2006/main"/>
+          <a:ln xmlns:a="http://schemas.openxmlformats.org/drawingml/2006/main" w="0">
+            <a:noFill/>
+            <a:prstDash val="solid"/>
+          </a:ln>
+        </p:spPr>
+        <p:txBody>
+          <a:bodyPr xmlns:a="http://schemas.openxmlformats.org/drawingml/2006/main"/>
+          <a:lstStyle xmlns:a="http://schemas.openxmlformats.org/drawingml/2006/main"/>
+          <a:p xmlns:a="http://schemas.openxmlformats.org/drawingml/2006/main">
+            <a:pPr>
+              <a:buNone/>
+              <a:defRPr sz="2700" b="1">
+                <a:solidFill>
+                  <a:srgbClr val="1F2937"/>
+                </a:solidFill>
+              </a:defRPr>
+            </a:pPr>
+            <a:r>
+              <a:rPr sz="2700" b="1">
+                <a:solidFill>
+                  <a:srgbClr val="1F2937"/>
+                </a:solidFill>
+              </a:rPr>
+              <a:t>How the Plenary Discussion Will Work</a:t>
+            </a:r>
+          </a:p>
+        </p:txBody>
+      </p:sp>
+      <p:sp>
+        <p:nvSpPr>
+          <p:cNvPr id="2" name="header-rule">
+            <a:extLst xmlns:a="http://schemas.openxmlformats.org/drawingml/2006/main">
+              <a:ext uri="{FF2B5EF4-FFF2-40B4-BE49-F238E27FC236}">
+                <a16:creationId xmlns:a16="http://schemas.microsoft.com/office/drawing/2014/main" id="{DBCD3DD8-5A42-4065-8954-85905B380262}"/>
+              </a:ext>
+            </a:extLst>
+          </p:cNvPr>
+          <p:cNvSpPr>
+            <a:spLocks xmlns:a="http://schemas.openxmlformats.org/drawingml/2006/main" noGrp="1"/>
+          </p:cNvSpPr>
+          <p:nvPr/>
+        </p:nvSpPr>
+        <p:spPr>
+          <a:xfrm xmlns:a="http://schemas.openxmlformats.org/drawingml/2006/main">
+            <a:off x="685800" y="1000125"/>
+            <a:ext cx="10820400" cy="38100"/>
+          </a:xfrm>
+          <a:prstGeom xmlns:a="http://schemas.openxmlformats.org/drawingml/2006/main" prst="rect">
+            <a:avLst/>
+          </a:prstGeom>
+          <a:solidFill xmlns:a="http://schemas.openxmlformats.org/drawingml/2006/main">
+            <a:srgbClr val="73CBE8"/>
+          </a:solidFill>
+          <a:ln xmlns:a="http://schemas.openxmlformats.org/drawingml/2006/main" w="0">
+            <a:solidFill>
+              <a:srgbClr val="73CBE8"/>
+            </a:solidFill>
+            <a:prstDash val="solid"/>
+          </a:ln>
+        </p:spPr>
+      </p:sp>
+    </p:spTree>
+    <p:extLst>
+      <p:ext uri="{BB962C8B-B14F-4D97-AF65-F5344CB8AC3E}">
+        <p14:creationId xmlns:p14="http://schemas.microsoft.com/office/powerpoint/2010/main" val="641295815"/>
+      </p:ext>
+    </p:extLst>
+  </p:cSld>
+</p:sld>
+</file>
+
+<file path=ppt/slides/slide21.xml><?xml version="1.0" encoding="utf-8"?>
+<p:sld xmlns:p="http://schemas.openxmlformats.org/presentationml/2006/main">
+  <p:cSld>
+    <p:bg>
+      <p:bgPr>
+        <a:solidFill xmlns:a="http://schemas.openxmlformats.org/drawingml/2006/main">
+          <a:srgbClr val="FFFFFF"/>
+        </a:solidFill>
+      </p:bgPr>
+    </p:bg>
+    <p:spTree>
+      <p:nvGrpSpPr>
+        <p:cNvPr id="1" name=""/>
+        <p:cNvGrpSpPr/>
+        <p:nvPr/>
+      </p:nvGrpSpPr>
+      <p:grpSpPr>
+        <a:xfrm xmlns:a="http://schemas.openxmlformats.org/drawingml/2006/main"/>
+      </p:grpSpPr>
+      <p:sp>
+        <p:nvSpPr>
+          <p:cNvPr id="1" name="slide-title">
+            <a:extLst xmlns:a="http://schemas.openxmlformats.org/drawingml/2006/main">
+              <a:ext uri="{FF2B5EF4-FFF2-40B4-BE49-F238E27FC236}">
+                <a16:creationId xmlns:a16="http://schemas.microsoft.com/office/drawing/2014/main" id="{4ECE2A21-4400-41C9-93B6-B254057071F5}"/>
+              </a:ext>
+            </a:extLst>
+          </p:cNvPr>
+          <p:cNvSpPr>
+            <a:spLocks xmlns:a="http://schemas.openxmlformats.org/drawingml/2006/main" noGrp="1"/>
+          </p:cNvSpPr>
+          <p:nvPr/>
+        </p:nvSpPr>
+        <p:spPr>
+          <a:xfrm xmlns:a="http://schemas.openxmlformats.org/drawingml/2006/main">
+            <a:off x="685800" y="323850"/>
+            <a:ext cx="10820400" cy="514350"/>
+          </a:xfrm>
+          <a:prstGeom xmlns:a="http://schemas.openxmlformats.org/drawingml/2006/main" prst="rect">
+            <a:avLst/>
+          </a:prstGeom>
+          <a:noFill xmlns:a="http://schemas.openxmlformats.org/drawingml/2006/main"/>
+          <a:ln xmlns:a="http://schemas.openxmlformats.org/drawingml/2006/main" w="0">
+            <a:noFill/>
+            <a:prstDash val="solid"/>
+          </a:ln>
+        </p:spPr>
+        <p:txBody>
+          <a:bodyPr xmlns:a="http://schemas.openxmlformats.org/drawingml/2006/main"/>
+          <a:lstStyle xmlns:a="http://schemas.openxmlformats.org/drawingml/2006/main"/>
+          <a:p xmlns:a="http://schemas.openxmlformats.org/drawingml/2006/main">
+            <a:pPr>
+              <a:buNone/>
+              <a:defRPr sz="2700" b="1">
+                <a:solidFill>
+                  <a:srgbClr val="1F2937"/>
+                </a:solidFill>
+              </a:defRPr>
+            </a:pPr>
+            <a:r>
+              <a:rPr sz="2700" b="1">
+                <a:solidFill>
+                  <a:srgbClr val="1F2937"/>
+                </a:solidFill>
+              </a:rPr>
+              <a:t>Theme 1: Change in Everyday Life</a:t>
+            </a:r>
+          </a:p>
+        </p:txBody>
+      </p:sp>
+      <p:sp>
+        <p:nvSpPr>
+          <p:cNvPr id="2" name="header-rule">
+            <a:extLst xmlns:a="http://schemas.openxmlformats.org/drawingml/2006/main">
+              <a:ext uri="{FF2B5EF4-FFF2-40B4-BE49-F238E27FC236}">
+                <a16:creationId xmlns:a16="http://schemas.microsoft.com/office/drawing/2014/main" id="{DBCD3DD8-5A42-4065-8954-85905B380262}"/>
+              </a:ext>
+            </a:extLst>
+          </p:cNvPr>
+          <p:cNvSpPr>
+            <a:spLocks xmlns:a="http://schemas.openxmlformats.org/drawingml/2006/main" noGrp="1"/>
+          </p:cNvSpPr>
+          <p:nvPr/>
+        </p:nvSpPr>
+        <p:spPr>
+          <a:xfrm xmlns:a="http://schemas.openxmlformats.org/drawingml/2006/main">
+            <a:off x="685800" y="1000125"/>
+            <a:ext cx="10820400" cy="38100"/>
+          </a:xfrm>
+          <a:prstGeom xmlns:a="http://schemas.openxmlformats.org/drawingml/2006/main" prst="rect">
+            <a:avLst/>
+          </a:prstGeom>
+          <a:solidFill xmlns:a="http://schemas.openxmlformats.org/drawingml/2006/main">
+            <a:srgbClr val="73CBE8"/>
+          </a:solidFill>
+          <a:ln xmlns:a="http://schemas.openxmlformats.org/drawingml/2006/main" w="0">
+            <a:solidFill>
+              <a:srgbClr val="73CBE8"/>
+            </a:solidFill>
+            <a:prstDash val="solid"/>
+          </a:ln>
+        </p:spPr>
+      </p:sp>
+    </p:spTree>
+    <p:extLst>
+      <p:ext uri="{BB962C8B-B14F-4D97-AF65-F5344CB8AC3E}">
+        <p14:creationId xmlns:p14="http://schemas.microsoft.com/office/powerpoint/2010/main" val="641295815"/>
+      </p:ext>
+    </p:extLst>
+  </p:cSld>
+</p:sld>
+</file>
+
+<file path=ppt/slides/slide22.xml><?xml version="1.0" encoding="utf-8"?>
+<p:sld xmlns:p="http://schemas.openxmlformats.org/presentationml/2006/main">
+  <p:cSld>
+    <p:bg>
+      <p:bgPr>
+        <a:solidFill xmlns:a="http://schemas.openxmlformats.org/drawingml/2006/main">
+          <a:srgbClr val="FFFFFF"/>
+        </a:solidFill>
+      </p:bgPr>
+    </p:bg>
+    <p:spTree>
+      <p:nvGrpSpPr>
+        <p:cNvPr id="1" name=""/>
+        <p:cNvGrpSpPr/>
+        <p:nvPr/>
+      </p:nvGrpSpPr>
+      <p:grpSpPr>
+        <a:xfrm xmlns:a="http://schemas.openxmlformats.org/drawingml/2006/main"/>
+      </p:grpSpPr>
+      <p:sp>
+        <p:nvSpPr>
+          <p:cNvPr id="1" name="slide-title">
+            <a:extLst xmlns:a="http://schemas.openxmlformats.org/drawingml/2006/main">
+              <a:ext uri="{FF2B5EF4-FFF2-40B4-BE49-F238E27FC236}">
+                <a16:creationId xmlns:a16="http://schemas.microsoft.com/office/drawing/2014/main" id="{4ECE2A21-4400-41C9-93B6-B254057071F5}"/>
+              </a:ext>
+            </a:extLst>
+          </p:cNvPr>
+          <p:cNvSpPr>
+            <a:spLocks xmlns:a="http://schemas.openxmlformats.org/drawingml/2006/main" noGrp="1"/>
+          </p:cNvSpPr>
+          <p:nvPr/>
+        </p:nvSpPr>
+        <p:spPr>
+          <a:xfrm xmlns:a="http://schemas.openxmlformats.org/drawingml/2006/main">
+            <a:off x="685800" y="323850"/>
+            <a:ext cx="10820400" cy="514350"/>
+          </a:xfrm>
+          <a:prstGeom xmlns:a="http://schemas.openxmlformats.org/drawingml/2006/main" prst="rect">
+            <a:avLst/>
+          </a:prstGeom>
+          <a:noFill xmlns:a="http://schemas.openxmlformats.org/drawingml/2006/main"/>
+          <a:ln xmlns:a="http://schemas.openxmlformats.org/drawingml/2006/main" w="0">
+            <a:noFill/>
+            <a:prstDash val="solid"/>
+          </a:ln>
+        </p:spPr>
+        <p:txBody>
+          <a:bodyPr xmlns:a="http://schemas.openxmlformats.org/drawingml/2006/main"/>
+          <a:lstStyle xmlns:a="http://schemas.openxmlformats.org/drawingml/2006/main"/>
+          <a:p xmlns:a="http://schemas.openxmlformats.org/drawingml/2006/main">
+            <a:pPr>
+              <a:buNone/>
+              <a:defRPr sz="2700" b="1">
+                <a:solidFill>
+                  <a:srgbClr val="1F2937"/>
+                </a:solidFill>
+              </a:defRPr>
+            </a:pPr>
+            <a:r>
+              <a:rPr sz="2700" b="1">
+                <a:solidFill>
+                  <a:srgbClr val="1F2937"/>
+                </a:solidFill>
+              </a:rPr>
+              <a:t>Theme 2: How Quantum Technologies Might Contribute</a:t>
+            </a:r>
+          </a:p>
+        </p:txBody>
+      </p:sp>
+      <p:sp>
+        <p:nvSpPr>
+          <p:cNvPr id="2" name="header-rule">
+            <a:extLst xmlns:a="http://schemas.openxmlformats.org/drawingml/2006/main">
+              <a:ext uri="{FF2B5EF4-FFF2-40B4-BE49-F238E27FC236}">
+                <a16:creationId xmlns:a16="http://schemas.microsoft.com/office/drawing/2014/main" id="{DBCD3DD8-5A42-4065-8954-85905B380262}"/>
+              </a:ext>
+            </a:extLst>
+          </p:cNvPr>
+          <p:cNvSpPr>
+            <a:spLocks xmlns:a="http://schemas.openxmlformats.org/drawingml/2006/main" noGrp="1"/>
+          </p:cNvSpPr>
+          <p:nvPr/>
+        </p:nvSpPr>
+        <p:spPr>
+          <a:xfrm xmlns:a="http://schemas.openxmlformats.org/drawingml/2006/main">
+            <a:off x="685800" y="1000125"/>
+            <a:ext cx="10820400" cy="38100"/>
+          </a:xfrm>
+          <a:prstGeom xmlns:a="http://schemas.openxmlformats.org/drawingml/2006/main" prst="rect">
+            <a:avLst/>
+          </a:prstGeom>
+          <a:solidFill xmlns:a="http://schemas.openxmlformats.org/drawingml/2006/main">
+            <a:srgbClr val="73CBE8"/>
+          </a:solidFill>
+          <a:ln xmlns:a="http://schemas.openxmlformats.org/drawingml/2006/main" w="0">
+            <a:solidFill>
+              <a:srgbClr val="73CBE8"/>
+            </a:solidFill>
+            <a:prstDash val="solid"/>
+          </a:ln>
+        </p:spPr>
+      </p:sp>
+    </p:spTree>
+    <p:extLst>
+      <p:ext uri="{BB962C8B-B14F-4D97-AF65-F5344CB8AC3E}">
+        <p14:creationId xmlns:p14="http://schemas.microsoft.com/office/powerpoint/2010/main" val="641295815"/>
+      </p:ext>
+    </p:extLst>
+  </p:cSld>
+</p:sld>
+</file>
+
+<file path=ppt/slides/slide23.xml><?xml version="1.0" encoding="utf-8"?>
+<p:sld xmlns:p="http://schemas.openxmlformats.org/presentationml/2006/main">
+  <p:cSld>
+    <p:bg>
+      <p:bgPr>
+        <a:solidFill xmlns:a="http://schemas.openxmlformats.org/drawingml/2006/main">
+          <a:srgbClr val="FFFFFF"/>
+        </a:solidFill>
+      </p:bgPr>
+    </p:bg>
+    <p:spTree>
+      <p:nvGrpSpPr>
+        <p:cNvPr id="1" name=""/>
+        <p:cNvGrpSpPr/>
+        <p:nvPr/>
+      </p:nvGrpSpPr>
+      <p:grpSpPr>
+        <a:xfrm xmlns:a="http://schemas.openxmlformats.org/drawingml/2006/main"/>
+      </p:grpSpPr>
+      <p:sp>
+        <p:nvSpPr>
+          <p:cNvPr id="1" name="slide-title">
+            <a:extLst xmlns:a="http://schemas.openxmlformats.org/drawingml/2006/main">
+              <a:ext uri="{FF2B5EF4-FFF2-40B4-BE49-F238E27FC236}">
+                <a16:creationId xmlns:a16="http://schemas.microsoft.com/office/drawing/2014/main" id="{4ECE2A21-4400-41C9-93B6-B254057071F5}"/>
+              </a:ext>
+            </a:extLst>
+          </p:cNvPr>
+          <p:cNvSpPr>
+            <a:spLocks xmlns:a="http://schemas.openxmlformats.org/drawingml/2006/main" noGrp="1"/>
+          </p:cNvSpPr>
+          <p:nvPr/>
+        </p:nvSpPr>
+        <p:spPr>
+          <a:xfrm xmlns:a="http://schemas.openxmlformats.org/drawingml/2006/main">
+            <a:off x="685800" y="323850"/>
+            <a:ext cx="10820400" cy="514350"/>
+          </a:xfrm>
+          <a:prstGeom xmlns:a="http://schemas.openxmlformats.org/drawingml/2006/main" prst="rect">
+            <a:avLst/>
+          </a:prstGeom>
+          <a:noFill xmlns:a="http://schemas.openxmlformats.org/drawingml/2006/main"/>
+          <a:ln xmlns:a="http://schemas.openxmlformats.org/drawingml/2006/main" w="0">
+            <a:noFill/>
+            <a:prstDash val="solid"/>
+          </a:ln>
+        </p:spPr>
+        <p:txBody>
+          <a:bodyPr xmlns:a="http://schemas.openxmlformats.org/drawingml/2006/main"/>
+          <a:lstStyle xmlns:a="http://schemas.openxmlformats.org/drawingml/2006/main"/>
+          <a:p xmlns:a="http://schemas.openxmlformats.org/drawingml/2006/main">
+            <a:pPr>
+              <a:buNone/>
+              <a:defRPr sz="2700" b="1">
+                <a:solidFill>
+                  <a:srgbClr val="1F2937"/>
+                </a:solidFill>
+              </a:defRPr>
+            </a:pPr>
+            <a:r>
+              <a:rPr sz="2700" b="1">
+                <a:solidFill>
+                  <a:srgbClr val="1F2937"/>
+                </a:solidFill>
+              </a:rPr>
+              <a:t>Theme 3: Why Quantum Capabilities Might Matter</a:t>
+            </a:r>
+          </a:p>
+        </p:txBody>
+      </p:sp>
+      <p:sp>
+        <p:nvSpPr>
+          <p:cNvPr id="2" name="header-rule">
+            <a:extLst xmlns:a="http://schemas.openxmlformats.org/drawingml/2006/main">
+              <a:ext uri="{FF2B5EF4-FFF2-40B4-BE49-F238E27FC236}">
+                <a16:creationId xmlns:a16="http://schemas.microsoft.com/office/drawing/2014/main" id="{DBCD3DD8-5A42-4065-8954-85905B380262}"/>
+              </a:ext>
+            </a:extLst>
+          </p:cNvPr>
+          <p:cNvSpPr>
+            <a:spLocks xmlns:a="http://schemas.openxmlformats.org/drawingml/2006/main" noGrp="1"/>
+          </p:cNvSpPr>
+          <p:nvPr/>
+        </p:nvSpPr>
+        <p:spPr>
+          <a:xfrm xmlns:a="http://schemas.openxmlformats.org/drawingml/2006/main">
+            <a:off x="685800" y="1000125"/>
+            <a:ext cx="10820400" cy="38100"/>
+          </a:xfrm>
+          <a:prstGeom xmlns:a="http://schemas.openxmlformats.org/drawingml/2006/main" prst="rect">
+            <a:avLst/>
+          </a:prstGeom>
+          <a:solidFill xmlns:a="http://schemas.openxmlformats.org/drawingml/2006/main">
+            <a:srgbClr val="73CBE8"/>
+          </a:solidFill>
+          <a:ln xmlns:a="http://schemas.openxmlformats.org/drawingml/2006/main" w="0">
+            <a:solidFill>
+              <a:srgbClr val="73CBE8"/>
+            </a:solidFill>
+            <a:prstDash val="solid"/>
+          </a:ln>
+        </p:spPr>
+      </p:sp>
+    </p:spTree>
+    <p:extLst>
+      <p:ext uri="{BB962C8B-B14F-4D97-AF65-F5344CB8AC3E}">
+        <p14:creationId xmlns:p14="http://schemas.microsoft.com/office/powerpoint/2010/main" val="641295815"/>
+      </p:ext>
+    </p:extLst>
+  </p:cSld>
+</p:sld>
+</file>
+
+<file path=ppt/slides/slide24.xml><?xml version="1.0" encoding="utf-8"?>
+<p:sld xmlns:p="http://schemas.openxmlformats.org/presentationml/2006/main">
+  <p:cSld>
+    <p:bg>
+      <p:bgPr>
+        <a:solidFill xmlns:a="http://schemas.openxmlformats.org/drawingml/2006/main">
+          <a:srgbClr val="FFFFFF"/>
+        </a:solidFill>
+      </p:bgPr>
+    </p:bg>
+    <p:spTree>
+      <p:nvGrpSpPr>
+        <p:cNvPr id="1" name=""/>
+        <p:cNvGrpSpPr/>
+        <p:nvPr/>
+      </p:nvGrpSpPr>
+      <p:grpSpPr>
+        <a:xfrm xmlns:a="http://schemas.openxmlformats.org/drawingml/2006/main"/>
+      </p:grpSpPr>
+      <p:sp>
+        <p:nvSpPr>
+          <p:cNvPr id="1" name="slide-title">
+            <a:extLst xmlns:a="http://schemas.openxmlformats.org/drawingml/2006/main">
+              <a:ext uri="{FF2B5EF4-FFF2-40B4-BE49-F238E27FC236}">
+                <a16:creationId xmlns:a16="http://schemas.microsoft.com/office/drawing/2014/main" id="{4ECE2A21-4400-41C9-93B6-B254057071F5}"/>
+              </a:ext>
+            </a:extLst>
+          </p:cNvPr>
+          <p:cNvSpPr>
+            <a:spLocks xmlns:a="http://schemas.openxmlformats.org/drawingml/2006/main" noGrp="1"/>
+          </p:cNvSpPr>
+          <p:nvPr/>
+        </p:nvSpPr>
+        <p:spPr>
+          <a:xfrm xmlns:a="http://schemas.openxmlformats.org/drawingml/2006/main">
+            <a:off x="685800" y="323850"/>
+            <a:ext cx="10820400" cy="514350"/>
+          </a:xfrm>
+          <a:prstGeom xmlns:a="http://schemas.openxmlformats.org/drawingml/2006/main" prst="rect">
+            <a:avLst/>
+          </a:prstGeom>
+          <a:noFill xmlns:a="http://schemas.openxmlformats.org/drawingml/2006/main"/>
+          <a:ln xmlns:a="http://schemas.openxmlformats.org/drawingml/2006/main" w="0">
+            <a:noFill/>
+            <a:prstDash val="solid"/>
+          </a:ln>
+        </p:spPr>
+        <p:txBody>
+          <a:bodyPr xmlns:a="http://schemas.openxmlformats.org/drawingml/2006/main"/>
+          <a:lstStyle xmlns:a="http://schemas.openxmlformats.org/drawingml/2006/main"/>
+          <a:p xmlns:a="http://schemas.openxmlformats.org/drawingml/2006/main">
+            <a:pPr>
+              <a:buNone/>
+              <a:defRPr sz="2700" b="1">
+                <a:solidFill>
+                  <a:srgbClr val="1F2937"/>
+                </a:solidFill>
+              </a:defRPr>
+            </a:pPr>
+            <a:r>
+              <a:rPr sz="2700" b="1">
+                <a:solidFill>
+                  <a:srgbClr val="1F2937"/>
+                </a:solidFill>
+              </a:rPr>
+              <a:t>Theme 4: Questions for Further Discussion</a:t>
+            </a:r>
+          </a:p>
+        </p:txBody>
+      </p:sp>
+      <p:sp>
+        <p:nvSpPr>
+          <p:cNvPr id="2" name="header-rule">
+            <a:extLst xmlns:a="http://schemas.openxmlformats.org/drawingml/2006/main">
+              <a:ext uri="{FF2B5EF4-FFF2-40B4-BE49-F238E27FC236}">
+                <a16:creationId xmlns:a16="http://schemas.microsoft.com/office/drawing/2014/main" id="{DBCD3DD8-5A42-4065-8954-85905B380262}"/>
+              </a:ext>
+            </a:extLst>
+          </p:cNvPr>
+          <p:cNvSpPr>
+            <a:spLocks xmlns:a="http://schemas.openxmlformats.org/drawingml/2006/main" noGrp="1"/>
+          </p:cNvSpPr>
+          <p:nvPr/>
+        </p:nvSpPr>
+        <p:spPr>
+          <a:xfrm xmlns:a="http://schemas.openxmlformats.org/drawingml/2006/main">
+            <a:off x="685800" y="1000125"/>
+            <a:ext cx="10820400" cy="38100"/>
+          </a:xfrm>
+          <a:prstGeom xmlns:a="http://schemas.openxmlformats.org/drawingml/2006/main" prst="rect">
+            <a:avLst/>
+          </a:prstGeom>
+          <a:solidFill xmlns:a="http://schemas.openxmlformats.org/drawingml/2006/main">
+            <a:srgbClr val="73CBE8"/>
+          </a:solidFill>
+          <a:ln xmlns:a="http://schemas.openxmlformats.org/drawingml/2006/main" w="0">
+            <a:solidFill>
+              <a:srgbClr val="73CBE8"/>
+            </a:solidFill>
+            <a:prstDash val="solid"/>
+          </a:ln>
+        </p:spPr>
+      </p:sp>
+    </p:spTree>
+    <p:extLst>
+      <p:ext uri="{BB962C8B-B14F-4D97-AF65-F5344CB8AC3E}">
+        <p14:creationId xmlns:p14="http://schemas.microsoft.com/office/powerpoint/2010/main" val="641295815"/>
+      </p:ext>
+    </p:extLst>
+  </p:cSld>
+</p:sld>
+</file>
+
+<file path=ppt/slides/slide25.xml><?xml version="1.0" encoding="utf-8"?>
+<p:sld xmlns:p="http://schemas.openxmlformats.org/presentationml/2006/main">
+  <p:cSld>
+    <p:bg>
+      <p:bgPr>
+        <a:solidFill xmlns:a="http://schemas.openxmlformats.org/drawingml/2006/main">
+          <a:srgbClr val="FFFFFF"/>
+        </a:solidFill>
+      </p:bgPr>
+    </p:bg>
+    <p:spTree>
+      <p:nvGrpSpPr>
+        <p:cNvPr id="1" name=""/>
+        <p:cNvGrpSpPr/>
+        <p:nvPr/>
+      </p:nvGrpSpPr>
+      <p:grpSpPr>
+        <a:xfrm xmlns:a="http://schemas.openxmlformats.org/drawingml/2006/main"/>
+      </p:grpSpPr>
+      <p:sp>
+        <p:nvSpPr>
+          <p:cNvPr id="1" name="slide-title">
+            <a:extLst xmlns:a="http://schemas.openxmlformats.org/drawingml/2006/main">
+              <a:ext uri="{FF2B5EF4-FFF2-40B4-BE49-F238E27FC236}">
+                <a16:creationId xmlns:a16="http://schemas.microsoft.com/office/drawing/2014/main" id="{4ECE2A21-4400-41C9-93B6-B254057071F5}"/>
+              </a:ext>
+            </a:extLst>
+          </p:cNvPr>
+          <p:cNvSpPr>
+            <a:spLocks xmlns:a="http://schemas.openxmlformats.org/drawingml/2006/main" noGrp="1"/>
+          </p:cNvSpPr>
+          <p:nvPr/>
+        </p:nvSpPr>
+        <p:spPr>
+          <a:xfrm xmlns:a="http://schemas.openxmlformats.org/drawingml/2006/main">
+            <a:off x="685800" y="323850"/>
+            <a:ext cx="10820400" cy="514350"/>
+          </a:xfrm>
+          <a:prstGeom xmlns:a="http://schemas.openxmlformats.org/drawingml/2006/main" prst="rect">
+            <a:avLst/>
+          </a:prstGeom>
+          <a:noFill xmlns:a="http://schemas.openxmlformats.org/drawingml/2006/main"/>
+          <a:ln xmlns:a="http://schemas.openxmlformats.org/drawingml/2006/main" w="0">
+            <a:noFill/>
+            <a:prstDash val="solid"/>
+          </a:ln>
+        </p:spPr>
+        <p:txBody>
+          <a:bodyPr xmlns:a="http://schemas.openxmlformats.org/drawingml/2006/main"/>
+          <a:lstStyle xmlns:a="http://schemas.openxmlformats.org/drawingml/2006/main"/>
+          <a:p xmlns:a="http://schemas.openxmlformats.org/drawingml/2006/main">
+            <a:pPr>
+              <a:buNone/>
+              <a:defRPr sz="2700" b="1">
+                <a:solidFill>
+                  <a:srgbClr val="1F2937"/>
+                </a:solidFill>
+              </a:defRPr>
+            </a:pPr>
+            <a:r>
+              <a:rPr sz="2700" b="1">
+                <a:solidFill>
+                  <a:srgbClr val="1F2937"/>
+                </a:solidFill>
+              </a:rPr>
+              <a:t>Recurring Themes</a:t>
+            </a:r>
+          </a:p>
+        </p:txBody>
+      </p:sp>
+      <p:sp>
+        <p:nvSpPr>
+          <p:cNvPr id="2" name="header-rule">
+            <a:extLst xmlns:a="http://schemas.openxmlformats.org/drawingml/2006/main">
+              <a:ext uri="{FF2B5EF4-FFF2-40B4-BE49-F238E27FC236}">
+                <a16:creationId xmlns:a16="http://schemas.microsoft.com/office/drawing/2014/main" id="{DBCD3DD8-5A42-4065-8954-85905B380262}"/>
+              </a:ext>
+            </a:extLst>
+          </p:cNvPr>
+          <p:cNvSpPr>
+            <a:spLocks xmlns:a="http://schemas.openxmlformats.org/drawingml/2006/main" noGrp="1"/>
+          </p:cNvSpPr>
+          <p:nvPr/>
+        </p:nvSpPr>
+        <p:spPr>
+          <a:xfrm xmlns:a="http://schemas.openxmlformats.org/drawingml/2006/main">
+            <a:off x="685800" y="1000125"/>
+            <a:ext cx="10820400" cy="38100"/>
+          </a:xfrm>
+          <a:prstGeom xmlns:a="http://schemas.openxmlformats.org/drawingml/2006/main" prst="rect">
+            <a:avLst/>
+          </a:prstGeom>
+          <a:solidFill xmlns:a="http://schemas.openxmlformats.org/drawingml/2006/main">
+            <a:srgbClr val="73CBE8"/>
+          </a:solidFill>
+          <a:ln xmlns:a="http://schemas.openxmlformats.org/drawingml/2006/main" w="0">
+            <a:solidFill>
+              <a:srgbClr val="73CBE8"/>
+            </a:solidFill>
+            <a:prstDash val="solid"/>
+          </a:ln>
+        </p:spPr>
+      </p:sp>
+    </p:spTree>
+    <p:extLst>
+      <p:ext uri="{BB962C8B-B14F-4D97-AF65-F5344CB8AC3E}">
+        <p14:creationId xmlns:p14="http://schemas.microsoft.com/office/powerpoint/2010/main" val="641295815"/>
+      </p:ext>
+    </p:extLst>
+  </p:cSld>
+</p:sld>
+</file>
+
+<file path=ppt/slides/slide26.xml><?xml version="1.0" encoding="utf-8"?>
+<p:sld xmlns:p="http://schemas.openxmlformats.org/presentationml/2006/main">
+  <p:cSld>
+    <p:bg>
+      <p:bgPr>
+        <a:solidFill xmlns:a="http://schemas.openxmlformats.org/drawingml/2006/main">
+          <a:srgbClr val="FFFFFF"/>
+        </a:solidFill>
+      </p:bgPr>
+    </p:bg>
+    <p:spTree>
+      <p:nvGrpSpPr>
+        <p:cNvPr id="1" name=""/>
+        <p:cNvGrpSpPr/>
+        <p:nvPr/>
+      </p:nvGrpSpPr>
+      <p:grpSpPr>
+        <a:xfrm xmlns:a="http://schemas.openxmlformats.org/drawingml/2006/main"/>
+      </p:grpSpPr>
+      <p:sp>
+        <p:nvSpPr>
+          <p:cNvPr id="1" name="slide-title">
+            <a:extLst xmlns:a="http://schemas.openxmlformats.org/drawingml/2006/main">
+              <a:ext uri="{FF2B5EF4-FFF2-40B4-BE49-F238E27FC236}">
+                <a16:creationId xmlns:a16="http://schemas.microsoft.com/office/drawing/2014/main" id="{4ECE2A21-4400-41C9-93B6-B254057071F5}"/>
+              </a:ext>
+            </a:extLst>
+          </p:cNvPr>
+          <p:cNvSpPr>
+            <a:spLocks xmlns:a="http://schemas.openxmlformats.org/drawingml/2006/main" noGrp="1"/>
+          </p:cNvSpPr>
+          <p:nvPr/>
+        </p:nvSpPr>
+        <p:spPr>
+          <a:xfrm xmlns:a="http://schemas.openxmlformats.org/drawingml/2006/main">
+            <a:off x="685800" y="323850"/>
+            <a:ext cx="10820400" cy="514350"/>
+          </a:xfrm>
+          <a:prstGeom xmlns:a="http://schemas.openxmlformats.org/drawingml/2006/main" prst="rect">
+            <a:avLst/>
+          </a:prstGeom>
+          <a:noFill xmlns:a="http://schemas.openxmlformats.org/drawingml/2006/main"/>
+          <a:ln xmlns:a="http://schemas.openxmlformats.org/drawingml/2006/main" w="0">
+            <a:noFill/>
+            <a:prstDash val="solid"/>
+          </a:ln>
+        </p:spPr>
+        <p:txBody>
+          <a:bodyPr xmlns:a="http://schemas.openxmlformats.org/drawingml/2006/main"/>
+          <a:lstStyle xmlns:a="http://schemas.openxmlformats.org/drawingml/2006/main"/>
+          <a:p xmlns:a="http://schemas.openxmlformats.org/drawingml/2006/main">
+            <a:pPr>
+              <a:buNone/>
+              <a:defRPr sz="2700" b="1">
+                <a:solidFill>
+                  <a:srgbClr val="1F2937"/>
+                </a:solidFill>
+              </a:defRPr>
+            </a:pPr>
+            <a:r>
+              <a:rPr sz="2700" b="1">
+                <a:solidFill>
+                  <a:srgbClr val="1F2937"/>
+                </a:solidFill>
+              </a:rPr>
+              <a:t>Final Poll</a:t>
+            </a:r>
+          </a:p>
+        </p:txBody>
+      </p:sp>
+      <p:sp>
+        <p:nvSpPr>
+          <p:cNvPr id="2" name="header-rule">
+            <a:extLst xmlns:a="http://schemas.openxmlformats.org/drawingml/2006/main">
+              <a:ext uri="{FF2B5EF4-FFF2-40B4-BE49-F238E27FC236}">
+                <a16:creationId xmlns:a16="http://schemas.microsoft.com/office/drawing/2014/main" id="{DBCD3DD8-5A42-4065-8954-85905B380262}"/>
+              </a:ext>
+            </a:extLst>
+          </p:cNvPr>
+          <p:cNvSpPr>
+            <a:spLocks xmlns:a="http://schemas.openxmlformats.org/drawingml/2006/main" noGrp="1"/>
+          </p:cNvSpPr>
+          <p:nvPr/>
+        </p:nvSpPr>
+        <p:spPr>
+          <a:xfrm xmlns:a="http://schemas.openxmlformats.org/drawingml/2006/main">
+            <a:off x="685800" y="1000125"/>
+            <a:ext cx="10820400" cy="38100"/>
+          </a:xfrm>
+          <a:prstGeom xmlns:a="http://schemas.openxmlformats.org/drawingml/2006/main" prst="rect">
+            <a:avLst/>
+          </a:prstGeom>
+          <a:solidFill xmlns:a="http://schemas.openxmlformats.org/drawingml/2006/main">
+            <a:srgbClr val="73CBE8"/>
+          </a:solidFill>
+          <a:ln xmlns:a="http://schemas.openxmlformats.org/drawingml/2006/main" w="0">
+            <a:solidFill>
+              <a:srgbClr val="73CBE8"/>
+            </a:solidFill>
+            <a:prstDash val="solid"/>
+          </a:ln>
+        </p:spPr>
+      </p:sp>
+    </p:spTree>
+    <p:extLst>
+      <p:ext uri="{BB962C8B-B14F-4D97-AF65-F5344CB8AC3E}">
+        <p14:creationId xmlns:p14="http://schemas.microsoft.com/office/powerpoint/2010/main" val="641295815"/>
+      </p:ext>
+    </p:extLst>
+  </p:cSld>
+</p:sld>
+</file>
+
+<file path=ppt/slides/slide27.xml><?xml version="1.0" encoding="utf-8"?>
+<p:sld xmlns:p="http://schemas.openxmlformats.org/presentationml/2006/main">
+  <p:cSld>
+    <p:bg>
+      <p:bgPr>
+        <a:solidFill xmlns:a="http://schemas.openxmlformats.org/drawingml/2006/main">
+          <a:srgbClr val="FFFFFF"/>
+        </a:solidFill>
+      </p:bgPr>
+    </p:bg>
+    <p:spTree>
+      <p:nvGrpSpPr>
+        <p:cNvPr id="1" name=""/>
+        <p:cNvGrpSpPr/>
+        <p:nvPr/>
+      </p:nvGrpSpPr>
+      <p:grpSpPr>
+        <a:xfrm xmlns:a="http://schemas.openxmlformats.org/drawingml/2006/main"/>
+      </p:grpSpPr>
+      <p:sp>
+        <p:nvSpPr>
+          <p:cNvPr id="1" name="slide-title">
+            <a:extLst xmlns:a="http://schemas.openxmlformats.org/drawingml/2006/main">
+              <a:ext uri="{FF2B5EF4-FFF2-40B4-BE49-F238E27FC236}">
+                <a16:creationId xmlns:a16="http://schemas.microsoft.com/office/drawing/2014/main" id="{4ECE2A21-4400-41C9-93B6-B254057071F5}"/>
+              </a:ext>
+            </a:extLst>
+          </p:cNvPr>
+          <p:cNvSpPr>
+            <a:spLocks xmlns:a="http://schemas.openxmlformats.org/drawingml/2006/main" noGrp="1"/>
+          </p:cNvSpPr>
+          <p:nvPr/>
+        </p:nvSpPr>
+        <p:spPr>
+          <a:xfrm xmlns:a="http://schemas.openxmlformats.org/drawingml/2006/main">
+            <a:off x="685800" y="323850"/>
+            <a:ext cx="10820400" cy="514350"/>
+          </a:xfrm>
+          <a:prstGeom xmlns:a="http://schemas.openxmlformats.org/drawingml/2006/main" prst="rect">
+            <a:avLst/>
+          </a:prstGeom>
+          <a:noFill xmlns:a="http://schemas.openxmlformats.org/drawingml/2006/main"/>
+          <a:ln xmlns:a="http://schemas.openxmlformats.org/drawingml/2006/main" w="0">
+            <a:noFill/>
+            <a:prstDash val="solid"/>
+          </a:ln>
+        </p:spPr>
+        <p:txBody>
+          <a:bodyPr xmlns:a="http://schemas.openxmlformats.org/drawingml/2006/main"/>
+          <a:lstStyle xmlns:a="http://schemas.openxmlformats.org/drawingml/2006/main"/>
+          <a:p xmlns:a="http://schemas.openxmlformats.org/drawingml/2006/main">
+            <a:pPr>
+              <a:buNone/>
+              <a:defRPr sz="2700" b="1">
+                <a:solidFill>
+                  <a:srgbClr val="1F2937"/>
+                </a:solidFill>
+              </a:defRPr>
+            </a:pPr>
+            <a:r>
+              <a:rPr sz="2700" b="1">
+                <a:solidFill>
+                  <a:srgbClr val="1F2937"/>
+                </a:solidFill>
+              </a:rPr>
+              <a:t>Final Poll Results and Further Dialogue</a:t>
+            </a:r>
+          </a:p>
+        </p:txBody>
+      </p:sp>
+      <p:sp>
+        <p:nvSpPr>
+          <p:cNvPr id="2" name="header-rule">
+            <a:extLst xmlns:a="http://schemas.openxmlformats.org/drawingml/2006/main">
+              <a:ext uri="{FF2B5EF4-FFF2-40B4-BE49-F238E27FC236}">
+                <a16:creationId xmlns:a16="http://schemas.microsoft.com/office/drawing/2014/main" id="{DBCD3DD8-5A42-4065-8954-85905B380262}"/>
+              </a:ext>
+            </a:extLst>
+          </p:cNvPr>
+          <p:cNvSpPr>
+            <a:spLocks xmlns:a="http://schemas.openxmlformats.org/drawingml/2006/main" noGrp="1"/>
+          </p:cNvSpPr>
+          <p:nvPr/>
+        </p:nvSpPr>
+        <p:spPr>
+          <a:xfrm xmlns:a="http://schemas.openxmlformats.org/drawingml/2006/main">
+            <a:off x="685800" y="1000125"/>
+            <a:ext cx="10820400" cy="38100"/>
+          </a:xfrm>
+          <a:prstGeom xmlns:a="http://schemas.openxmlformats.org/drawingml/2006/main" prst="rect">
+            <a:avLst/>
+          </a:prstGeom>
+          <a:solidFill xmlns:a="http://schemas.openxmlformats.org/drawingml/2006/main">
+            <a:srgbClr val="73CBE8"/>
+          </a:solidFill>
+          <a:ln xmlns:a="http://schemas.openxmlformats.org/drawingml/2006/main" w="0">
+            <a:solidFill>
+              <a:srgbClr val="73CBE8"/>
+            </a:solidFill>
+            <a:prstDash val="solid"/>
+          </a:ln>
+        </p:spPr>
+      </p:sp>
+    </p:spTree>
+    <p:extLst>
+      <p:ext uri="{BB962C8B-B14F-4D97-AF65-F5344CB8AC3E}">
+        <p14:creationId xmlns:p14="http://schemas.microsoft.com/office/powerpoint/2010/main" val="641295815"/>
+      </p:ext>
+    </p:extLst>
+  </p:cSld>
+</p:sld>
+</file>
+
+<file path=ppt/slides/slide28.xml><?xml version="1.0" encoding="utf-8"?>
+<p:sld xmlns:p="http://schemas.openxmlformats.org/presentationml/2006/main">
+  <p:cSld>
+    <p:bg>
+      <p:bgPr>
+        <a:solidFill xmlns:a="http://schemas.openxmlformats.org/drawingml/2006/main">
+          <a:srgbClr val="FFFFFF"/>
+        </a:solidFill>
+      </p:bgPr>
+    </p:bg>
+    <p:spTree>
+      <p:nvGrpSpPr>
+        <p:cNvPr id="1" name=""/>
+        <p:cNvGrpSpPr/>
+        <p:nvPr/>
+      </p:nvGrpSpPr>
+      <p:grpSpPr>
+        <a:xfrm xmlns:a="http://schemas.openxmlformats.org/drawingml/2006/main"/>
+      </p:grpSpPr>
+      <p:sp>
+        <p:nvSpPr>
+          <p:cNvPr id="1" name="slide-title">
+            <a:extLst xmlns:a="http://schemas.openxmlformats.org/drawingml/2006/main">
+              <a:ext uri="{FF2B5EF4-FFF2-40B4-BE49-F238E27FC236}">
+                <a16:creationId xmlns:a16="http://schemas.microsoft.com/office/drawing/2014/main" id="{4ECE2A21-4400-41C9-93B6-B254057071F5}"/>
+              </a:ext>
+            </a:extLst>
+          </p:cNvPr>
+          <p:cNvSpPr>
+            <a:spLocks xmlns:a="http://schemas.openxmlformats.org/drawingml/2006/main" noGrp="1"/>
+          </p:cNvSpPr>
+          <p:nvPr/>
+        </p:nvSpPr>
+        <p:spPr>
+          <a:xfrm xmlns:a="http://schemas.openxmlformats.org/drawingml/2006/main">
+            <a:off x="685800" y="323850"/>
+            <a:ext cx="10820400" cy="514350"/>
+          </a:xfrm>
+          <a:prstGeom xmlns:a="http://schemas.openxmlformats.org/drawingml/2006/main" prst="rect">
+            <a:avLst/>
+          </a:prstGeom>
+          <a:noFill xmlns:a="http://schemas.openxmlformats.org/drawingml/2006/main"/>
+          <a:ln xmlns:a="http://schemas.openxmlformats.org/drawingml/2006/main" w="0">
+            <a:noFill/>
+            <a:prstDash val="solid"/>
+          </a:ln>
+        </p:spPr>
+        <p:txBody>
+          <a:bodyPr xmlns:a="http://schemas.openxmlformats.org/drawingml/2006/main"/>
+          <a:lstStyle xmlns:a="http://schemas.openxmlformats.org/drawingml/2006/main"/>
+          <a:p xmlns:a="http://schemas.openxmlformats.org/drawingml/2006/main">
+            <a:pPr>
+              <a:buNone/>
+              <a:defRPr sz="2700" b="1">
+                <a:solidFill>
+                  <a:srgbClr val="1F2937"/>
+                </a:solidFill>
+              </a:defRPr>
+            </a:pPr>
+            <a:r>
+              <a:rPr sz="2700" b="1">
+                <a:solidFill>
+                  <a:srgbClr val="1F2937"/>
+                </a:solidFill>
+              </a:rPr>
+              <a:t>What We Discovered Today</a:t>
+            </a:r>
+          </a:p>
+        </p:txBody>
+      </p:sp>
+      <p:sp>
+        <p:nvSpPr>
+          <p:cNvPr id="2" name="header-rule">
+            <a:extLst xmlns:a="http://schemas.openxmlformats.org/drawingml/2006/main">
+              <a:ext uri="{FF2B5EF4-FFF2-40B4-BE49-F238E27FC236}">
+                <a16:creationId xmlns:a16="http://schemas.microsoft.com/office/drawing/2014/main" id="{DBCD3DD8-5A42-4065-8954-85905B380262}"/>
+              </a:ext>
+            </a:extLst>
+          </p:cNvPr>
+          <p:cNvSpPr>
+            <a:spLocks xmlns:a="http://schemas.openxmlformats.org/drawingml/2006/main" noGrp="1"/>
+          </p:cNvSpPr>
+          <p:nvPr/>
+        </p:nvSpPr>
+        <p:spPr>
+          <a:xfrm xmlns:a="http://schemas.openxmlformats.org/drawingml/2006/main">
+            <a:off x="685800" y="1000125"/>
+            <a:ext cx="10820400" cy="38100"/>
+          </a:xfrm>
+          <a:prstGeom xmlns:a="http://schemas.openxmlformats.org/drawingml/2006/main" prst="rect">
+            <a:avLst/>
+          </a:prstGeom>
+          <a:solidFill xmlns:a="http://schemas.openxmlformats.org/drawingml/2006/main">
+            <a:srgbClr val="73CBE8"/>
+          </a:solidFill>
+          <a:ln xmlns:a="http://schemas.openxmlformats.org/drawingml/2006/main" w="0">
+            <a:solidFill>
+              <a:srgbClr val="73CBE8"/>
+            </a:solidFill>
+            <a:prstDash val="solid"/>
+          </a:ln>
+        </p:spPr>
+      </p:sp>
+    </p:spTree>
+    <p:extLst>
+      <p:ext uri="{BB962C8B-B14F-4D97-AF65-F5344CB8AC3E}">
+        <p14:creationId xmlns:p14="http://schemas.microsoft.com/office/powerpoint/2010/main" val="641295815"/>
+      </p:ext>
+    </p:extLst>
+  </p:cSld>
+</p:sld>
+</file>
+
+<file path=ppt/slides/slide29.xml><?xml version="1.0" encoding="utf-8"?>
+<p:sld xmlns:p="http://schemas.openxmlformats.org/presentationml/2006/main">
+  <p:cSld>
+    <p:bg>
+      <p:bgPr>
+        <a:solidFill xmlns:a="http://schemas.openxmlformats.org/drawingml/2006/main">
+          <a:srgbClr val="FFFFFF"/>
+        </a:solidFill>
+      </p:bgPr>
+    </p:bg>
+    <p:spTree>
+      <p:nvGrpSpPr>
+        <p:cNvPr id="1" name=""/>
+        <p:cNvGrpSpPr/>
+        <p:nvPr/>
+      </p:nvGrpSpPr>
+      <p:grpSpPr>
+        <a:xfrm xmlns:a="http://schemas.openxmlformats.org/drawingml/2006/main"/>
+      </p:grpSpPr>
+      <p:sp>
+        <p:nvSpPr>
+          <p:cNvPr id="1" name="slide-title">
+            <a:extLst xmlns:a="http://schemas.openxmlformats.org/drawingml/2006/main">
+              <a:ext uri="{FF2B5EF4-FFF2-40B4-BE49-F238E27FC236}">
+                <a16:creationId xmlns:a16="http://schemas.microsoft.com/office/drawing/2014/main" id="{4ECE2A21-4400-41C9-93B6-B254057071F5}"/>
+              </a:ext>
+            </a:extLst>
+          </p:cNvPr>
+          <p:cNvSpPr>
+            <a:spLocks xmlns:a="http://schemas.openxmlformats.org/drawingml/2006/main" noGrp="1"/>
+          </p:cNvSpPr>
+          <p:nvPr/>
+        </p:nvSpPr>
+        <p:spPr>
+          <a:xfrm xmlns:a="http://schemas.openxmlformats.org/drawingml/2006/main">
+            <a:off x="685800" y="323850"/>
+            <a:ext cx="10820400" cy="514350"/>
+          </a:xfrm>
+          <a:prstGeom xmlns:a="http://schemas.openxmlformats.org/drawingml/2006/main" prst="rect">
+            <a:avLst/>
+          </a:prstGeom>
+          <a:noFill xmlns:a="http://schemas.openxmlformats.org/drawingml/2006/main"/>
+          <a:ln xmlns:a="http://schemas.openxmlformats.org/drawingml/2006/main" w="0">
+            <a:noFill/>
+            <a:prstDash val="solid"/>
+          </a:ln>
+        </p:spPr>
+        <p:txBody>
+          <a:bodyPr xmlns:a="http://schemas.openxmlformats.org/drawingml/2006/main"/>
+          <a:lstStyle xmlns:a="http://schemas.openxmlformats.org/drawingml/2006/main"/>
+          <a:p xmlns:a="http://schemas.openxmlformats.org/drawingml/2006/main">
+            <a:pPr>
+              <a:buNone/>
+              <a:defRPr sz="2700" b="1">
+                <a:solidFill>
+                  <a:srgbClr val="1F2937"/>
+                </a:solidFill>
+              </a:defRPr>
+            </a:pPr>
+            <a:r>
+              <a:rPr sz="2700" b="1">
+                <a:solidFill>
+                  <a:srgbClr val="1F2937"/>
+                </a:solidFill>
+              </a:rPr>
+              <a:t>One Thing to Explore Next</a:t>
+            </a:r>
+          </a:p>
+        </p:txBody>
+      </p:sp>
+      <p:sp>
+        <p:nvSpPr>
+          <p:cNvPr id="2" name="header-rule">
+            <a:extLst xmlns:a="http://schemas.openxmlformats.org/drawingml/2006/main">
+              <a:ext uri="{FF2B5EF4-FFF2-40B4-BE49-F238E27FC236}">
+                <a16:creationId xmlns:a16="http://schemas.microsoft.com/office/drawing/2014/main" id="{DBCD3DD8-5A42-4065-8954-85905B380262}"/>
+              </a:ext>
+            </a:extLst>
+          </p:cNvPr>
+          <p:cNvSpPr>
+            <a:spLocks xmlns:a="http://schemas.openxmlformats.org/drawingml/2006/main" noGrp="1"/>
+          </p:cNvSpPr>
+          <p:nvPr/>
+        </p:nvSpPr>
+        <p:spPr>
+          <a:xfrm xmlns:a="http://schemas.openxmlformats.org/drawingml/2006/main">
+            <a:off x="685800" y="1000125"/>
+            <a:ext cx="10820400" cy="38100"/>
+          </a:xfrm>
+          <a:prstGeom xmlns:a="http://schemas.openxmlformats.org/drawingml/2006/main" prst="rect">
+            <a:avLst/>
+          </a:prstGeom>
+          <a:solidFill xmlns:a="http://schemas.openxmlformats.org/drawingml/2006/main">
+            <a:srgbClr val="73CBE8"/>
+          </a:solidFill>
+          <a:ln xmlns:a="http://schemas.openxmlformats.org/drawingml/2006/main" w="0">
+            <a:solidFill>
+              <a:srgbClr val="73CBE8"/>
+            </a:solidFill>
+            <a:prstDash val="solid"/>
+          </a:ln>
+        </p:spPr>
+      </p:sp>
+    </p:spTree>
+    <p:extLst>
+      <p:ext uri="{BB962C8B-B14F-4D97-AF65-F5344CB8AC3E}">
+        <p14:creationId xmlns:p14="http://schemas.microsoft.com/office/powerpoint/2010/main" val="641295815"/>
+      </p:ext>
+    </p:extLst>
+  </p:cSld>
+</p:sld>
+</file>
+
+<file path=ppt/slides/slide3.xml><?xml version="1.0" encoding="utf-8"?>
+<p:sld xmlns:p="http://schemas.openxmlformats.org/presentationml/2006/main">
+  <p:cSld>
+    <p:bg>
+      <p:bgPr>
+        <a:solidFill xmlns:a="http://schemas.openxmlformats.org/drawingml/2006/main">
+          <a:srgbClr val="FFFFFF"/>
+        </a:solidFill>
+      </p:bgPr>
+    </p:bg>
+    <p:spTree>
+      <p:nvGrpSpPr>
+        <p:cNvPr id="1" name=""/>
+        <p:cNvGrpSpPr/>
+        <p:nvPr/>
+      </p:nvGrpSpPr>
+      <p:grpSpPr>
+        <a:xfrm xmlns:a="http://schemas.openxmlformats.org/drawingml/2006/main"/>
+      </p:grpSpPr>
+      <p:sp>
+        <p:nvSpPr>
+          <p:cNvPr id="1" name="slide-title">
+            <a:extLst xmlns:a="http://schemas.openxmlformats.org/drawingml/2006/main">
+              <a:ext uri="{FF2B5EF4-FFF2-40B4-BE49-F238E27FC236}">
+                <a16:creationId xmlns:a16="http://schemas.microsoft.com/office/drawing/2014/main" id="{4ECE2A21-4400-41C9-93B6-B254057071F5}"/>
+              </a:ext>
+            </a:extLst>
+          </p:cNvPr>
+          <p:cNvSpPr>
+            <a:spLocks xmlns:a="http://schemas.openxmlformats.org/drawingml/2006/main" noGrp="1"/>
+          </p:cNvSpPr>
+          <p:nvPr/>
+        </p:nvSpPr>
+        <p:spPr>
+          <a:xfrm xmlns:a="http://schemas.openxmlformats.org/drawingml/2006/main">
+            <a:off x="685800" y="323850"/>
+            <a:ext cx="10820400" cy="514350"/>
+          </a:xfrm>
+          <a:prstGeom xmlns:a="http://schemas.openxmlformats.org/drawingml/2006/main" prst="rect">
+            <a:avLst/>
+          </a:prstGeom>
+          <a:noFill xmlns:a="http://schemas.openxmlformats.org/drawingml/2006/main"/>
+          <a:ln xmlns:a="http://schemas.openxmlformats.org/drawingml/2006/main" w="0">
+            <a:noFill/>
+            <a:prstDash val="solid"/>
+          </a:ln>
+        </p:spPr>
+        <p:txBody>
+          <a:bodyPr xmlns:a="http://schemas.openxmlformats.org/drawingml/2006/main"/>
+          <a:lstStyle xmlns:a="http://schemas.openxmlformats.org/drawingml/2006/main"/>
+          <a:p xmlns:a="http://schemas.openxmlformats.org/drawingml/2006/main">
+            <a:pPr>
+              <a:buNone/>
+              <a:defRPr sz="2700" b="1">
+                <a:solidFill>
+                  <a:srgbClr val="1F2937"/>
+                </a:solidFill>
+              </a:defRPr>
+            </a:pPr>
+            <a:r>
+              <a:rPr sz="2700" b="1">
+                <a:solidFill>
+                  <a:srgbClr val="1F2937"/>
+                </a:solidFill>
+              </a:rPr>
+              <a:t>Guiding Question</a:t>
+            </a:r>
+          </a:p>
+        </p:txBody>
+      </p:sp>
+      <p:sp>
+        <p:nvSpPr>
+          <p:cNvPr id="2" name="header-rule">
+            <a:extLst xmlns:a="http://schemas.openxmlformats.org/drawingml/2006/main">
+              <a:ext uri="{FF2B5EF4-FFF2-40B4-BE49-F238E27FC236}">
+                <a16:creationId xmlns:a16="http://schemas.microsoft.com/office/drawing/2014/main" id="{DBCD3DD8-5A42-4065-8954-85905B380262}"/>
+              </a:ext>
+            </a:extLst>
+          </p:cNvPr>
+          <p:cNvSpPr>
+            <a:spLocks xmlns:a="http://schemas.openxmlformats.org/drawingml/2006/main" noGrp="1"/>
+          </p:cNvSpPr>
+          <p:nvPr/>
+        </p:nvSpPr>
+        <p:spPr>
+          <a:xfrm xmlns:a="http://schemas.openxmlformats.org/drawingml/2006/main">
+            <a:off x="685800" y="1000125"/>
+            <a:ext cx="10820400" cy="38100"/>
+          </a:xfrm>
+          <a:prstGeom xmlns:a="http://schemas.openxmlformats.org/drawingml/2006/main" prst="rect">
+            <a:avLst/>
+          </a:prstGeom>
+          <a:solidFill xmlns:a="http://schemas.openxmlformats.org/drawingml/2006/main">
+            <a:srgbClr val="73CBE8"/>
+          </a:solidFill>
+          <a:ln xmlns:a="http://schemas.openxmlformats.org/drawingml/2006/main" w="0">
+            <a:solidFill>
+              <a:srgbClr val="73CBE8"/>
+            </a:solidFill>
+            <a:prstDash val="solid"/>
+          </a:ln>
+        </p:spPr>
+      </p:sp>
+    </p:spTree>
+    <p:extLst>
+      <p:ext uri="{BB962C8B-B14F-4D97-AF65-F5344CB8AC3E}">
+        <p14:creationId xmlns:p14="http://schemas.microsoft.com/office/powerpoint/2010/main" val="641295815"/>
+      </p:ext>
+    </p:extLst>
+  </p:cSld>
+</p:sld>
+</file>
+
+<file path=ppt/slides/slide30.xml><?xml version="1.0" encoding="utf-8"?>
+<p:sld xmlns:p="http://schemas.openxmlformats.org/presentationml/2006/main">
+  <p:cSld>
+    <p:bg>
+      <p:bgPr>
+        <a:solidFill xmlns:a="http://schemas.openxmlformats.org/drawingml/2006/main">
+          <a:srgbClr val="FFFFFF"/>
+        </a:solidFill>
+      </p:bgPr>
+    </p:bg>
+    <p:spTree>
+      <p:nvGrpSpPr>
+        <p:cNvPr id="1" name=""/>
+        <p:cNvGrpSpPr/>
+        <p:nvPr/>
+      </p:nvGrpSpPr>
+      <p:grpSpPr>
+        <a:xfrm xmlns:a="http://schemas.openxmlformats.org/drawingml/2006/main"/>
+      </p:grpSpPr>
+      <p:sp>
+        <p:nvSpPr>
+          <p:cNvPr id="1" name="slide-title">
+            <a:extLst xmlns:a="http://schemas.openxmlformats.org/drawingml/2006/main">
+              <a:ext uri="{FF2B5EF4-FFF2-40B4-BE49-F238E27FC236}">
+                <a16:creationId xmlns:a16="http://schemas.microsoft.com/office/drawing/2014/main" id="{4ECE2A21-4400-41C9-93B6-B254057071F5}"/>
+              </a:ext>
+            </a:extLst>
+          </p:cNvPr>
+          <p:cNvSpPr>
+            <a:spLocks xmlns:a="http://schemas.openxmlformats.org/drawingml/2006/main" noGrp="1"/>
+          </p:cNvSpPr>
+          <p:nvPr/>
+        </p:nvSpPr>
+        <p:spPr>
+          <a:xfrm xmlns:a="http://schemas.openxmlformats.org/drawingml/2006/main">
+            <a:off x="685800" y="323850"/>
+            <a:ext cx="10820400" cy="514350"/>
+          </a:xfrm>
+          <a:prstGeom xmlns:a="http://schemas.openxmlformats.org/drawingml/2006/main" prst="rect">
+            <a:avLst/>
+          </a:prstGeom>
+          <a:noFill xmlns:a="http://schemas.openxmlformats.org/drawingml/2006/main"/>
+          <a:ln xmlns:a="http://schemas.openxmlformats.org/drawingml/2006/main" w="0">
+            <a:noFill/>
+            <a:prstDash val="solid"/>
+          </a:ln>
+        </p:spPr>
+        <p:txBody>
+          <a:bodyPr xmlns:a="http://schemas.openxmlformats.org/drawingml/2006/main"/>
+          <a:lstStyle xmlns:a="http://schemas.openxmlformats.org/drawingml/2006/main"/>
+          <a:p xmlns:a="http://schemas.openxmlformats.org/drawingml/2006/main">
+            <a:pPr>
+              <a:buNone/>
+              <a:defRPr sz="2700" b="1">
+                <a:solidFill>
+                  <a:srgbClr val="1F2937"/>
+                </a:solidFill>
+              </a:defRPr>
+            </a:pPr>
+            <a:r>
+              <a:rPr sz="2700" b="1">
+                <a:solidFill>
+                  <a:srgbClr val="1F2937"/>
+                </a:solidFill>
+              </a:rPr>
+              <a:t>Returning to the Guiding Question</a:t>
+            </a:r>
+          </a:p>
+        </p:txBody>
+      </p:sp>
+      <p:sp>
+        <p:nvSpPr>
+          <p:cNvPr id="2" name="header-rule">
+            <a:extLst xmlns:a="http://schemas.openxmlformats.org/drawingml/2006/main">
+              <a:ext uri="{FF2B5EF4-FFF2-40B4-BE49-F238E27FC236}">
+                <a16:creationId xmlns:a16="http://schemas.microsoft.com/office/drawing/2014/main" id="{DBCD3DD8-5A42-4065-8954-85905B380262}"/>
+              </a:ext>
+            </a:extLst>
+          </p:cNvPr>
+          <p:cNvSpPr>
+            <a:spLocks xmlns:a="http://schemas.openxmlformats.org/drawingml/2006/main" noGrp="1"/>
+          </p:cNvSpPr>
+          <p:nvPr/>
+        </p:nvSpPr>
+        <p:spPr>
+          <a:xfrm xmlns:a="http://schemas.openxmlformats.org/drawingml/2006/main">
+            <a:off x="685800" y="1000125"/>
+            <a:ext cx="10820400" cy="38100"/>
+          </a:xfrm>
+          <a:prstGeom xmlns:a="http://schemas.openxmlformats.org/drawingml/2006/main" prst="rect">
+            <a:avLst/>
+          </a:prstGeom>
+          <a:solidFill xmlns:a="http://schemas.openxmlformats.org/drawingml/2006/main">
+            <a:srgbClr val="73CBE8"/>
+          </a:solidFill>
+          <a:ln xmlns:a="http://schemas.openxmlformats.org/drawingml/2006/main" w="0">
+            <a:solidFill>
+              <a:srgbClr val="73CBE8"/>
+            </a:solidFill>
+            <a:prstDash val="solid"/>
+          </a:ln>
+        </p:spPr>
+      </p:sp>
+    </p:spTree>
+    <p:extLst>
+      <p:ext uri="{BB962C8B-B14F-4D97-AF65-F5344CB8AC3E}">
+        <p14:creationId xmlns:p14="http://schemas.microsoft.com/office/powerpoint/2010/main" val="641295815"/>
+      </p:ext>
+    </p:extLst>
+  </p:cSld>
+</p:sld>
+</file>
+
+<file path=ppt/slides/slide4.xml><?xml version="1.0" encoding="utf-8"?>
+<p:sld xmlns:p="http://schemas.openxmlformats.org/presentationml/2006/main">
+  <p:cSld>
+    <p:bg>
+      <p:bgPr>
+        <a:solidFill xmlns:a="http://schemas.openxmlformats.org/drawingml/2006/main">
+          <a:srgbClr val="FFFFFF"/>
+        </a:solidFill>
+      </p:bgPr>
+    </p:bg>
+    <p:spTree>
+      <p:nvGrpSpPr>
+        <p:cNvPr id="1" name=""/>
+        <p:cNvGrpSpPr/>
+        <p:nvPr/>
+      </p:nvGrpSpPr>
+      <p:grpSpPr>
+        <a:xfrm xmlns:a="http://schemas.openxmlformats.org/drawingml/2006/main"/>
+      </p:grpSpPr>
+      <p:sp>
+        <p:nvSpPr>
+          <p:cNvPr id="1" name="slide-title">
+            <a:extLst xmlns:a="http://schemas.openxmlformats.org/drawingml/2006/main">
+              <a:ext uri="{FF2B5EF4-FFF2-40B4-BE49-F238E27FC236}">
+                <a16:creationId xmlns:a16="http://schemas.microsoft.com/office/drawing/2014/main" id="{4ECE2A21-4400-41C9-93B6-B254057071F5}"/>
+              </a:ext>
+            </a:extLst>
+          </p:cNvPr>
+          <p:cNvSpPr>
+            <a:spLocks xmlns:a="http://schemas.openxmlformats.org/drawingml/2006/main" noGrp="1"/>
+          </p:cNvSpPr>
+          <p:nvPr/>
+        </p:nvSpPr>
+        <p:spPr>
+          <a:xfrm xmlns:a="http://schemas.openxmlformats.org/drawingml/2006/main">
+            <a:off x="685800" y="323850"/>
+            <a:ext cx="10820400" cy="514350"/>
+          </a:xfrm>
+          <a:prstGeom xmlns:a="http://schemas.openxmlformats.org/drawingml/2006/main" prst="rect">
+            <a:avLst/>
+          </a:prstGeom>
+          <a:noFill xmlns:a="http://schemas.openxmlformats.org/drawingml/2006/main"/>
+          <a:ln xmlns:a="http://schemas.openxmlformats.org/drawingml/2006/main" w="0">
+            <a:noFill/>
+            <a:prstDash val="solid"/>
+          </a:ln>
+        </p:spPr>
+        <p:txBody>
+          <a:bodyPr xmlns:a="http://schemas.openxmlformats.org/drawingml/2006/main"/>
+          <a:lstStyle xmlns:a="http://schemas.openxmlformats.org/drawingml/2006/main"/>
+          <a:p xmlns:a="http://schemas.openxmlformats.org/drawingml/2006/main">
+            <a:pPr>
+              <a:buNone/>
+              <a:defRPr sz="2700" b="1">
+                <a:solidFill>
+                  <a:srgbClr val="1F2937"/>
+                </a:solidFill>
+              </a:defRPr>
+            </a:pPr>
+            <a:r>
+              <a:rPr sz="2700" b="1">
+                <a:solidFill>
+                  <a:srgbClr val="1F2937"/>
+                </a:solidFill>
+              </a:rPr>
+              <a:t>Today's 90-Minute Journey</a:t>
+            </a:r>
+          </a:p>
+        </p:txBody>
+      </p:sp>
+      <p:sp>
+        <p:nvSpPr>
+          <p:cNvPr id="2" name="header-rule">
+            <a:extLst xmlns:a="http://schemas.openxmlformats.org/drawingml/2006/main">
+              <a:ext uri="{FF2B5EF4-FFF2-40B4-BE49-F238E27FC236}">
+                <a16:creationId xmlns:a16="http://schemas.microsoft.com/office/drawing/2014/main" id="{DBCD3DD8-5A42-4065-8954-85905B380262}"/>
+              </a:ext>
+            </a:extLst>
+          </p:cNvPr>
+          <p:cNvSpPr>
+            <a:spLocks xmlns:a="http://schemas.openxmlformats.org/drawingml/2006/main" noGrp="1"/>
+          </p:cNvSpPr>
+          <p:nvPr/>
+        </p:nvSpPr>
+        <p:spPr>
+          <a:xfrm xmlns:a="http://schemas.openxmlformats.org/drawingml/2006/main">
+            <a:off x="685800" y="1000125"/>
+            <a:ext cx="10820400" cy="38100"/>
+          </a:xfrm>
+          <a:prstGeom xmlns:a="http://schemas.openxmlformats.org/drawingml/2006/main" prst="rect">
+            <a:avLst/>
+          </a:prstGeom>
+          <a:solidFill xmlns:a="http://schemas.openxmlformats.org/drawingml/2006/main">
+            <a:srgbClr val="73CBE8"/>
+          </a:solidFill>
+          <a:ln xmlns:a="http://schemas.openxmlformats.org/drawingml/2006/main" w="0">
+            <a:solidFill>
+              <a:srgbClr val="73CBE8"/>
+            </a:solidFill>
+            <a:prstDash val="solid"/>
+          </a:ln>
+        </p:spPr>
+      </p:sp>
+    </p:spTree>
+    <p:extLst>
+      <p:ext uri="{BB962C8B-B14F-4D97-AF65-F5344CB8AC3E}">
+        <p14:creationId xmlns:p14="http://schemas.microsoft.com/office/powerpoint/2010/main" val="641295815"/>
+      </p:ext>
+    </p:extLst>
+  </p:cSld>
+</p:sld>
+</file>
+
+<file path=ppt/slides/slide5.xml><?xml version="1.0" encoding="utf-8"?>
+<p:sld xmlns:p="http://schemas.openxmlformats.org/presentationml/2006/main">
+  <p:cSld>
+    <p:bg>
+      <p:bgPr>
+        <a:solidFill xmlns:a="http://schemas.openxmlformats.org/drawingml/2006/main">
+          <a:srgbClr val="FFFFFF"/>
+        </a:solidFill>
+      </p:bgPr>
+    </p:bg>
+    <p:spTree>
+      <p:nvGrpSpPr>
+        <p:cNvPr id="1" name=""/>
+        <p:cNvGrpSpPr/>
+        <p:nvPr/>
+      </p:nvGrpSpPr>
+      <p:grpSpPr>
+        <a:xfrm xmlns:a="http://schemas.openxmlformats.org/drawingml/2006/main"/>
+      </p:grpSpPr>
+      <p:sp>
+        <p:nvSpPr>
+          <p:cNvPr id="1" name="slide-title">
+            <a:extLst xmlns:a="http://schemas.openxmlformats.org/drawingml/2006/main">
+              <a:ext uri="{FF2B5EF4-FFF2-40B4-BE49-F238E27FC236}">
+                <a16:creationId xmlns:a16="http://schemas.microsoft.com/office/drawing/2014/main" id="{4ECE2A21-4400-41C9-93B6-B254057071F5}"/>
+              </a:ext>
+            </a:extLst>
+          </p:cNvPr>
+          <p:cNvSpPr>
+            <a:spLocks xmlns:a="http://schemas.openxmlformats.org/drawingml/2006/main" noGrp="1"/>
+          </p:cNvSpPr>
+          <p:nvPr/>
+        </p:nvSpPr>
+        <p:spPr>
+          <a:xfrm xmlns:a="http://schemas.openxmlformats.org/drawingml/2006/main">
+            <a:off x="685800" y="323850"/>
+            <a:ext cx="10820400" cy="514350"/>
+          </a:xfrm>
+          <a:prstGeom xmlns:a="http://schemas.openxmlformats.org/drawingml/2006/main" prst="rect">
+            <a:avLst/>
+          </a:prstGeom>
+          <a:noFill xmlns:a="http://schemas.openxmlformats.org/drawingml/2006/main"/>
+          <a:ln xmlns:a="http://schemas.openxmlformats.org/drawingml/2006/main" w="0">
+            <a:noFill/>
+            <a:prstDash val="solid"/>
+          </a:ln>
+        </p:spPr>
+        <p:txBody>
+          <a:bodyPr xmlns:a="http://schemas.openxmlformats.org/drawingml/2006/main"/>
+          <a:lstStyle xmlns:a="http://schemas.openxmlformats.org/drawingml/2006/main"/>
+          <a:p xmlns:a="http://schemas.openxmlformats.org/drawingml/2006/main">
+            <a:pPr>
+              <a:buNone/>
+              <a:defRPr sz="2700" b="1">
+                <a:solidFill>
+                  <a:srgbClr val="1F2937"/>
+                </a:solidFill>
+              </a:defRPr>
+            </a:pPr>
+            <a:r>
+              <a:rPr sz="2700" b="1">
+                <a:solidFill>
+                  <a:srgbClr val="1F2937"/>
+                </a:solidFill>
+              </a:rPr>
+              <a:t>Opening Poll</a:t>
+            </a:r>
+          </a:p>
+        </p:txBody>
+      </p:sp>
+      <p:sp>
+        <p:nvSpPr>
+          <p:cNvPr id="2" name="header-rule">
+            <a:extLst xmlns:a="http://schemas.openxmlformats.org/drawingml/2006/main">
+              <a:ext uri="{FF2B5EF4-FFF2-40B4-BE49-F238E27FC236}">
+                <a16:creationId xmlns:a16="http://schemas.microsoft.com/office/drawing/2014/main" id="{DBCD3DD8-5A42-4065-8954-85905B380262}"/>
+              </a:ext>
+            </a:extLst>
+          </p:cNvPr>
+          <p:cNvSpPr>
+            <a:spLocks xmlns:a="http://schemas.openxmlformats.org/drawingml/2006/main" noGrp="1"/>
+          </p:cNvSpPr>
+          <p:nvPr/>
+        </p:nvSpPr>
+        <p:spPr>
+          <a:xfrm xmlns:a="http://schemas.openxmlformats.org/drawingml/2006/main">
+            <a:off x="685800" y="1000125"/>
+            <a:ext cx="10820400" cy="38100"/>
+          </a:xfrm>
+          <a:prstGeom xmlns:a="http://schemas.openxmlformats.org/drawingml/2006/main" prst="rect">
+            <a:avLst/>
+          </a:prstGeom>
+          <a:solidFill xmlns:a="http://schemas.openxmlformats.org/drawingml/2006/main">
+            <a:srgbClr val="73CBE8"/>
+          </a:solidFill>
+          <a:ln xmlns:a="http://schemas.openxmlformats.org/drawingml/2006/main" w="0">
+            <a:solidFill>
+              <a:srgbClr val="73CBE8"/>
+            </a:solidFill>
+            <a:prstDash val="solid"/>
+          </a:ln>
+        </p:spPr>
+      </p:sp>
+    </p:spTree>
+    <p:extLst>
+      <p:ext uri="{BB962C8B-B14F-4D97-AF65-F5344CB8AC3E}">
+        <p14:creationId xmlns:p14="http://schemas.microsoft.com/office/powerpoint/2010/main" val="641295815"/>
+      </p:ext>
+    </p:extLst>
+  </p:cSld>
+</p:sld>
+</file>
+
+<file path=ppt/slides/slide6.xml><?xml version="1.0" encoding="utf-8"?>
+<p:sld xmlns:p="http://schemas.openxmlformats.org/presentationml/2006/main">
+  <p:cSld>
+    <p:bg>
+      <p:bgPr>
+        <a:solidFill xmlns:a="http://schemas.openxmlformats.org/drawingml/2006/main">
+          <a:srgbClr val="FFFFFF"/>
+        </a:solidFill>
+      </p:bgPr>
+    </p:bg>
+    <p:spTree>
+      <p:nvGrpSpPr>
+        <p:cNvPr id="1" name=""/>
+        <p:cNvGrpSpPr/>
+        <p:nvPr/>
+      </p:nvGrpSpPr>
+      <p:grpSpPr>
+        <a:xfrm xmlns:a="http://schemas.openxmlformats.org/drawingml/2006/main"/>
+      </p:grpSpPr>
+      <p:sp>
+        <p:nvSpPr>
+          <p:cNvPr id="1" name="slide-title">
+            <a:extLst xmlns:a="http://schemas.openxmlformats.org/drawingml/2006/main">
+              <a:ext uri="{FF2B5EF4-FFF2-40B4-BE49-F238E27FC236}">
+                <a16:creationId xmlns:a16="http://schemas.microsoft.com/office/drawing/2014/main" id="{4ECE2A21-4400-41C9-93B6-B254057071F5}"/>
+              </a:ext>
+            </a:extLst>
+          </p:cNvPr>
+          <p:cNvSpPr>
+            <a:spLocks xmlns:a="http://schemas.openxmlformats.org/drawingml/2006/main" noGrp="1"/>
+          </p:cNvSpPr>
+          <p:nvPr/>
+        </p:nvSpPr>
+        <p:spPr>
+          <a:xfrm xmlns:a="http://schemas.openxmlformats.org/drawingml/2006/main">
+            <a:off x="685800" y="323850"/>
+            <a:ext cx="10820400" cy="514350"/>
+          </a:xfrm>
+          <a:prstGeom xmlns:a="http://schemas.openxmlformats.org/drawingml/2006/main" prst="rect">
+            <a:avLst/>
+          </a:prstGeom>
+          <a:noFill xmlns:a="http://schemas.openxmlformats.org/drawingml/2006/main"/>
+          <a:ln xmlns:a="http://schemas.openxmlformats.org/drawingml/2006/main" w="0">
+            <a:noFill/>
+            <a:prstDash val="solid"/>
+          </a:ln>
+        </p:spPr>
+        <p:txBody>
+          <a:bodyPr xmlns:a="http://schemas.openxmlformats.org/drawingml/2006/main"/>
+          <a:lstStyle xmlns:a="http://schemas.openxmlformats.org/drawingml/2006/main"/>
+          <a:p xmlns:a="http://schemas.openxmlformats.org/drawingml/2006/main">
+            <a:pPr>
+              <a:buNone/>
+              <a:defRPr sz="2700" b="1">
+                <a:solidFill>
+                  <a:srgbClr val="1F2937"/>
+                </a:solidFill>
+              </a:defRPr>
+            </a:pPr>
+            <a:r>
+              <a:rPr sz="2700" b="1">
+                <a:solidFill>
+                  <a:srgbClr val="1F2937"/>
+                </a:solidFill>
+              </a:rPr>
+              <a:t>Interests in the Room</a:t>
+            </a:r>
+          </a:p>
+        </p:txBody>
+      </p:sp>
+      <p:sp>
+        <p:nvSpPr>
+          <p:cNvPr id="2" name="header-rule">
+            <a:extLst xmlns:a="http://schemas.openxmlformats.org/drawingml/2006/main">
+              <a:ext uri="{FF2B5EF4-FFF2-40B4-BE49-F238E27FC236}">
+                <a16:creationId xmlns:a16="http://schemas.microsoft.com/office/drawing/2014/main" id="{DBCD3DD8-5A42-4065-8954-85905B380262}"/>
+              </a:ext>
+            </a:extLst>
+          </p:cNvPr>
+          <p:cNvSpPr>
+            <a:spLocks xmlns:a="http://schemas.openxmlformats.org/drawingml/2006/main" noGrp="1"/>
+          </p:cNvSpPr>
+          <p:nvPr/>
+        </p:nvSpPr>
+        <p:spPr>
+          <a:xfrm xmlns:a="http://schemas.openxmlformats.org/drawingml/2006/main">
+            <a:off x="685800" y="1000125"/>
+            <a:ext cx="10820400" cy="38100"/>
+          </a:xfrm>
+          <a:prstGeom xmlns:a="http://schemas.openxmlformats.org/drawingml/2006/main" prst="rect">
+            <a:avLst/>
+          </a:prstGeom>
+          <a:solidFill xmlns:a="http://schemas.openxmlformats.org/drawingml/2006/main">
+            <a:srgbClr val="73CBE8"/>
+          </a:solidFill>
+          <a:ln xmlns:a="http://schemas.openxmlformats.org/drawingml/2006/main" w="0">
+            <a:solidFill>
+              <a:srgbClr val="73CBE8"/>
+            </a:solidFill>
+            <a:prstDash val="solid"/>
+          </a:ln>
+        </p:spPr>
+      </p:sp>
+    </p:spTree>
+    <p:extLst>
+      <p:ext uri="{BB962C8B-B14F-4D97-AF65-F5344CB8AC3E}">
+        <p14:creationId xmlns:p14="http://schemas.microsoft.com/office/powerpoint/2010/main" val="641295815"/>
+      </p:ext>
+    </p:extLst>
+  </p:cSld>
+</p:sld>
+</file>
+
+<file path=ppt/slides/slide7.xml><?xml version="1.0" encoding="utf-8"?>
+<p:sld xmlns:p="http://schemas.openxmlformats.org/presentationml/2006/main">
+  <p:cSld>
+    <p:bg>
+      <p:bgPr>
+        <a:solidFill xmlns:a="http://schemas.openxmlformats.org/drawingml/2006/main">
+          <a:srgbClr val="FFFFFF"/>
+        </a:solidFill>
+      </p:bgPr>
+    </p:bg>
+    <p:spTree>
+      <p:nvGrpSpPr>
+        <p:cNvPr id="1" name=""/>
+        <p:cNvGrpSpPr/>
+        <p:nvPr/>
+      </p:nvGrpSpPr>
+      <p:grpSpPr>
+        <a:xfrm xmlns:a="http://schemas.openxmlformats.org/drawingml/2006/main"/>
+      </p:grpSpPr>
+      <p:sp>
+        <p:nvSpPr>
+          <p:cNvPr id="1" name="slide-title">
+            <a:extLst xmlns:a="http://schemas.openxmlformats.org/drawingml/2006/main">
+              <a:ext uri="{FF2B5EF4-FFF2-40B4-BE49-F238E27FC236}">
+                <a16:creationId xmlns:a16="http://schemas.microsoft.com/office/drawing/2014/main" id="{4ECE2A21-4400-41C9-93B6-B254057071F5}"/>
+              </a:ext>
+            </a:extLst>
+          </p:cNvPr>
+          <p:cNvSpPr>
+            <a:spLocks xmlns:a="http://schemas.openxmlformats.org/drawingml/2006/main" noGrp="1"/>
+          </p:cNvSpPr>
+          <p:nvPr/>
+        </p:nvSpPr>
+        <p:spPr>
+          <a:xfrm xmlns:a="http://schemas.openxmlformats.org/drawingml/2006/main">
+            <a:off x="685800" y="323850"/>
+            <a:ext cx="10820400" cy="514350"/>
+          </a:xfrm>
+          <a:prstGeom xmlns:a="http://schemas.openxmlformats.org/drawingml/2006/main" prst="rect">
+            <a:avLst/>
+          </a:prstGeom>
+          <a:noFill xmlns:a="http://schemas.openxmlformats.org/drawingml/2006/main"/>
+          <a:ln xmlns:a="http://schemas.openxmlformats.org/drawingml/2006/main" w="0">
+            <a:noFill/>
+            <a:prstDash val="solid"/>
+          </a:ln>
+        </p:spPr>
+        <p:txBody>
+          <a:bodyPr xmlns:a="http://schemas.openxmlformats.org/drawingml/2006/main"/>
+          <a:lstStyle xmlns:a="http://schemas.openxmlformats.org/drawingml/2006/main"/>
+          <a:p xmlns:a="http://schemas.openxmlformats.org/drawingml/2006/main">
+            <a:pPr>
+              <a:buNone/>
+              <a:defRPr sz="2700" b="1">
+                <a:solidFill>
+                  <a:srgbClr val="1F2937"/>
+                </a:solidFill>
+              </a:defRPr>
+            </a:pPr>
+            <a:r>
+              <a:rPr sz="2700" b="1">
+                <a:solidFill>
+                  <a:srgbClr val="1F2937"/>
+                </a:solidFill>
+              </a:rPr>
+              <a:t>Technology Assumptions for the Future Stories</a:t>
+            </a:r>
+          </a:p>
+        </p:txBody>
+      </p:sp>
+      <p:sp>
+        <p:nvSpPr>
+          <p:cNvPr id="2" name="header-rule">
+            <a:extLst xmlns:a="http://schemas.openxmlformats.org/drawingml/2006/main">
+              <a:ext uri="{FF2B5EF4-FFF2-40B4-BE49-F238E27FC236}">
+                <a16:creationId xmlns:a16="http://schemas.microsoft.com/office/drawing/2014/main" id="{DBCD3DD8-5A42-4065-8954-85905B380262}"/>
+              </a:ext>
+            </a:extLst>
+          </p:cNvPr>
+          <p:cNvSpPr>
+            <a:spLocks xmlns:a="http://schemas.openxmlformats.org/drawingml/2006/main" noGrp="1"/>
+          </p:cNvSpPr>
+          <p:nvPr/>
+        </p:nvSpPr>
+        <p:spPr>
+          <a:xfrm xmlns:a="http://schemas.openxmlformats.org/drawingml/2006/main">
+            <a:off x="685800" y="1000125"/>
+            <a:ext cx="10820400" cy="38100"/>
+          </a:xfrm>
+          <a:prstGeom xmlns:a="http://schemas.openxmlformats.org/drawingml/2006/main" prst="rect">
+            <a:avLst/>
+          </a:prstGeom>
+          <a:solidFill xmlns:a="http://schemas.openxmlformats.org/drawingml/2006/main">
+            <a:srgbClr val="73CBE8"/>
+          </a:solidFill>
+          <a:ln xmlns:a="http://schemas.openxmlformats.org/drawingml/2006/main" w="0">
+            <a:solidFill>
+              <a:srgbClr val="73CBE8"/>
+            </a:solidFill>
+            <a:prstDash val="solid"/>
+          </a:ln>
+        </p:spPr>
+      </p:sp>
+    </p:spTree>
+    <p:extLst>
+      <p:ext uri="{BB962C8B-B14F-4D97-AF65-F5344CB8AC3E}">
+        <p14:creationId xmlns:p14="http://schemas.microsoft.com/office/powerpoint/2010/main" val="641295815"/>
+      </p:ext>
+    </p:extLst>
+  </p:cSld>
+</p:sld>
+</file>
+
+<file path=ppt/slides/slide8.xml><?xml version="1.0" encoding="utf-8"?>
+<p:sld xmlns:p="http://schemas.openxmlformats.org/presentationml/2006/main">
+  <p:cSld>
+    <p:bg>
+      <p:bgPr>
+        <a:solidFill xmlns:a="http://schemas.openxmlformats.org/drawingml/2006/main">
+          <a:srgbClr val="FFFFFF"/>
+        </a:solidFill>
+      </p:bgPr>
+    </p:bg>
+    <p:spTree>
+      <p:nvGrpSpPr>
+        <p:cNvPr id="1" name=""/>
+        <p:cNvGrpSpPr/>
+        <p:nvPr/>
+      </p:nvGrpSpPr>
+      <p:grpSpPr>
+        <a:xfrm xmlns:a="http://schemas.openxmlformats.org/drawingml/2006/main"/>
+      </p:grpSpPr>
+      <p:sp>
+        <p:nvSpPr>
+          <p:cNvPr id="1" name="slide-title">
+            <a:extLst xmlns:a="http://schemas.openxmlformats.org/drawingml/2006/main">
+              <a:ext uri="{FF2B5EF4-FFF2-40B4-BE49-F238E27FC236}">
+                <a16:creationId xmlns:a16="http://schemas.microsoft.com/office/drawing/2014/main" id="{4ECE2A21-4400-41C9-93B6-B254057071F5}"/>
+              </a:ext>
+            </a:extLst>
+          </p:cNvPr>
+          <p:cNvSpPr>
+            <a:spLocks xmlns:a="http://schemas.openxmlformats.org/drawingml/2006/main" noGrp="1"/>
+          </p:cNvSpPr>
+          <p:nvPr/>
+        </p:nvSpPr>
+        <p:spPr>
+          <a:xfrm xmlns:a="http://schemas.openxmlformats.org/drawingml/2006/main">
+            <a:off x="685800" y="323850"/>
+            <a:ext cx="10820400" cy="514350"/>
+          </a:xfrm>
+          <a:prstGeom xmlns:a="http://schemas.openxmlformats.org/drawingml/2006/main" prst="rect">
+            <a:avLst/>
+          </a:prstGeom>
+          <a:noFill xmlns:a="http://schemas.openxmlformats.org/drawingml/2006/main"/>
+          <a:ln xmlns:a="http://schemas.openxmlformats.org/drawingml/2006/main" w="0">
+            <a:noFill/>
+            <a:prstDash val="solid"/>
+          </a:ln>
+        </p:spPr>
+        <p:txBody>
+          <a:bodyPr xmlns:a="http://schemas.openxmlformats.org/drawingml/2006/main"/>
+          <a:lstStyle xmlns:a="http://schemas.openxmlformats.org/drawingml/2006/main"/>
+          <a:p xmlns:a="http://schemas.openxmlformats.org/drawingml/2006/main">
+            <a:pPr>
+              <a:buNone/>
+              <a:defRPr sz="2700" b="1">
+                <a:solidFill>
+                  <a:srgbClr val="1F2937"/>
+                </a:solidFill>
+              </a:defRPr>
+            </a:pPr>
+            <a:r>
+              <a:rPr sz="2700" b="1">
+                <a:solidFill>
+                  <a:srgbClr val="1F2937"/>
+                </a:solidFill>
+              </a:rPr>
+              <a:t>Why Start with Future Everyday Life?</a:t>
+            </a:r>
+          </a:p>
+        </p:txBody>
+      </p:sp>
+      <p:sp>
+        <p:nvSpPr>
+          <p:cNvPr id="2" name="header-rule">
+            <a:extLst xmlns:a="http://schemas.openxmlformats.org/drawingml/2006/main">
+              <a:ext uri="{FF2B5EF4-FFF2-40B4-BE49-F238E27FC236}">
+                <a16:creationId xmlns:a16="http://schemas.microsoft.com/office/drawing/2014/main" id="{DBCD3DD8-5A42-4065-8954-85905B380262}"/>
+              </a:ext>
+            </a:extLst>
+          </p:cNvPr>
+          <p:cNvSpPr>
+            <a:spLocks xmlns:a="http://schemas.openxmlformats.org/drawingml/2006/main" noGrp="1"/>
+          </p:cNvSpPr>
+          <p:nvPr/>
+        </p:nvSpPr>
+        <p:spPr>
+          <a:xfrm xmlns:a="http://schemas.openxmlformats.org/drawingml/2006/main">
+            <a:off x="685800" y="1000125"/>
+            <a:ext cx="10820400" cy="38100"/>
+          </a:xfrm>
+          <a:prstGeom xmlns:a="http://schemas.openxmlformats.org/drawingml/2006/main" prst="rect">
+            <a:avLst/>
+          </a:prstGeom>
+          <a:solidFill xmlns:a="http://schemas.openxmlformats.org/drawingml/2006/main">
+            <a:srgbClr val="73CBE8"/>
+          </a:solidFill>
+          <a:ln xmlns:a="http://schemas.openxmlformats.org/drawingml/2006/main" w="0">
+            <a:solidFill>
+              <a:srgbClr val="73CBE8"/>
+            </a:solidFill>
+            <a:prstDash val="solid"/>
+          </a:ln>
+        </p:spPr>
+      </p:sp>
+    </p:spTree>
+    <p:extLst>
+      <p:ext uri="{BB962C8B-B14F-4D97-AF65-F5344CB8AC3E}">
+        <p14:creationId xmlns:p14="http://schemas.microsoft.com/office/powerpoint/2010/main" val="641295815"/>
+      </p:ext>
+    </p:extLst>
+  </p:cSld>
+</p:sld>
+</file>
+
+<file path=ppt/slides/slide9.xml><?xml version="1.0" encoding="utf-8"?>
+<p:sld xmlns:p="http://schemas.openxmlformats.org/presentationml/2006/main">
+  <p:cSld>
+    <p:bg>
+      <p:bgPr>
+        <a:solidFill xmlns:a="http://schemas.openxmlformats.org/drawingml/2006/main">
+          <a:srgbClr val="FFFFFF"/>
+        </a:solidFill>
+      </p:bgPr>
+    </p:bg>
+    <p:spTree>
+      <p:nvGrpSpPr>
+        <p:cNvPr id="1" name=""/>
+        <p:cNvGrpSpPr/>
+        <p:nvPr/>
+      </p:nvGrpSpPr>
+      <p:grpSpPr>
+        <a:xfrm xmlns:a="http://schemas.openxmlformats.org/drawingml/2006/main"/>
+      </p:grpSpPr>
+      <p:sp>
+        <p:nvSpPr>
+          <p:cNvPr id="1" name="slide-title">
+            <a:extLst xmlns:a="http://schemas.openxmlformats.org/drawingml/2006/main">
+              <a:ext uri="{FF2B5EF4-FFF2-40B4-BE49-F238E27FC236}">
+                <a16:creationId xmlns:a16="http://schemas.microsoft.com/office/drawing/2014/main" id="{4ECE2A21-4400-41C9-93B6-B254057071F5}"/>
+              </a:ext>
+            </a:extLst>
+          </p:cNvPr>
+          <p:cNvSpPr>
+            <a:spLocks xmlns:a="http://schemas.openxmlformats.org/drawingml/2006/main" noGrp="1"/>
+          </p:cNvSpPr>
+          <p:nvPr/>
+        </p:nvSpPr>
+        <p:spPr>
+          <a:xfrm xmlns:a="http://schemas.openxmlformats.org/drawingml/2006/main">
+            <a:off x="685800" y="323850"/>
+            <a:ext cx="10820400" cy="514350"/>
+          </a:xfrm>
+          <a:prstGeom xmlns:a="http://schemas.openxmlformats.org/drawingml/2006/main" prst="rect">
+            <a:avLst/>
+          </a:prstGeom>
+          <a:noFill xmlns:a="http://schemas.openxmlformats.org/drawingml/2006/main"/>
+          <a:ln xmlns:a="http://schemas.openxmlformats.org/drawingml/2006/main" w="0">
+            <a:noFill/>
+            <a:prstDash val="solid"/>
+          </a:ln>
+        </p:spPr>
+        <p:txBody>
+          <a:bodyPr xmlns:a="http://schemas.openxmlformats.org/drawingml/2006/main"/>
+          <a:lstStyle xmlns:a="http://schemas.openxmlformats.org/drawingml/2006/main"/>
+          <a:p xmlns:a="http://schemas.openxmlformats.org/drawingml/2006/main">
+            <a:pPr>
+              <a:buNone/>
+              <a:defRPr sz="2700" b="1">
+                <a:solidFill>
+                  <a:srgbClr val="1F2937"/>
+                </a:solidFill>
+              </a:defRPr>
+            </a:pPr>
+            <a:r>
+              <a:rPr sz="2700" b="1">
+                <a:solidFill>
+                  <a:srgbClr val="1F2937"/>
+                </a:solidFill>
+              </a:rPr>
+              <a:t>How to Read the Future Stories</a:t>
+            </a:r>
+          </a:p>
+        </p:txBody>
+      </p:sp>
+      <p:sp>
+        <p:nvSpPr>
+          <p:cNvPr id="2" name="header-rule">
+            <a:extLst xmlns:a="http://schemas.openxmlformats.org/drawingml/2006/main">
+              <a:ext uri="{FF2B5EF4-FFF2-40B4-BE49-F238E27FC236}">
+                <a16:creationId xmlns:a16="http://schemas.microsoft.com/office/drawing/2014/main" id="{DBCD3DD8-5A42-4065-8954-85905B380262}"/>
+              </a:ext>
+            </a:extLst>
+          </p:cNvPr>
+          <p:cNvSpPr>
+            <a:spLocks xmlns:a="http://schemas.openxmlformats.org/drawingml/2006/main" noGrp="1"/>
+          </p:cNvSpPr>
+          <p:nvPr/>
+        </p:nvSpPr>
+        <p:spPr>
+          <a:xfrm xmlns:a="http://schemas.openxmlformats.org/drawingml/2006/main">
+            <a:off x="685800" y="1000125"/>
+            <a:ext cx="10820400" cy="38100"/>
+          </a:xfrm>
+          <a:prstGeom xmlns:a="http://schemas.openxmlformats.org/drawingml/2006/main" prst="rect">
+            <a:avLst/>
+          </a:prstGeom>
+          <a:solidFill xmlns:a="http://schemas.openxmlformats.org/drawingml/2006/main">
+            <a:srgbClr val="73CBE8"/>
+          </a:solidFill>
+          <a:ln xmlns:a="http://schemas.openxmlformats.org/drawingml/2006/main" w="0">
+            <a:solidFill>
+              <a:srgbClr val="73CBE8"/>
+            </a:solidFill>
+            <a:prstDash val="solid"/>
+          </a:ln>
+        </p:spPr>
       </p:sp>
     </p:spTree>
     <p:extLst>
